--- a/MCP_Servers_Presentation.pptx
+++ b/MCP_Servers_Presentation.pptx
@@ -5,36 +5,34 @@
     <p:sldMasterId id="2147483648" r:id="rId1"/>
   </p:sldMasterIdLst>
   <p:notesMasterIdLst>
-    <p:notesMasterId r:id="rId29"/>
+    <p:notesMasterId r:id="rId27"/>
   </p:notesMasterIdLst>
   <p:sldIdLst>
     <p:sldId id="2561" r:id="rId2"/>
-    <p:sldId id="261" r:id="rId3"/>
-    <p:sldId id="260" r:id="rId4"/>
-    <p:sldId id="2588" r:id="rId5"/>
-    <p:sldId id="2562" r:id="rId6"/>
-    <p:sldId id="2563" r:id="rId7"/>
-    <p:sldId id="2582" r:id="rId8"/>
-    <p:sldId id="2583" r:id="rId9"/>
-    <p:sldId id="2589" r:id="rId10"/>
-    <p:sldId id="2584" r:id="rId11"/>
-    <p:sldId id="2590" r:id="rId12"/>
-    <p:sldId id="2591" r:id="rId13"/>
-    <p:sldId id="2564" r:id="rId14"/>
-    <p:sldId id="2585" r:id="rId15"/>
-    <p:sldId id="2566" r:id="rId16"/>
-    <p:sldId id="2567" r:id="rId17"/>
-    <p:sldId id="2580" r:id="rId18"/>
-    <p:sldId id="2581" r:id="rId19"/>
-    <p:sldId id="2586" r:id="rId20"/>
-    <p:sldId id="2587" r:id="rId21"/>
-    <p:sldId id="2577" r:id="rId22"/>
-    <p:sldId id="2578" r:id="rId23"/>
-    <p:sldId id="2572" r:id="rId24"/>
-    <p:sldId id="2573" r:id="rId25"/>
-    <p:sldId id="2579" r:id="rId26"/>
-    <p:sldId id="2574" r:id="rId27"/>
-    <p:sldId id="2575" r:id="rId28"/>
+    <p:sldId id="260" r:id="rId3"/>
+    <p:sldId id="258" r:id="rId4"/>
+    <p:sldId id="2562" r:id="rId5"/>
+    <p:sldId id="2563" r:id="rId6"/>
+    <p:sldId id="2582" r:id="rId7"/>
+    <p:sldId id="2583" r:id="rId8"/>
+    <p:sldId id="2589" r:id="rId9"/>
+    <p:sldId id="2584" r:id="rId10"/>
+    <p:sldId id="2590" r:id="rId11"/>
+    <p:sldId id="2591" r:id="rId12"/>
+    <p:sldId id="2564" r:id="rId13"/>
+    <p:sldId id="2585" r:id="rId14"/>
+    <p:sldId id="2566" r:id="rId15"/>
+    <p:sldId id="2567" r:id="rId16"/>
+    <p:sldId id="2580" r:id="rId17"/>
+    <p:sldId id="2581" r:id="rId18"/>
+    <p:sldId id="2586" r:id="rId19"/>
+    <p:sldId id="2587" r:id="rId20"/>
+    <p:sldId id="2578" r:id="rId21"/>
+    <p:sldId id="2572" r:id="rId22"/>
+    <p:sldId id="2573" r:id="rId23"/>
+    <p:sldId id="2579" r:id="rId24"/>
+    <p:sldId id="2574" r:id="rId25"/>
+    <p:sldId id="2575" r:id="rId26"/>
   </p:sldIdLst>
   <p:sldSz cx="12192000" cy="6858000"/>
   <p:notesSz cx="6858000" cy="9144000"/>
@@ -139,9 +137,8 @@
         <p14:section name="Tools in your AI's Toolbox: An Introduction to MCP Servers" id="{A0B2B2BF-23B8-42C4-9D14-74B2C16D1CEB}">
           <p14:sldIdLst>
             <p14:sldId id="2561"/>
-            <p14:sldId id="261"/>
             <p14:sldId id="260"/>
-            <p14:sldId id="2588"/>
+            <p14:sldId id="258"/>
           </p14:sldIdLst>
         </p14:section>
         <p14:section name="Introduction to MCP Servers" id="{FA0C23B1-3AFA-44D2-8FA0-2F6378EA9F6B}">
@@ -170,7 +167,6 @@
             <p14:sldId id="2581"/>
             <p14:sldId id="2586"/>
             <p14:sldId id="2587"/>
-            <p14:sldId id="2577"/>
           </p14:sldIdLst>
         </p14:section>
         <p14:section name="Practical Applications of MCP" id="{448EDF95-677C-4EBE-9128-DC41D5705C6F}">
@@ -2178,753 +2174,6 @@
 </file>
 
 <file path=ppt/diagrams/colors1.xml><?xml version="1.0" encoding="utf-8"?>
-<dgm:colorsDef xmlns:dgm="http://schemas.openxmlformats.org/drawingml/2006/diagram" xmlns:a="http://schemas.openxmlformats.org/drawingml/2006/main" uniqueId="urn:microsoft.com/office/officeart/2005/8/colors/accent1_2">
-  <dgm:title val=""/>
-  <dgm:desc val=""/>
-  <dgm:catLst>
-    <dgm:cat type="accent1" pri="11200"/>
-  </dgm:catLst>
-  <dgm:styleLbl name="node0">
-    <dgm:fillClrLst meth="repeat">
-      <a:schemeClr val="accent1"/>
-    </dgm:fillClrLst>
-    <dgm:linClrLst meth="repeat">
-      <a:schemeClr val="lt1"/>
-    </dgm:linClrLst>
-    <dgm:effectClrLst/>
-    <dgm:txLinClrLst/>
-    <dgm:txFillClrLst/>
-    <dgm:txEffectClrLst/>
-  </dgm:styleLbl>
-  <dgm:styleLbl name="alignNode1">
-    <dgm:fillClrLst meth="repeat">
-      <a:schemeClr val="accent1"/>
-    </dgm:fillClrLst>
-    <dgm:linClrLst meth="repeat">
-      <a:schemeClr val="accent1"/>
-    </dgm:linClrLst>
-    <dgm:effectClrLst/>
-    <dgm:txLinClrLst/>
-    <dgm:txFillClrLst/>
-    <dgm:txEffectClrLst/>
-  </dgm:styleLbl>
-  <dgm:styleLbl name="node1">
-    <dgm:fillClrLst meth="repeat">
-      <a:schemeClr val="accent1"/>
-    </dgm:fillClrLst>
-    <dgm:linClrLst meth="repeat">
-      <a:schemeClr val="lt1"/>
-    </dgm:linClrLst>
-    <dgm:effectClrLst/>
-    <dgm:txLinClrLst/>
-    <dgm:txFillClrLst/>
-    <dgm:txEffectClrLst/>
-  </dgm:styleLbl>
-  <dgm:styleLbl name="lnNode1">
-    <dgm:fillClrLst meth="repeat">
-      <a:schemeClr val="accent1"/>
-    </dgm:fillClrLst>
-    <dgm:linClrLst meth="repeat">
-      <a:schemeClr val="lt1"/>
-    </dgm:linClrLst>
-    <dgm:effectClrLst/>
-    <dgm:txLinClrLst/>
-    <dgm:txFillClrLst/>
-    <dgm:txEffectClrLst/>
-  </dgm:styleLbl>
-  <dgm:styleLbl name="vennNode1">
-    <dgm:fillClrLst meth="repeat">
-      <a:schemeClr val="accent1">
-        <a:alpha val="50000"/>
-      </a:schemeClr>
-    </dgm:fillClrLst>
-    <dgm:linClrLst meth="repeat">
-      <a:schemeClr val="lt1"/>
-    </dgm:linClrLst>
-    <dgm:effectClrLst/>
-    <dgm:txLinClrLst/>
-    <dgm:txFillClrLst/>
-    <dgm:txEffectClrLst/>
-  </dgm:styleLbl>
-  <dgm:styleLbl name="node2">
-    <dgm:fillClrLst meth="repeat">
-      <a:schemeClr val="accent1"/>
-    </dgm:fillClrLst>
-    <dgm:linClrLst meth="repeat">
-      <a:schemeClr val="lt1"/>
-    </dgm:linClrLst>
-    <dgm:effectClrLst/>
-    <dgm:txLinClrLst/>
-    <dgm:txFillClrLst/>
-    <dgm:txEffectClrLst/>
-  </dgm:styleLbl>
-  <dgm:styleLbl name="node3">
-    <dgm:fillClrLst meth="repeat">
-      <a:schemeClr val="accent1"/>
-    </dgm:fillClrLst>
-    <dgm:linClrLst meth="repeat">
-      <a:schemeClr val="lt1"/>
-    </dgm:linClrLst>
-    <dgm:effectClrLst/>
-    <dgm:txLinClrLst/>
-    <dgm:txFillClrLst/>
-    <dgm:txEffectClrLst/>
-  </dgm:styleLbl>
-  <dgm:styleLbl name="node4">
-    <dgm:fillClrLst meth="repeat">
-      <a:schemeClr val="accent1"/>
-    </dgm:fillClrLst>
-    <dgm:linClrLst meth="repeat">
-      <a:schemeClr val="lt1"/>
-    </dgm:linClrLst>
-    <dgm:effectClrLst/>
-    <dgm:txLinClrLst/>
-    <dgm:txFillClrLst/>
-    <dgm:txEffectClrLst/>
-  </dgm:styleLbl>
-  <dgm:styleLbl name="fgImgPlace1">
-    <dgm:fillClrLst meth="repeat">
-      <a:schemeClr val="accent1">
-        <a:tint val="50000"/>
-      </a:schemeClr>
-    </dgm:fillClrLst>
-    <dgm:linClrLst meth="repeat">
-      <a:schemeClr val="lt1"/>
-    </dgm:linClrLst>
-    <dgm:effectClrLst/>
-    <dgm:txLinClrLst/>
-    <dgm:txFillClrLst meth="repeat">
-      <a:schemeClr val="lt1"/>
-    </dgm:txFillClrLst>
-    <dgm:txEffectClrLst/>
-  </dgm:styleLbl>
-  <dgm:styleLbl name="alignImgPlace1">
-    <dgm:fillClrLst meth="repeat">
-      <a:schemeClr val="accent1">
-        <a:tint val="50000"/>
-      </a:schemeClr>
-    </dgm:fillClrLst>
-    <dgm:linClrLst meth="repeat">
-      <a:schemeClr val="lt1"/>
-    </dgm:linClrLst>
-    <dgm:effectClrLst/>
-    <dgm:txLinClrLst/>
-    <dgm:txFillClrLst meth="repeat">
-      <a:schemeClr val="lt1"/>
-    </dgm:txFillClrLst>
-    <dgm:txEffectClrLst/>
-  </dgm:styleLbl>
-  <dgm:styleLbl name="bgImgPlace1">
-    <dgm:fillClrLst meth="repeat">
-      <a:schemeClr val="accent1">
-        <a:tint val="50000"/>
-      </a:schemeClr>
-    </dgm:fillClrLst>
-    <dgm:linClrLst meth="repeat">
-      <a:schemeClr val="lt1"/>
-    </dgm:linClrLst>
-    <dgm:effectClrLst/>
-    <dgm:txLinClrLst/>
-    <dgm:txFillClrLst meth="repeat">
-      <a:schemeClr val="lt1"/>
-    </dgm:txFillClrLst>
-    <dgm:txEffectClrLst/>
-  </dgm:styleLbl>
-  <dgm:styleLbl name="sibTrans2D1">
-    <dgm:fillClrLst meth="repeat">
-      <a:schemeClr val="accent1">
-        <a:tint val="60000"/>
-      </a:schemeClr>
-    </dgm:fillClrLst>
-    <dgm:linClrLst meth="repeat">
-      <a:schemeClr val="accent1">
-        <a:tint val="60000"/>
-      </a:schemeClr>
-    </dgm:linClrLst>
-    <dgm:effectClrLst/>
-    <dgm:txLinClrLst/>
-    <dgm:txFillClrLst/>
-    <dgm:txEffectClrLst/>
-  </dgm:styleLbl>
-  <dgm:styleLbl name="fgSibTrans2D1">
-    <dgm:fillClrLst meth="repeat">
-      <a:schemeClr val="accent1">
-        <a:tint val="60000"/>
-      </a:schemeClr>
-    </dgm:fillClrLst>
-    <dgm:linClrLst meth="repeat">
-      <a:schemeClr val="accent1">
-        <a:tint val="60000"/>
-      </a:schemeClr>
-    </dgm:linClrLst>
-    <dgm:effectClrLst/>
-    <dgm:txLinClrLst/>
-    <dgm:txFillClrLst/>
-    <dgm:txEffectClrLst/>
-  </dgm:styleLbl>
-  <dgm:styleLbl name="bgSibTrans2D1">
-    <dgm:fillClrLst meth="repeat">
-      <a:schemeClr val="accent1">
-        <a:tint val="60000"/>
-      </a:schemeClr>
-    </dgm:fillClrLst>
-    <dgm:linClrLst meth="repeat">
-      <a:schemeClr val="accent1">
-        <a:tint val="60000"/>
-      </a:schemeClr>
-    </dgm:linClrLst>
-    <dgm:effectClrLst/>
-    <dgm:txLinClrLst/>
-    <dgm:txFillClrLst/>
-    <dgm:txEffectClrLst/>
-  </dgm:styleLbl>
-  <dgm:styleLbl name="sibTrans1D1">
-    <dgm:fillClrLst meth="repeat">
-      <a:schemeClr val="accent1"/>
-    </dgm:fillClrLst>
-    <dgm:linClrLst meth="repeat">
-      <a:schemeClr val="accent1"/>
-    </dgm:linClrLst>
-    <dgm:effectClrLst/>
-    <dgm:txLinClrLst/>
-    <dgm:txFillClrLst meth="repeat">
-      <a:schemeClr val="tx1"/>
-    </dgm:txFillClrLst>
-    <dgm:txEffectClrLst/>
-  </dgm:styleLbl>
-  <dgm:styleLbl name="callout">
-    <dgm:fillClrLst meth="repeat">
-      <a:schemeClr val="accent1"/>
-    </dgm:fillClrLst>
-    <dgm:linClrLst meth="repeat">
-      <a:schemeClr val="accent1">
-        <a:tint val="50000"/>
-      </a:schemeClr>
-    </dgm:linClrLst>
-    <dgm:effectClrLst/>
-    <dgm:txLinClrLst/>
-    <dgm:txFillClrLst meth="repeat">
-      <a:schemeClr val="tx1"/>
-    </dgm:txFillClrLst>
-    <dgm:txEffectClrLst/>
-  </dgm:styleLbl>
-  <dgm:styleLbl name="asst0">
-    <dgm:fillClrLst meth="repeat">
-      <a:schemeClr val="accent1"/>
-    </dgm:fillClrLst>
-    <dgm:linClrLst meth="repeat">
-      <a:schemeClr val="lt1"/>
-    </dgm:linClrLst>
-    <dgm:effectClrLst/>
-    <dgm:txLinClrLst/>
-    <dgm:txFillClrLst/>
-    <dgm:txEffectClrLst/>
-  </dgm:styleLbl>
-  <dgm:styleLbl name="asst1">
-    <dgm:fillClrLst meth="repeat">
-      <a:schemeClr val="accent1"/>
-    </dgm:fillClrLst>
-    <dgm:linClrLst meth="repeat">
-      <a:schemeClr val="lt1"/>
-    </dgm:linClrLst>
-    <dgm:effectClrLst/>
-    <dgm:txLinClrLst/>
-    <dgm:txFillClrLst/>
-    <dgm:txEffectClrLst/>
-  </dgm:styleLbl>
-  <dgm:styleLbl name="asst2">
-    <dgm:fillClrLst meth="repeat">
-      <a:schemeClr val="accent1"/>
-    </dgm:fillClrLst>
-    <dgm:linClrLst meth="repeat">
-      <a:schemeClr val="lt1"/>
-    </dgm:linClrLst>
-    <dgm:effectClrLst/>
-    <dgm:txLinClrLst/>
-    <dgm:txFillClrLst/>
-    <dgm:txEffectClrLst/>
-  </dgm:styleLbl>
-  <dgm:styleLbl name="asst3">
-    <dgm:fillClrLst meth="repeat">
-      <a:schemeClr val="accent1"/>
-    </dgm:fillClrLst>
-    <dgm:linClrLst meth="repeat">
-      <a:schemeClr val="lt1"/>
-    </dgm:linClrLst>
-    <dgm:effectClrLst/>
-    <dgm:txLinClrLst/>
-    <dgm:txFillClrLst/>
-    <dgm:txEffectClrLst/>
-  </dgm:styleLbl>
-  <dgm:styleLbl name="asst4">
-    <dgm:fillClrLst meth="repeat">
-      <a:schemeClr val="accent1"/>
-    </dgm:fillClrLst>
-    <dgm:linClrLst meth="repeat">
-      <a:schemeClr val="lt1"/>
-    </dgm:linClrLst>
-    <dgm:effectClrLst/>
-    <dgm:txLinClrLst/>
-    <dgm:txFillClrLst/>
-    <dgm:txEffectClrLst/>
-  </dgm:styleLbl>
-  <dgm:styleLbl name="parChTrans2D1">
-    <dgm:fillClrLst meth="repeat">
-      <a:schemeClr val="accent1">
-        <a:tint val="60000"/>
-      </a:schemeClr>
-    </dgm:fillClrLst>
-    <dgm:linClrLst meth="repeat">
-      <a:schemeClr val="accent1">
-        <a:tint val="60000"/>
-      </a:schemeClr>
-    </dgm:linClrLst>
-    <dgm:effectClrLst/>
-    <dgm:txLinClrLst/>
-    <dgm:txFillClrLst meth="repeat">
-      <a:schemeClr val="lt1"/>
-    </dgm:txFillClrLst>
-    <dgm:txEffectClrLst/>
-  </dgm:styleLbl>
-  <dgm:styleLbl name="parChTrans2D2">
-    <dgm:fillClrLst meth="repeat">
-      <a:schemeClr val="accent1"/>
-    </dgm:fillClrLst>
-    <dgm:linClrLst meth="repeat">
-      <a:schemeClr val="accent1"/>
-    </dgm:linClrLst>
-    <dgm:effectClrLst/>
-    <dgm:txLinClrLst/>
-    <dgm:txFillClrLst meth="repeat">
-      <a:schemeClr val="lt1"/>
-    </dgm:txFillClrLst>
-    <dgm:txEffectClrLst/>
-  </dgm:styleLbl>
-  <dgm:styleLbl name="parChTrans2D3">
-    <dgm:fillClrLst meth="repeat">
-      <a:schemeClr val="accent1"/>
-    </dgm:fillClrLst>
-    <dgm:linClrLst meth="repeat">
-      <a:schemeClr val="accent1"/>
-    </dgm:linClrLst>
-    <dgm:effectClrLst/>
-    <dgm:txLinClrLst/>
-    <dgm:txFillClrLst meth="repeat">
-      <a:schemeClr val="lt1"/>
-    </dgm:txFillClrLst>
-    <dgm:txEffectClrLst/>
-  </dgm:styleLbl>
-  <dgm:styleLbl name="parChTrans2D4">
-    <dgm:fillClrLst meth="repeat">
-      <a:schemeClr val="accent1"/>
-    </dgm:fillClrLst>
-    <dgm:linClrLst meth="repeat">
-      <a:schemeClr val="accent1"/>
-    </dgm:linClrLst>
-    <dgm:effectClrLst/>
-    <dgm:txLinClrLst/>
-    <dgm:txFillClrLst meth="repeat">
-      <a:schemeClr val="lt1"/>
-    </dgm:txFillClrLst>
-    <dgm:txEffectClrLst/>
-  </dgm:styleLbl>
-  <dgm:styleLbl name="parChTrans1D1">
-    <dgm:fillClrLst meth="repeat">
-      <a:schemeClr val="accent1"/>
-    </dgm:fillClrLst>
-    <dgm:linClrLst meth="repeat">
-      <a:schemeClr val="accent1">
-        <a:shade val="60000"/>
-      </a:schemeClr>
-    </dgm:linClrLst>
-    <dgm:effectClrLst/>
-    <dgm:txLinClrLst/>
-    <dgm:txFillClrLst meth="repeat">
-      <a:schemeClr val="tx1"/>
-    </dgm:txFillClrLst>
-    <dgm:txEffectClrLst/>
-  </dgm:styleLbl>
-  <dgm:styleLbl name="parChTrans1D2">
-    <dgm:fillClrLst meth="repeat">
-      <a:schemeClr val="accent1"/>
-    </dgm:fillClrLst>
-    <dgm:linClrLst meth="repeat">
-      <a:schemeClr val="accent1">
-        <a:shade val="60000"/>
-      </a:schemeClr>
-    </dgm:linClrLst>
-    <dgm:effectClrLst/>
-    <dgm:txLinClrLst/>
-    <dgm:txFillClrLst meth="repeat">
-      <a:schemeClr val="tx1"/>
-    </dgm:txFillClrLst>
-    <dgm:txEffectClrLst/>
-  </dgm:styleLbl>
-  <dgm:styleLbl name="parChTrans1D3">
-    <dgm:fillClrLst meth="repeat">
-      <a:schemeClr val="accent1"/>
-    </dgm:fillClrLst>
-    <dgm:linClrLst meth="repeat">
-      <a:schemeClr val="accent1">
-        <a:shade val="80000"/>
-      </a:schemeClr>
-    </dgm:linClrLst>
-    <dgm:effectClrLst/>
-    <dgm:txLinClrLst/>
-    <dgm:txFillClrLst meth="repeat">
-      <a:schemeClr val="tx1"/>
-    </dgm:txFillClrLst>
-    <dgm:txEffectClrLst/>
-  </dgm:styleLbl>
-  <dgm:styleLbl name="parChTrans1D4">
-    <dgm:fillClrLst meth="repeat">
-      <a:schemeClr val="accent1"/>
-    </dgm:fillClrLst>
-    <dgm:linClrLst meth="repeat">
-      <a:schemeClr val="accent1">
-        <a:shade val="80000"/>
-      </a:schemeClr>
-    </dgm:linClrLst>
-    <dgm:effectClrLst/>
-    <dgm:txLinClrLst/>
-    <dgm:txFillClrLst meth="repeat">
-      <a:schemeClr val="tx1"/>
-    </dgm:txFillClrLst>
-    <dgm:txEffectClrLst/>
-  </dgm:styleLbl>
-  <dgm:styleLbl name="fgAcc1">
-    <dgm:fillClrLst meth="repeat">
-      <a:schemeClr val="lt1">
-        <a:alpha val="90000"/>
-      </a:schemeClr>
-    </dgm:fillClrLst>
-    <dgm:linClrLst meth="repeat">
-      <a:schemeClr val="accent1"/>
-    </dgm:linClrLst>
-    <dgm:effectClrLst/>
-    <dgm:txLinClrLst/>
-    <dgm:txFillClrLst meth="repeat">
-      <a:schemeClr val="dk1"/>
-    </dgm:txFillClrLst>
-    <dgm:txEffectClrLst/>
-  </dgm:styleLbl>
-  <dgm:styleLbl name="conFgAcc1">
-    <dgm:fillClrLst meth="repeat">
-      <a:schemeClr val="lt1">
-        <a:alpha val="90000"/>
-      </a:schemeClr>
-    </dgm:fillClrLst>
-    <dgm:linClrLst meth="repeat">
-      <a:schemeClr val="accent1"/>
-    </dgm:linClrLst>
-    <dgm:effectClrLst/>
-    <dgm:txLinClrLst/>
-    <dgm:txFillClrLst meth="repeat">
-      <a:schemeClr val="dk1"/>
-    </dgm:txFillClrLst>
-    <dgm:txEffectClrLst/>
-  </dgm:styleLbl>
-  <dgm:styleLbl name="alignAcc1">
-    <dgm:fillClrLst meth="repeat">
-      <a:schemeClr val="lt1">
-        <a:alpha val="90000"/>
-      </a:schemeClr>
-    </dgm:fillClrLst>
-    <dgm:linClrLst meth="repeat">
-      <a:schemeClr val="accent1"/>
-    </dgm:linClrLst>
-    <dgm:effectClrLst/>
-    <dgm:txLinClrLst/>
-    <dgm:txFillClrLst meth="repeat">
-      <a:schemeClr val="dk1"/>
-    </dgm:txFillClrLst>
-    <dgm:txEffectClrLst/>
-  </dgm:styleLbl>
-  <dgm:styleLbl name="trAlignAcc1">
-    <dgm:fillClrLst meth="repeat">
-      <a:schemeClr val="lt1">
-        <a:alpha val="40000"/>
-      </a:schemeClr>
-    </dgm:fillClrLst>
-    <dgm:linClrLst meth="repeat">
-      <a:schemeClr val="accent1"/>
-    </dgm:linClrLst>
-    <dgm:effectClrLst/>
-    <dgm:txLinClrLst/>
-    <dgm:txFillClrLst meth="repeat">
-      <a:schemeClr val="dk1"/>
-    </dgm:txFillClrLst>
-    <dgm:txEffectClrLst/>
-  </dgm:styleLbl>
-  <dgm:styleLbl name="bgAcc1">
-    <dgm:fillClrLst meth="repeat">
-      <a:schemeClr val="lt1">
-        <a:alpha val="90000"/>
-      </a:schemeClr>
-    </dgm:fillClrLst>
-    <dgm:linClrLst meth="repeat">
-      <a:schemeClr val="accent1"/>
-    </dgm:linClrLst>
-    <dgm:effectClrLst/>
-    <dgm:txLinClrLst/>
-    <dgm:txFillClrLst meth="repeat">
-      <a:schemeClr val="dk1"/>
-    </dgm:txFillClrLst>
-    <dgm:txEffectClrLst/>
-  </dgm:styleLbl>
-  <dgm:styleLbl name="solidFgAcc1">
-    <dgm:fillClrLst meth="repeat">
-      <a:schemeClr val="lt1"/>
-    </dgm:fillClrLst>
-    <dgm:linClrLst meth="repeat">
-      <a:schemeClr val="accent1"/>
-    </dgm:linClrLst>
-    <dgm:effectClrLst/>
-    <dgm:txLinClrLst/>
-    <dgm:txFillClrLst meth="repeat">
-      <a:schemeClr val="dk1"/>
-    </dgm:txFillClrLst>
-    <dgm:txEffectClrLst/>
-  </dgm:styleLbl>
-  <dgm:styleLbl name="solidAlignAcc1">
-    <dgm:fillClrLst meth="repeat">
-      <a:schemeClr val="lt1"/>
-    </dgm:fillClrLst>
-    <dgm:linClrLst meth="repeat">
-      <a:schemeClr val="accent1"/>
-    </dgm:linClrLst>
-    <dgm:effectClrLst/>
-    <dgm:txLinClrLst/>
-    <dgm:txFillClrLst meth="repeat">
-      <a:schemeClr val="dk1"/>
-    </dgm:txFillClrLst>
-    <dgm:txEffectClrLst/>
-  </dgm:styleLbl>
-  <dgm:styleLbl name="solidBgAcc1">
-    <dgm:fillClrLst meth="repeat">
-      <a:schemeClr val="lt1"/>
-    </dgm:fillClrLst>
-    <dgm:linClrLst meth="repeat">
-      <a:schemeClr val="accent1"/>
-    </dgm:linClrLst>
-    <dgm:effectClrLst/>
-    <dgm:txLinClrLst/>
-    <dgm:txFillClrLst meth="repeat">
-      <a:schemeClr val="dk1"/>
-    </dgm:txFillClrLst>
-    <dgm:txEffectClrLst/>
-  </dgm:styleLbl>
-  <dgm:styleLbl name="fgAccFollowNode1">
-    <dgm:fillClrLst meth="repeat">
-      <a:schemeClr val="accent1">
-        <a:alpha val="90000"/>
-        <a:tint val="40000"/>
-      </a:schemeClr>
-    </dgm:fillClrLst>
-    <dgm:linClrLst meth="repeat">
-      <a:schemeClr val="accent1">
-        <a:alpha val="90000"/>
-        <a:tint val="40000"/>
-      </a:schemeClr>
-    </dgm:linClrLst>
-    <dgm:effectClrLst/>
-    <dgm:txLinClrLst/>
-    <dgm:txFillClrLst meth="repeat">
-      <a:schemeClr val="dk1"/>
-    </dgm:txFillClrLst>
-    <dgm:txEffectClrLst/>
-  </dgm:styleLbl>
-  <dgm:styleLbl name="alignAccFollowNode1">
-    <dgm:fillClrLst meth="repeat">
-      <a:schemeClr val="accent1">
-        <a:alpha val="90000"/>
-        <a:tint val="40000"/>
-      </a:schemeClr>
-    </dgm:fillClrLst>
-    <dgm:linClrLst meth="repeat">
-      <a:schemeClr val="accent1">
-        <a:alpha val="90000"/>
-        <a:tint val="40000"/>
-      </a:schemeClr>
-    </dgm:linClrLst>
-    <dgm:effectClrLst/>
-    <dgm:txLinClrLst/>
-    <dgm:txFillClrLst meth="repeat">
-      <a:schemeClr val="dk1"/>
-    </dgm:txFillClrLst>
-    <dgm:txEffectClrLst/>
-  </dgm:styleLbl>
-  <dgm:styleLbl name="bgAccFollowNode1">
-    <dgm:fillClrLst meth="repeat">
-      <a:schemeClr val="accent1">
-        <a:alpha val="90000"/>
-        <a:tint val="40000"/>
-      </a:schemeClr>
-    </dgm:fillClrLst>
-    <dgm:linClrLst meth="repeat">
-      <a:schemeClr val="accent1">
-        <a:alpha val="90000"/>
-        <a:tint val="40000"/>
-      </a:schemeClr>
-    </dgm:linClrLst>
-    <dgm:effectClrLst/>
-    <dgm:txLinClrLst/>
-    <dgm:txFillClrLst meth="repeat">
-      <a:schemeClr val="dk1"/>
-    </dgm:txFillClrLst>
-    <dgm:txEffectClrLst/>
-  </dgm:styleLbl>
-  <dgm:styleLbl name="fgAcc0">
-    <dgm:fillClrLst meth="repeat">
-      <a:schemeClr val="lt1">
-        <a:alpha val="90000"/>
-      </a:schemeClr>
-    </dgm:fillClrLst>
-    <dgm:linClrLst meth="repeat">
-      <a:schemeClr val="accent1"/>
-    </dgm:linClrLst>
-    <dgm:effectClrLst/>
-    <dgm:txLinClrLst/>
-    <dgm:txFillClrLst meth="repeat">
-      <a:schemeClr val="dk1"/>
-    </dgm:txFillClrLst>
-    <dgm:txEffectClrLst/>
-  </dgm:styleLbl>
-  <dgm:styleLbl name="fgAcc2">
-    <dgm:fillClrLst meth="repeat">
-      <a:schemeClr val="lt1">
-        <a:alpha val="90000"/>
-      </a:schemeClr>
-    </dgm:fillClrLst>
-    <dgm:linClrLst meth="repeat">
-      <a:schemeClr val="accent1"/>
-    </dgm:linClrLst>
-    <dgm:effectClrLst/>
-    <dgm:txLinClrLst/>
-    <dgm:txFillClrLst meth="repeat">
-      <a:schemeClr val="dk1"/>
-    </dgm:txFillClrLst>
-    <dgm:txEffectClrLst/>
-  </dgm:styleLbl>
-  <dgm:styleLbl name="fgAcc3">
-    <dgm:fillClrLst meth="repeat">
-      <a:schemeClr val="lt1">
-        <a:alpha val="90000"/>
-      </a:schemeClr>
-    </dgm:fillClrLst>
-    <dgm:linClrLst meth="repeat">
-      <a:schemeClr val="accent1"/>
-    </dgm:linClrLst>
-    <dgm:effectClrLst/>
-    <dgm:txLinClrLst/>
-    <dgm:txFillClrLst meth="repeat">
-      <a:schemeClr val="dk1"/>
-    </dgm:txFillClrLst>
-    <dgm:txEffectClrLst/>
-  </dgm:styleLbl>
-  <dgm:styleLbl name="fgAcc4">
-    <dgm:fillClrLst meth="repeat">
-      <a:schemeClr val="lt1">
-        <a:alpha val="90000"/>
-      </a:schemeClr>
-    </dgm:fillClrLst>
-    <dgm:linClrLst meth="repeat">
-      <a:schemeClr val="accent1"/>
-    </dgm:linClrLst>
-    <dgm:effectClrLst/>
-    <dgm:txLinClrLst/>
-    <dgm:txFillClrLst meth="repeat">
-      <a:schemeClr val="dk1"/>
-    </dgm:txFillClrLst>
-    <dgm:txEffectClrLst/>
-  </dgm:styleLbl>
-  <dgm:styleLbl name="bgShp">
-    <dgm:fillClrLst meth="repeat">
-      <a:schemeClr val="accent1">
-        <a:tint val="40000"/>
-      </a:schemeClr>
-    </dgm:fillClrLst>
-    <dgm:linClrLst meth="repeat">
-      <a:schemeClr val="accent1"/>
-    </dgm:linClrLst>
-    <dgm:effectClrLst/>
-    <dgm:txLinClrLst/>
-    <dgm:txFillClrLst meth="repeat">
-      <a:schemeClr val="dk1"/>
-    </dgm:txFillClrLst>
-    <dgm:txEffectClrLst/>
-  </dgm:styleLbl>
-  <dgm:styleLbl name="dkBgShp">
-    <dgm:fillClrLst meth="repeat">
-      <a:schemeClr val="accent1">
-        <a:shade val="80000"/>
-      </a:schemeClr>
-    </dgm:fillClrLst>
-    <dgm:linClrLst meth="repeat">
-      <a:schemeClr val="accent1"/>
-    </dgm:linClrLst>
-    <dgm:effectClrLst/>
-    <dgm:txLinClrLst/>
-    <dgm:txFillClrLst meth="repeat">
-      <a:schemeClr val="lt1"/>
-    </dgm:txFillClrLst>
-    <dgm:txEffectClrLst/>
-  </dgm:styleLbl>
-  <dgm:styleLbl name="trBgShp">
-    <dgm:fillClrLst meth="repeat">
-      <a:schemeClr val="accent1">
-        <a:tint val="50000"/>
-        <a:alpha val="40000"/>
-      </a:schemeClr>
-    </dgm:fillClrLst>
-    <dgm:linClrLst meth="repeat">
-      <a:schemeClr val="accent1"/>
-    </dgm:linClrLst>
-    <dgm:effectClrLst/>
-    <dgm:txLinClrLst/>
-    <dgm:txFillClrLst meth="repeat">
-      <a:schemeClr val="lt1"/>
-    </dgm:txFillClrLst>
-    <dgm:txEffectClrLst/>
-  </dgm:styleLbl>
-  <dgm:styleLbl name="fgShp">
-    <dgm:fillClrLst meth="repeat">
-      <a:schemeClr val="accent1">
-        <a:tint val="60000"/>
-      </a:schemeClr>
-    </dgm:fillClrLst>
-    <dgm:linClrLst meth="repeat">
-      <a:schemeClr val="lt1"/>
-    </dgm:linClrLst>
-    <dgm:effectClrLst/>
-    <dgm:txLinClrLst/>
-    <dgm:txFillClrLst meth="repeat">
-      <a:schemeClr val="dk1"/>
-    </dgm:txFillClrLst>
-    <dgm:txEffectClrLst/>
-  </dgm:styleLbl>
-  <dgm:styleLbl name="revTx">
-    <dgm:fillClrLst meth="repeat">
-      <a:schemeClr val="lt1">
-        <a:alpha val="0"/>
-      </a:schemeClr>
-    </dgm:fillClrLst>
-    <dgm:linClrLst meth="repeat">
-      <a:schemeClr val="dk1">
-        <a:alpha val="0"/>
-      </a:schemeClr>
-    </dgm:linClrLst>
-    <dgm:effectClrLst/>
-    <dgm:txLinClrLst/>
-    <dgm:txFillClrLst meth="repeat">
-      <a:schemeClr val="tx1"/>
-    </dgm:txFillClrLst>
-    <dgm:txEffectClrLst/>
-  </dgm:styleLbl>
-</dgm:colorsDef>
-</file>
-
-<file path=ppt/diagrams/colors2.xml><?xml version="1.0" encoding="utf-8"?>
 <dgm:colorsDef xmlns:dgm="http://schemas.openxmlformats.org/drawingml/2006/diagram" xmlns:a="http://schemas.openxmlformats.org/drawingml/2006/main" uniqueId="urn:microsoft.com/office/officeart/2005/8/colors/accent1_1">
   <dgm:title val=""/>
   <dgm:desc val=""/>
@@ -3734,429 +2983,6 @@
 <file path=ppt/diagrams/data1.xml><?xml version="1.0" encoding="utf-8"?>
 <dgm:dataModel xmlns:dgm="http://schemas.openxmlformats.org/drawingml/2006/diagram" xmlns:a="http://schemas.openxmlformats.org/drawingml/2006/main">
   <dgm:ptLst>
-    <dgm:pt modelId="{D4526EB4-0581-4F47-BCA2-D371BEBD23E0}" type="doc">
-      <dgm:prSet loTypeId="urn:microsoft.com/office/officeart/2005/8/layout/pList2" loCatId="list" qsTypeId="urn:microsoft.com/office/officeart/2005/8/quickstyle/simple1" qsCatId="simple" csTypeId="urn:microsoft.com/office/officeart/2005/8/colors/accent1_2" csCatId="accent1" phldr="1"/>
-      <dgm:spPr/>
-      <dgm:t>
-        <a:bodyPr/>
-        <a:lstStyle/>
-        <a:p>
-          <a:endParaRPr lang="en-US"/>
-        </a:p>
-      </dgm:t>
-    </dgm:pt>
-    <dgm:pt modelId="{238BCEB3-BFD7-40EA-99DC-0646A41A7FCE}">
-      <dgm:prSet phldrT="[Text]" phldr="0"/>
-      <dgm:spPr/>
-      <dgm:t>
-        <a:bodyPr/>
-        <a:lstStyle/>
-        <a:p>
-          <a:r>
-            <a:rPr lang="en-US" dirty="0"/>
-            <a:t>Anti-AI</a:t>
-          </a:r>
-        </a:p>
-      </dgm:t>
-    </dgm:pt>
-    <dgm:pt modelId="{7C1A9E09-0543-4291-9315-AF893FB9A2B8}" type="parTrans" cxnId="{88773B54-B380-4AF9-9A19-F7412DB45EB6}">
-      <dgm:prSet/>
-      <dgm:spPr/>
-      <dgm:t>
-        <a:bodyPr/>
-        <a:lstStyle/>
-        <a:p>
-          <a:endParaRPr lang="en-US"/>
-        </a:p>
-      </dgm:t>
-    </dgm:pt>
-    <dgm:pt modelId="{1D45AC90-1A74-4F60-BF38-3C35B51A4ABB}" type="sibTrans" cxnId="{88773B54-B380-4AF9-9A19-F7412DB45EB6}">
-      <dgm:prSet/>
-      <dgm:spPr/>
-      <dgm:t>
-        <a:bodyPr/>
-        <a:lstStyle/>
-        <a:p>
-          <a:endParaRPr lang="en-US"/>
-        </a:p>
-      </dgm:t>
-    </dgm:pt>
-    <dgm:pt modelId="{C5D522C2-A791-4D60-B64F-DF9432B6056B}">
-      <dgm:prSet phldrT="[Text]" phldr="0"/>
-      <dgm:spPr/>
-      <dgm:t>
-        <a:bodyPr/>
-        <a:lstStyle/>
-        <a:p>
-          <a:r>
-            <a:rPr lang="en-US"/>
-            <a:t>Chat about my problem</a:t>
-          </a:r>
-          <a:endParaRPr lang="en-US" dirty="0"/>
-        </a:p>
-      </dgm:t>
-    </dgm:pt>
-    <dgm:pt modelId="{DF07462D-9EA1-402B-BB25-494E08B319AD}" type="parTrans" cxnId="{FB3AD785-01BA-488F-9BC2-F5CA0D135041}">
-      <dgm:prSet/>
-      <dgm:spPr/>
-      <dgm:t>
-        <a:bodyPr/>
-        <a:lstStyle/>
-        <a:p>
-          <a:endParaRPr lang="en-US"/>
-        </a:p>
-      </dgm:t>
-    </dgm:pt>
-    <dgm:pt modelId="{5C1D49C8-C5DA-4A3E-AE93-66440B906162}" type="sibTrans" cxnId="{FB3AD785-01BA-488F-9BC2-F5CA0D135041}">
-      <dgm:prSet/>
-      <dgm:spPr/>
-      <dgm:t>
-        <a:bodyPr/>
-        <a:lstStyle/>
-        <a:p>
-          <a:endParaRPr lang="en-US"/>
-        </a:p>
-      </dgm:t>
-    </dgm:pt>
-    <dgm:pt modelId="{8BBB1B10-E251-4F0A-AE95-C4376524EFCC}">
-      <dgm:prSet phldrT="[Text]" phldr="0"/>
-      <dgm:spPr/>
-      <dgm:t>
-        <a:bodyPr/>
-        <a:lstStyle/>
-        <a:p>
-          <a:r>
-            <a:rPr lang="en-US" dirty="0"/>
-            <a:t>Agents help me on my tasks</a:t>
-          </a:r>
-        </a:p>
-      </dgm:t>
-    </dgm:pt>
-    <dgm:pt modelId="{C2A6FF4E-3C42-4337-BFF6-DD5D15F399F9}" type="parTrans" cxnId="{F0852B2C-9ED0-4B3F-AEA6-0C7CEFF9FD07}">
-      <dgm:prSet/>
-      <dgm:spPr/>
-      <dgm:t>
-        <a:bodyPr/>
-        <a:lstStyle/>
-        <a:p>
-          <a:endParaRPr lang="en-US"/>
-        </a:p>
-      </dgm:t>
-    </dgm:pt>
-    <dgm:pt modelId="{16752EE8-5B19-48AB-B2D1-92FF2A68A59A}" type="sibTrans" cxnId="{F0852B2C-9ED0-4B3F-AEA6-0C7CEFF9FD07}">
-      <dgm:prSet/>
-      <dgm:spPr/>
-      <dgm:t>
-        <a:bodyPr/>
-        <a:lstStyle/>
-        <a:p>
-          <a:endParaRPr lang="en-US"/>
-        </a:p>
-      </dgm:t>
-    </dgm:pt>
-    <dgm:pt modelId="{DEF66A4A-7513-4B81-A23D-D8971740BA6F}">
-      <dgm:prSet phldrT="[Text]" phldr="0"/>
-      <dgm:spPr/>
-      <dgm:t>
-        <a:bodyPr/>
-        <a:lstStyle/>
-        <a:p>
-          <a:r>
-            <a:rPr lang="en-US" dirty="0"/>
-            <a:t>I assign work to Agents and then review</a:t>
-          </a:r>
-        </a:p>
-      </dgm:t>
-    </dgm:pt>
-    <dgm:pt modelId="{96948DDF-0CCD-466E-B6EE-E72A045BB516}" type="parTrans" cxnId="{58DB2CDC-69D5-4692-9F07-0F7A42802D17}">
-      <dgm:prSet/>
-      <dgm:spPr/>
-      <dgm:t>
-        <a:bodyPr/>
-        <a:lstStyle/>
-        <a:p>
-          <a:endParaRPr lang="en-US"/>
-        </a:p>
-      </dgm:t>
-    </dgm:pt>
-    <dgm:pt modelId="{88937A2D-6966-4847-AE66-096E6F8B9239}" type="sibTrans" cxnId="{58DB2CDC-69D5-4692-9F07-0F7A42802D17}">
-      <dgm:prSet/>
-      <dgm:spPr/>
-      <dgm:t>
-        <a:bodyPr/>
-        <a:lstStyle/>
-        <a:p>
-          <a:endParaRPr lang="en-US"/>
-        </a:p>
-      </dgm:t>
-    </dgm:pt>
-    <dgm:pt modelId="{6C1CE435-D8A9-46EA-938E-DEABF469BD45}">
-      <dgm:prSet phldrT="[Text]" phldr="0"/>
-      <dgm:spPr/>
-      <dgm:t>
-        <a:bodyPr/>
-        <a:lstStyle/>
-        <a:p>
-          <a:r>
-            <a:rPr lang="en-US"/>
-            <a:t>AI runs my life entirely</a:t>
-          </a:r>
-          <a:endParaRPr lang="en-US" dirty="0"/>
-        </a:p>
-      </dgm:t>
-    </dgm:pt>
-    <dgm:pt modelId="{7E5A99FA-B40A-4C15-A84A-647B7FAACD90}" type="parTrans" cxnId="{6A5FBA94-A8A0-452B-A49C-DC7C0FDD2664}">
-      <dgm:prSet/>
-      <dgm:spPr/>
-      <dgm:t>
-        <a:bodyPr/>
-        <a:lstStyle/>
-        <a:p>
-          <a:endParaRPr lang="en-US"/>
-        </a:p>
-      </dgm:t>
-    </dgm:pt>
-    <dgm:pt modelId="{1BD2450D-7FA4-430C-BB66-C712ADAD4B85}" type="sibTrans" cxnId="{6A5FBA94-A8A0-452B-A49C-DC7C0FDD2664}">
-      <dgm:prSet/>
-      <dgm:spPr/>
-      <dgm:t>
-        <a:bodyPr/>
-        <a:lstStyle/>
-        <a:p>
-          <a:endParaRPr lang="en-US"/>
-        </a:p>
-      </dgm:t>
-    </dgm:pt>
-    <dgm:pt modelId="{12EBF963-E20A-4B1B-9F52-BAD44859C76B}" type="pres">
-      <dgm:prSet presAssocID="{D4526EB4-0581-4F47-BCA2-D371BEBD23E0}" presName="Name0" presStyleCnt="0">
-        <dgm:presLayoutVars>
-          <dgm:dir/>
-          <dgm:resizeHandles val="exact"/>
-        </dgm:presLayoutVars>
-      </dgm:prSet>
-      <dgm:spPr/>
-    </dgm:pt>
-    <dgm:pt modelId="{2FFC36F6-DA35-4049-93CD-D37C309A8A11}" type="pres">
-      <dgm:prSet presAssocID="{D4526EB4-0581-4F47-BCA2-D371BEBD23E0}" presName="bkgdShp" presStyleLbl="alignAccFollowNode1" presStyleIdx="0" presStyleCnt="1"/>
-      <dgm:spPr/>
-    </dgm:pt>
-    <dgm:pt modelId="{C8E20FD4-5C5E-491C-8D36-EBEB8A4B7F3E}" type="pres">
-      <dgm:prSet presAssocID="{D4526EB4-0581-4F47-BCA2-D371BEBD23E0}" presName="linComp" presStyleCnt="0"/>
-      <dgm:spPr/>
-    </dgm:pt>
-    <dgm:pt modelId="{6C894116-DFDD-4E28-823F-01FF44BA1B56}" type="pres">
-      <dgm:prSet presAssocID="{238BCEB3-BFD7-40EA-99DC-0646A41A7FCE}" presName="compNode" presStyleCnt="0"/>
-      <dgm:spPr/>
-    </dgm:pt>
-    <dgm:pt modelId="{0E671806-4AA8-4D39-A5C0-4CD58D08FDD7}" type="pres">
-      <dgm:prSet presAssocID="{238BCEB3-BFD7-40EA-99DC-0646A41A7FCE}" presName="node" presStyleLbl="node1" presStyleIdx="0" presStyleCnt="5">
-        <dgm:presLayoutVars>
-          <dgm:bulletEnabled val="1"/>
-        </dgm:presLayoutVars>
-      </dgm:prSet>
-      <dgm:spPr/>
-    </dgm:pt>
-    <dgm:pt modelId="{74992C8D-10FC-45C1-9EE6-6EC286FD3560}" type="pres">
-      <dgm:prSet presAssocID="{238BCEB3-BFD7-40EA-99DC-0646A41A7FCE}" presName="invisiNode" presStyleLbl="node1" presStyleIdx="0" presStyleCnt="5"/>
-      <dgm:spPr/>
-    </dgm:pt>
-    <dgm:pt modelId="{6D1299BA-DC44-4FB3-B1F9-574B2A5A095F}" type="pres">
-      <dgm:prSet presAssocID="{238BCEB3-BFD7-40EA-99DC-0646A41A7FCE}" presName="imagNode" presStyleLbl="fgImgPlace1" presStyleIdx="0" presStyleCnt="5"/>
-      <dgm:spPr>
-        <a:blipFill>
-          <a:blip xmlns:r="http://schemas.openxmlformats.org/officeDocument/2006/relationships" r:embed="rId1"/>
-          <a:srcRect/>
-          <a:stretch>
-            <a:fillRect t="-31000" b="-31000"/>
-          </a:stretch>
-        </a:blipFill>
-      </dgm:spPr>
-    </dgm:pt>
-    <dgm:pt modelId="{EC07CE86-A263-44B6-9D4A-9145B5AAECAB}" type="pres">
-      <dgm:prSet presAssocID="{1D45AC90-1A74-4F60-BF38-3C35B51A4ABB}" presName="sibTrans" presStyleLbl="sibTrans2D1" presStyleIdx="0" presStyleCnt="0"/>
-      <dgm:spPr/>
-    </dgm:pt>
-    <dgm:pt modelId="{FBBEE222-ABFA-48F8-B10F-F557EB44921C}" type="pres">
-      <dgm:prSet presAssocID="{C5D522C2-A791-4D60-B64F-DF9432B6056B}" presName="compNode" presStyleCnt="0"/>
-      <dgm:spPr/>
-    </dgm:pt>
-    <dgm:pt modelId="{7DD53052-AAFB-47A9-A140-B65A12CD3753}" type="pres">
-      <dgm:prSet presAssocID="{C5D522C2-A791-4D60-B64F-DF9432B6056B}" presName="node" presStyleLbl="node1" presStyleIdx="1" presStyleCnt="5">
-        <dgm:presLayoutVars>
-          <dgm:bulletEnabled val="1"/>
-        </dgm:presLayoutVars>
-      </dgm:prSet>
-      <dgm:spPr/>
-    </dgm:pt>
-    <dgm:pt modelId="{85D5B944-1E21-4816-B3F8-435861A18DC4}" type="pres">
-      <dgm:prSet presAssocID="{C5D522C2-A791-4D60-B64F-DF9432B6056B}" presName="invisiNode" presStyleLbl="node1" presStyleIdx="1" presStyleCnt="5"/>
-      <dgm:spPr/>
-    </dgm:pt>
-    <dgm:pt modelId="{6FBB37D4-8352-4C9F-BA3A-86016EDE27FD}" type="pres">
-      <dgm:prSet presAssocID="{C5D522C2-A791-4D60-B64F-DF9432B6056B}" presName="imagNode" presStyleLbl="fgImgPlace1" presStyleIdx="1" presStyleCnt="5"/>
-      <dgm:spPr>
-        <a:blipFill>
-          <a:blip xmlns:r="http://schemas.openxmlformats.org/officeDocument/2006/relationships" r:embed="rId2"/>
-          <a:srcRect/>
-          <a:stretch>
-            <a:fillRect l="-23000" r="-23000"/>
-          </a:stretch>
-        </a:blipFill>
-      </dgm:spPr>
-    </dgm:pt>
-    <dgm:pt modelId="{8BCE03ED-2EFB-40BF-B608-387DC6AB99B7}" type="pres">
-      <dgm:prSet presAssocID="{5C1D49C8-C5DA-4A3E-AE93-66440B906162}" presName="sibTrans" presStyleLbl="sibTrans2D1" presStyleIdx="0" presStyleCnt="0"/>
-      <dgm:spPr/>
-    </dgm:pt>
-    <dgm:pt modelId="{85F2E47B-598F-45EC-A102-ACDCBE569DE8}" type="pres">
-      <dgm:prSet presAssocID="{8BBB1B10-E251-4F0A-AE95-C4376524EFCC}" presName="compNode" presStyleCnt="0"/>
-      <dgm:spPr/>
-    </dgm:pt>
-    <dgm:pt modelId="{EF0EE7A5-8FB7-4BA5-8F85-1695CD4FB453}" type="pres">
-      <dgm:prSet presAssocID="{8BBB1B10-E251-4F0A-AE95-C4376524EFCC}" presName="node" presStyleLbl="node1" presStyleIdx="2" presStyleCnt="5">
-        <dgm:presLayoutVars>
-          <dgm:bulletEnabled val="1"/>
-        </dgm:presLayoutVars>
-      </dgm:prSet>
-      <dgm:spPr/>
-    </dgm:pt>
-    <dgm:pt modelId="{9C358124-536B-4DFC-81AE-7FCA61AD24A2}" type="pres">
-      <dgm:prSet presAssocID="{8BBB1B10-E251-4F0A-AE95-C4376524EFCC}" presName="invisiNode" presStyleLbl="node1" presStyleIdx="2" presStyleCnt="5"/>
-      <dgm:spPr/>
-    </dgm:pt>
-    <dgm:pt modelId="{AC2184B4-96A1-4D8E-80AF-2763D00530C5}" type="pres">
-      <dgm:prSet presAssocID="{8BBB1B10-E251-4F0A-AE95-C4376524EFCC}" presName="imagNode" presStyleLbl="fgImgPlace1" presStyleIdx="2" presStyleCnt="5"/>
-      <dgm:spPr>
-        <a:blipFill>
-          <a:blip xmlns:r="http://schemas.openxmlformats.org/officeDocument/2006/relationships" r:embed="rId3"/>
-          <a:srcRect/>
-          <a:stretch>
-            <a:fillRect t="-3000" b="-3000"/>
-          </a:stretch>
-        </a:blipFill>
-      </dgm:spPr>
-    </dgm:pt>
-    <dgm:pt modelId="{786F6AB2-1CB9-4259-87EF-FA7E491DD02F}" type="pres">
-      <dgm:prSet presAssocID="{16752EE8-5B19-48AB-B2D1-92FF2A68A59A}" presName="sibTrans" presStyleLbl="sibTrans2D1" presStyleIdx="0" presStyleCnt="0"/>
-      <dgm:spPr/>
-    </dgm:pt>
-    <dgm:pt modelId="{06DB018F-A45F-41D1-B121-5336D98C2779}" type="pres">
-      <dgm:prSet presAssocID="{DEF66A4A-7513-4B81-A23D-D8971740BA6F}" presName="compNode" presStyleCnt="0"/>
-      <dgm:spPr/>
-    </dgm:pt>
-    <dgm:pt modelId="{42EFD938-A1CE-4444-BD5A-AB19F05097F2}" type="pres">
-      <dgm:prSet presAssocID="{DEF66A4A-7513-4B81-A23D-D8971740BA6F}" presName="node" presStyleLbl="node1" presStyleIdx="3" presStyleCnt="5">
-        <dgm:presLayoutVars>
-          <dgm:bulletEnabled val="1"/>
-        </dgm:presLayoutVars>
-      </dgm:prSet>
-      <dgm:spPr/>
-    </dgm:pt>
-    <dgm:pt modelId="{F9F06519-DC5F-493F-8216-4DC6C80F66EC}" type="pres">
-      <dgm:prSet presAssocID="{DEF66A4A-7513-4B81-A23D-D8971740BA6F}" presName="invisiNode" presStyleLbl="node1" presStyleIdx="3" presStyleCnt="5"/>
-      <dgm:spPr/>
-    </dgm:pt>
-    <dgm:pt modelId="{ECF2C431-7BDD-4A9E-8424-5AA5D4182050}" type="pres">
-      <dgm:prSet presAssocID="{DEF66A4A-7513-4B81-A23D-D8971740BA6F}" presName="imagNode" presStyleLbl="fgImgPlace1" presStyleIdx="3" presStyleCnt="5"/>
-      <dgm:spPr>
-        <a:blipFill>
-          <a:blip xmlns:r="http://schemas.openxmlformats.org/officeDocument/2006/relationships" r:embed="rId4"/>
-          <a:srcRect/>
-          <a:stretch>
-            <a:fillRect t="-1000" b="-1000"/>
-          </a:stretch>
-        </a:blipFill>
-      </dgm:spPr>
-    </dgm:pt>
-    <dgm:pt modelId="{53A52F4C-AC09-4C50-B08A-4685FE8D4BA0}" type="pres">
-      <dgm:prSet presAssocID="{88937A2D-6966-4847-AE66-096E6F8B9239}" presName="sibTrans" presStyleLbl="sibTrans2D1" presStyleIdx="0" presStyleCnt="0"/>
-      <dgm:spPr/>
-    </dgm:pt>
-    <dgm:pt modelId="{96EEAD21-090D-4ED1-8D13-7F6BCB148FD3}" type="pres">
-      <dgm:prSet presAssocID="{6C1CE435-D8A9-46EA-938E-DEABF469BD45}" presName="compNode" presStyleCnt="0"/>
-      <dgm:spPr/>
-    </dgm:pt>
-    <dgm:pt modelId="{B49AFC41-1D78-4343-8970-3B07E1EC45BE}" type="pres">
-      <dgm:prSet presAssocID="{6C1CE435-D8A9-46EA-938E-DEABF469BD45}" presName="node" presStyleLbl="node1" presStyleIdx="4" presStyleCnt="5">
-        <dgm:presLayoutVars>
-          <dgm:bulletEnabled val="1"/>
-        </dgm:presLayoutVars>
-      </dgm:prSet>
-      <dgm:spPr/>
-    </dgm:pt>
-    <dgm:pt modelId="{35D66144-462F-4C2F-967D-759874D752CF}" type="pres">
-      <dgm:prSet presAssocID="{6C1CE435-D8A9-46EA-938E-DEABF469BD45}" presName="invisiNode" presStyleLbl="node1" presStyleIdx="4" presStyleCnt="5"/>
-      <dgm:spPr/>
-    </dgm:pt>
-    <dgm:pt modelId="{D6EF3429-4E1A-41AC-9027-A90F47F188B7}" type="pres">
-      <dgm:prSet presAssocID="{6C1CE435-D8A9-46EA-938E-DEABF469BD45}" presName="imagNode" presStyleLbl="fgImgPlace1" presStyleIdx="4" presStyleCnt="5"/>
-      <dgm:spPr>
-        <a:blipFill>
-          <a:blip xmlns:r="http://schemas.openxmlformats.org/officeDocument/2006/relationships" r:embed="rId5"/>
-          <a:srcRect/>
-          <a:stretch>
-            <a:fillRect l="-29000" r="-29000"/>
-          </a:stretch>
-        </a:blipFill>
-      </dgm:spPr>
-    </dgm:pt>
-  </dgm:ptLst>
-  <dgm:cxnLst>
-    <dgm:cxn modelId="{F0852B2C-9ED0-4B3F-AEA6-0C7CEFF9FD07}" srcId="{D4526EB4-0581-4F47-BCA2-D371BEBD23E0}" destId="{8BBB1B10-E251-4F0A-AE95-C4376524EFCC}" srcOrd="2" destOrd="0" parTransId="{C2A6FF4E-3C42-4337-BFF6-DD5D15F399F9}" sibTransId="{16752EE8-5B19-48AB-B2D1-92FF2A68A59A}"/>
-    <dgm:cxn modelId="{659AB52E-371A-4F94-A64B-64EF7F98A37D}" type="presOf" srcId="{1D45AC90-1A74-4F60-BF38-3C35B51A4ABB}" destId="{EC07CE86-A263-44B6-9D4A-9145B5AAECAB}" srcOrd="0" destOrd="0" presId="urn:microsoft.com/office/officeart/2005/8/layout/pList2"/>
-    <dgm:cxn modelId="{1F481F31-BBB5-4DFA-B093-229606F4E475}" type="presOf" srcId="{238BCEB3-BFD7-40EA-99DC-0646A41A7FCE}" destId="{0E671806-4AA8-4D39-A5C0-4CD58D08FDD7}" srcOrd="0" destOrd="0" presId="urn:microsoft.com/office/officeart/2005/8/layout/pList2"/>
-    <dgm:cxn modelId="{C0979136-F704-4A17-AA25-594F9332C79C}" type="presOf" srcId="{8BBB1B10-E251-4F0A-AE95-C4376524EFCC}" destId="{EF0EE7A5-8FB7-4BA5-8F85-1695CD4FB453}" srcOrd="0" destOrd="0" presId="urn:microsoft.com/office/officeart/2005/8/layout/pList2"/>
-    <dgm:cxn modelId="{88773B54-B380-4AF9-9A19-F7412DB45EB6}" srcId="{D4526EB4-0581-4F47-BCA2-D371BEBD23E0}" destId="{238BCEB3-BFD7-40EA-99DC-0646A41A7FCE}" srcOrd="0" destOrd="0" parTransId="{7C1A9E09-0543-4291-9315-AF893FB9A2B8}" sibTransId="{1D45AC90-1A74-4F60-BF38-3C35B51A4ABB}"/>
-    <dgm:cxn modelId="{FB3AD785-01BA-488F-9BC2-F5CA0D135041}" srcId="{D4526EB4-0581-4F47-BCA2-D371BEBD23E0}" destId="{C5D522C2-A791-4D60-B64F-DF9432B6056B}" srcOrd="1" destOrd="0" parTransId="{DF07462D-9EA1-402B-BB25-494E08B319AD}" sibTransId="{5C1D49C8-C5DA-4A3E-AE93-66440B906162}"/>
-    <dgm:cxn modelId="{54F2478C-2635-4B18-83F5-3BBD741EBDF5}" type="presOf" srcId="{88937A2D-6966-4847-AE66-096E6F8B9239}" destId="{53A52F4C-AC09-4C50-B08A-4685FE8D4BA0}" srcOrd="0" destOrd="0" presId="urn:microsoft.com/office/officeart/2005/8/layout/pList2"/>
-    <dgm:cxn modelId="{6A5FBA94-A8A0-452B-A49C-DC7C0FDD2664}" srcId="{D4526EB4-0581-4F47-BCA2-D371BEBD23E0}" destId="{6C1CE435-D8A9-46EA-938E-DEABF469BD45}" srcOrd="4" destOrd="0" parTransId="{7E5A99FA-B40A-4C15-A84A-647B7FAACD90}" sibTransId="{1BD2450D-7FA4-430C-BB66-C712ADAD4B85}"/>
-    <dgm:cxn modelId="{034976AD-2C3E-4680-A4DD-835B42A1EC93}" type="presOf" srcId="{16752EE8-5B19-48AB-B2D1-92FF2A68A59A}" destId="{786F6AB2-1CB9-4259-87EF-FA7E491DD02F}" srcOrd="0" destOrd="0" presId="urn:microsoft.com/office/officeart/2005/8/layout/pList2"/>
-    <dgm:cxn modelId="{A9CC5CBD-92F4-4245-953F-406D7F774B48}" type="presOf" srcId="{D4526EB4-0581-4F47-BCA2-D371BEBD23E0}" destId="{12EBF963-E20A-4B1B-9F52-BAD44859C76B}" srcOrd="0" destOrd="0" presId="urn:microsoft.com/office/officeart/2005/8/layout/pList2"/>
-    <dgm:cxn modelId="{1B2D7EC9-108A-4D0A-82BF-5DA249EB5113}" type="presOf" srcId="{DEF66A4A-7513-4B81-A23D-D8971740BA6F}" destId="{42EFD938-A1CE-4444-BD5A-AB19F05097F2}" srcOrd="0" destOrd="0" presId="urn:microsoft.com/office/officeart/2005/8/layout/pList2"/>
-    <dgm:cxn modelId="{DD9352CC-09C9-4313-A1D1-2FEF924939F8}" type="presOf" srcId="{C5D522C2-A791-4D60-B64F-DF9432B6056B}" destId="{7DD53052-AAFB-47A9-A140-B65A12CD3753}" srcOrd="0" destOrd="0" presId="urn:microsoft.com/office/officeart/2005/8/layout/pList2"/>
-    <dgm:cxn modelId="{F39A9ED1-AD4C-43B3-AE40-FE145EF44C97}" type="presOf" srcId="{5C1D49C8-C5DA-4A3E-AE93-66440B906162}" destId="{8BCE03ED-2EFB-40BF-B608-387DC6AB99B7}" srcOrd="0" destOrd="0" presId="urn:microsoft.com/office/officeart/2005/8/layout/pList2"/>
-    <dgm:cxn modelId="{58DB2CDC-69D5-4692-9F07-0F7A42802D17}" srcId="{D4526EB4-0581-4F47-BCA2-D371BEBD23E0}" destId="{DEF66A4A-7513-4B81-A23D-D8971740BA6F}" srcOrd="3" destOrd="0" parTransId="{96948DDF-0CCD-466E-B6EE-E72A045BB516}" sibTransId="{88937A2D-6966-4847-AE66-096E6F8B9239}"/>
-    <dgm:cxn modelId="{2FE1BEF3-9114-4FF2-97E6-5858B5588CC5}" type="presOf" srcId="{6C1CE435-D8A9-46EA-938E-DEABF469BD45}" destId="{B49AFC41-1D78-4343-8970-3B07E1EC45BE}" srcOrd="0" destOrd="0" presId="urn:microsoft.com/office/officeart/2005/8/layout/pList2"/>
-    <dgm:cxn modelId="{7219D75F-F411-4F54-9BEF-A7EE69B394E8}" type="presParOf" srcId="{12EBF963-E20A-4B1B-9F52-BAD44859C76B}" destId="{2FFC36F6-DA35-4049-93CD-D37C309A8A11}" srcOrd="0" destOrd="0" presId="urn:microsoft.com/office/officeart/2005/8/layout/pList2"/>
-    <dgm:cxn modelId="{F6945EFF-C7A5-4080-BE6A-5237D2C4B74E}" type="presParOf" srcId="{12EBF963-E20A-4B1B-9F52-BAD44859C76B}" destId="{C8E20FD4-5C5E-491C-8D36-EBEB8A4B7F3E}" srcOrd="1" destOrd="0" presId="urn:microsoft.com/office/officeart/2005/8/layout/pList2"/>
-    <dgm:cxn modelId="{AEBBFE5B-2867-4C92-8677-090DF5BB19E6}" type="presParOf" srcId="{C8E20FD4-5C5E-491C-8D36-EBEB8A4B7F3E}" destId="{6C894116-DFDD-4E28-823F-01FF44BA1B56}" srcOrd="0" destOrd="0" presId="urn:microsoft.com/office/officeart/2005/8/layout/pList2"/>
-    <dgm:cxn modelId="{D1BBC560-7212-48F0-8973-9D9A0AC7AD08}" type="presParOf" srcId="{6C894116-DFDD-4E28-823F-01FF44BA1B56}" destId="{0E671806-4AA8-4D39-A5C0-4CD58D08FDD7}" srcOrd="0" destOrd="0" presId="urn:microsoft.com/office/officeart/2005/8/layout/pList2"/>
-    <dgm:cxn modelId="{D1ECA667-5CDE-4458-B724-7F43E04E999E}" type="presParOf" srcId="{6C894116-DFDD-4E28-823F-01FF44BA1B56}" destId="{74992C8D-10FC-45C1-9EE6-6EC286FD3560}" srcOrd="1" destOrd="0" presId="urn:microsoft.com/office/officeart/2005/8/layout/pList2"/>
-    <dgm:cxn modelId="{00479D44-C973-4F84-BC80-B4E0B467E8C3}" type="presParOf" srcId="{6C894116-DFDD-4E28-823F-01FF44BA1B56}" destId="{6D1299BA-DC44-4FB3-B1F9-574B2A5A095F}" srcOrd="2" destOrd="0" presId="urn:microsoft.com/office/officeart/2005/8/layout/pList2"/>
-    <dgm:cxn modelId="{4C305F62-AEA5-49A2-B5D5-E75FEC4CD975}" type="presParOf" srcId="{C8E20FD4-5C5E-491C-8D36-EBEB8A4B7F3E}" destId="{EC07CE86-A263-44B6-9D4A-9145B5AAECAB}" srcOrd="1" destOrd="0" presId="urn:microsoft.com/office/officeart/2005/8/layout/pList2"/>
-    <dgm:cxn modelId="{54CC2AB1-9F77-4DB6-B27D-F569BA48BA5B}" type="presParOf" srcId="{C8E20FD4-5C5E-491C-8D36-EBEB8A4B7F3E}" destId="{FBBEE222-ABFA-48F8-B10F-F557EB44921C}" srcOrd="2" destOrd="0" presId="urn:microsoft.com/office/officeart/2005/8/layout/pList2"/>
-    <dgm:cxn modelId="{2C266A28-FA13-4DAA-BD35-2F0EE786ED63}" type="presParOf" srcId="{FBBEE222-ABFA-48F8-B10F-F557EB44921C}" destId="{7DD53052-AAFB-47A9-A140-B65A12CD3753}" srcOrd="0" destOrd="0" presId="urn:microsoft.com/office/officeart/2005/8/layout/pList2"/>
-    <dgm:cxn modelId="{02D0E4E4-A09E-4F01-951C-2C66438FCAD8}" type="presParOf" srcId="{FBBEE222-ABFA-48F8-B10F-F557EB44921C}" destId="{85D5B944-1E21-4816-B3F8-435861A18DC4}" srcOrd="1" destOrd="0" presId="urn:microsoft.com/office/officeart/2005/8/layout/pList2"/>
-    <dgm:cxn modelId="{158BD7E9-E68B-43F2-B02B-49D44485ABEF}" type="presParOf" srcId="{FBBEE222-ABFA-48F8-B10F-F557EB44921C}" destId="{6FBB37D4-8352-4C9F-BA3A-86016EDE27FD}" srcOrd="2" destOrd="0" presId="urn:microsoft.com/office/officeart/2005/8/layout/pList2"/>
-    <dgm:cxn modelId="{9BD525C7-DF5E-4F3A-8305-7B55DD641572}" type="presParOf" srcId="{C8E20FD4-5C5E-491C-8D36-EBEB8A4B7F3E}" destId="{8BCE03ED-2EFB-40BF-B608-387DC6AB99B7}" srcOrd="3" destOrd="0" presId="urn:microsoft.com/office/officeart/2005/8/layout/pList2"/>
-    <dgm:cxn modelId="{696A1F10-7DF7-4856-9C44-A0B3BC072B28}" type="presParOf" srcId="{C8E20FD4-5C5E-491C-8D36-EBEB8A4B7F3E}" destId="{85F2E47B-598F-45EC-A102-ACDCBE569DE8}" srcOrd="4" destOrd="0" presId="urn:microsoft.com/office/officeart/2005/8/layout/pList2"/>
-    <dgm:cxn modelId="{F0054602-9234-46FE-8360-D30F117F615C}" type="presParOf" srcId="{85F2E47B-598F-45EC-A102-ACDCBE569DE8}" destId="{EF0EE7A5-8FB7-4BA5-8F85-1695CD4FB453}" srcOrd="0" destOrd="0" presId="urn:microsoft.com/office/officeart/2005/8/layout/pList2"/>
-    <dgm:cxn modelId="{C50053F3-6A92-4451-93F3-7A6164512BE2}" type="presParOf" srcId="{85F2E47B-598F-45EC-A102-ACDCBE569DE8}" destId="{9C358124-536B-4DFC-81AE-7FCA61AD24A2}" srcOrd="1" destOrd="0" presId="urn:microsoft.com/office/officeart/2005/8/layout/pList2"/>
-    <dgm:cxn modelId="{33E530DF-049B-41AF-9D21-D6C58AD98648}" type="presParOf" srcId="{85F2E47B-598F-45EC-A102-ACDCBE569DE8}" destId="{AC2184B4-96A1-4D8E-80AF-2763D00530C5}" srcOrd="2" destOrd="0" presId="urn:microsoft.com/office/officeart/2005/8/layout/pList2"/>
-    <dgm:cxn modelId="{AEF65778-4282-426E-A4C4-EC978B13AF26}" type="presParOf" srcId="{C8E20FD4-5C5E-491C-8D36-EBEB8A4B7F3E}" destId="{786F6AB2-1CB9-4259-87EF-FA7E491DD02F}" srcOrd="5" destOrd="0" presId="urn:microsoft.com/office/officeart/2005/8/layout/pList2"/>
-    <dgm:cxn modelId="{C1F75804-1423-41E5-B1A5-65FCCAC7B3D3}" type="presParOf" srcId="{C8E20FD4-5C5E-491C-8D36-EBEB8A4B7F3E}" destId="{06DB018F-A45F-41D1-B121-5336D98C2779}" srcOrd="6" destOrd="0" presId="urn:microsoft.com/office/officeart/2005/8/layout/pList2"/>
-    <dgm:cxn modelId="{B046EDA5-7D69-4DC7-83C7-E343AD53E92F}" type="presParOf" srcId="{06DB018F-A45F-41D1-B121-5336D98C2779}" destId="{42EFD938-A1CE-4444-BD5A-AB19F05097F2}" srcOrd="0" destOrd="0" presId="urn:microsoft.com/office/officeart/2005/8/layout/pList2"/>
-    <dgm:cxn modelId="{CC82C05A-9999-42FA-99F8-17EB3CC40FFA}" type="presParOf" srcId="{06DB018F-A45F-41D1-B121-5336D98C2779}" destId="{F9F06519-DC5F-493F-8216-4DC6C80F66EC}" srcOrd="1" destOrd="0" presId="urn:microsoft.com/office/officeart/2005/8/layout/pList2"/>
-    <dgm:cxn modelId="{B8E923AC-A65B-4CF9-AAE4-B9C04C0D15A7}" type="presParOf" srcId="{06DB018F-A45F-41D1-B121-5336D98C2779}" destId="{ECF2C431-7BDD-4A9E-8424-5AA5D4182050}" srcOrd="2" destOrd="0" presId="urn:microsoft.com/office/officeart/2005/8/layout/pList2"/>
-    <dgm:cxn modelId="{C9F8D34C-BCCA-4031-A245-4AAE03A471C6}" type="presParOf" srcId="{C8E20FD4-5C5E-491C-8D36-EBEB8A4B7F3E}" destId="{53A52F4C-AC09-4C50-B08A-4685FE8D4BA0}" srcOrd="7" destOrd="0" presId="urn:microsoft.com/office/officeart/2005/8/layout/pList2"/>
-    <dgm:cxn modelId="{A46B9406-F08D-4FEA-AA37-8E221DDF39FF}" type="presParOf" srcId="{C8E20FD4-5C5E-491C-8D36-EBEB8A4B7F3E}" destId="{96EEAD21-090D-4ED1-8D13-7F6BCB148FD3}" srcOrd="8" destOrd="0" presId="urn:microsoft.com/office/officeart/2005/8/layout/pList2"/>
-    <dgm:cxn modelId="{C1150C0A-0871-4B85-A4E0-2C09FEDFD2BC}" type="presParOf" srcId="{96EEAD21-090D-4ED1-8D13-7F6BCB148FD3}" destId="{B49AFC41-1D78-4343-8970-3B07E1EC45BE}" srcOrd="0" destOrd="0" presId="urn:microsoft.com/office/officeart/2005/8/layout/pList2"/>
-    <dgm:cxn modelId="{6D74C68A-D484-4FB4-8C3F-39313F984BF3}" type="presParOf" srcId="{96EEAD21-090D-4ED1-8D13-7F6BCB148FD3}" destId="{35D66144-462F-4C2F-967D-759874D752CF}" srcOrd="1" destOrd="0" presId="urn:microsoft.com/office/officeart/2005/8/layout/pList2"/>
-    <dgm:cxn modelId="{63C40E2F-FB6C-4D19-A160-6CA2CBF0CC8A}" type="presParOf" srcId="{96EEAD21-090D-4ED1-8D13-7F6BCB148FD3}" destId="{D6EF3429-4E1A-41AC-9027-A90F47F188B7}" srcOrd="2" destOrd="0" presId="urn:microsoft.com/office/officeart/2005/8/layout/pList2"/>
-  </dgm:cxnLst>
-  <dgm:bg/>
-  <dgm:whole/>
-  <dgm:extLst>
-    <a:ext uri="http://schemas.microsoft.com/office/drawing/2008/diagram">
-      <dsp:dataModelExt xmlns:dsp="http://schemas.microsoft.com/office/drawing/2008/diagram" relId="rId6" minVer="http://schemas.openxmlformats.org/drawingml/2006/diagram"/>
-    </a:ext>
-  </dgm:extLst>
-</dgm:dataModel>
-</file>
-
-<file path=ppt/diagrams/data2.xml><?xml version="1.0" encoding="utf-8"?>
-<dgm:dataModel xmlns:dgm="http://schemas.openxmlformats.org/drawingml/2006/diagram" xmlns:a="http://schemas.openxmlformats.org/drawingml/2006/main">
-  <dgm:ptLst>
     <dgm:pt modelId="{31857AF2-41F0-4E6D-93EA-7C99799CDFA4}" type="doc">
       <dgm:prSet loTypeId="urn:microsoft.com/office/officeart/2005/8/layout/cycle1" loCatId="cycle" qsTypeId="urn:microsoft.com/office/officeart/2005/8/quickstyle/simple1" qsCatId="simple" csTypeId="urn:microsoft.com/office/officeart/2005/8/colors/accent1_1" csCatId="accent1" phldr="1"/>
       <dgm:spPr/>
@@ -4367,724 +3193,6 @@
 </file>
 
 <file path=ppt/diagrams/drawing1.xml><?xml version="1.0" encoding="utf-8"?>
-<dsp:drawing xmlns:dgm="http://schemas.openxmlformats.org/drawingml/2006/diagram" xmlns:dsp="http://schemas.microsoft.com/office/drawing/2008/diagram" xmlns:a="http://schemas.openxmlformats.org/drawingml/2006/main">
-  <dsp:spTree>
-    <dsp:nvGrpSpPr>
-      <dsp:cNvPr id="0" name=""/>
-      <dsp:cNvGrpSpPr/>
-    </dsp:nvGrpSpPr>
-    <dsp:grpSpPr/>
-    <dsp:sp modelId="{2FFC36F6-DA35-4049-93CD-D37C309A8A11}">
-      <dsp:nvSpPr>
-        <dsp:cNvPr id="0" name=""/>
-        <dsp:cNvSpPr/>
-      </dsp:nvSpPr>
-      <dsp:spPr>
-        <a:xfrm>
-          <a:off x="0" y="0"/>
-          <a:ext cx="11141049" cy="2164384"/>
-        </a:xfrm>
-        <a:prstGeom prst="roundRect">
-          <a:avLst>
-            <a:gd name="adj" fmla="val 10000"/>
-          </a:avLst>
-        </a:prstGeom>
-        <a:solidFill>
-          <a:schemeClr val="accent1">
-            <a:alpha val="90000"/>
-            <a:tint val="40000"/>
-            <a:hueOff val="0"/>
-            <a:satOff val="0"/>
-            <a:lumOff val="0"/>
-            <a:alphaOff val="0"/>
-          </a:schemeClr>
-        </a:solidFill>
-        <a:ln w="12700" cap="flat" cmpd="sng" algn="ctr">
-          <a:solidFill>
-            <a:schemeClr val="accent1">
-              <a:alpha val="90000"/>
-              <a:tint val="40000"/>
-              <a:hueOff val="0"/>
-              <a:satOff val="0"/>
-              <a:lumOff val="0"/>
-              <a:alphaOff val="0"/>
-            </a:schemeClr>
-          </a:solidFill>
-          <a:prstDash val="solid"/>
-          <a:miter lim="800000"/>
-        </a:ln>
-        <a:effectLst/>
-      </dsp:spPr>
-      <dsp:style>
-        <a:lnRef idx="2">
-          <a:scrgbClr r="0" g="0" b="0"/>
-        </a:lnRef>
-        <a:fillRef idx="1">
-          <a:scrgbClr r="0" g="0" b="0"/>
-        </a:fillRef>
-        <a:effectRef idx="0">
-          <a:scrgbClr r="0" g="0" b="0"/>
-        </a:effectRef>
-        <a:fontRef idx="minor"/>
-      </dsp:style>
-    </dsp:sp>
-    <dsp:sp modelId="{6D1299BA-DC44-4FB3-B1F9-574B2A5A095F}">
-      <dsp:nvSpPr>
-        <dsp:cNvPr id="0" name=""/>
-        <dsp:cNvSpPr/>
-      </dsp:nvSpPr>
-      <dsp:spPr>
-        <a:xfrm>
-          <a:off x="337810" y="288584"/>
-          <a:ext cx="1938042" cy="1587215"/>
-        </a:xfrm>
-        <a:prstGeom prst="roundRect">
-          <a:avLst>
-            <a:gd name="adj" fmla="val 10000"/>
-          </a:avLst>
-        </a:prstGeom>
-        <a:blipFill>
-          <a:blip xmlns:r="http://schemas.openxmlformats.org/officeDocument/2006/relationships" r:embed="rId1"/>
-          <a:srcRect/>
-          <a:stretch>
-            <a:fillRect t="-31000" b="-31000"/>
-          </a:stretch>
-        </a:blipFill>
-        <a:ln w="12700" cap="flat" cmpd="sng" algn="ctr">
-          <a:solidFill>
-            <a:schemeClr val="lt1">
-              <a:hueOff val="0"/>
-              <a:satOff val="0"/>
-              <a:lumOff val="0"/>
-              <a:alphaOff val="0"/>
-            </a:schemeClr>
-          </a:solidFill>
-          <a:prstDash val="solid"/>
-          <a:miter lim="800000"/>
-        </a:ln>
-        <a:effectLst/>
-      </dsp:spPr>
-      <dsp:style>
-        <a:lnRef idx="2">
-          <a:scrgbClr r="0" g="0" b="0"/>
-        </a:lnRef>
-        <a:fillRef idx="1">
-          <a:scrgbClr r="0" g="0" b="0"/>
-        </a:fillRef>
-        <a:effectRef idx="0">
-          <a:scrgbClr r="0" g="0" b="0"/>
-        </a:effectRef>
-        <a:fontRef idx="minor"/>
-      </dsp:style>
-    </dsp:sp>
-    <dsp:sp modelId="{0E671806-4AA8-4D39-A5C0-4CD58D08FDD7}">
-      <dsp:nvSpPr>
-        <dsp:cNvPr id="0" name=""/>
-        <dsp:cNvSpPr/>
-      </dsp:nvSpPr>
-      <dsp:spPr>
-        <a:xfrm rot="10800000">
-          <a:off x="337810" y="2164384"/>
-          <a:ext cx="1938042" cy="2645359"/>
-        </a:xfrm>
-        <a:prstGeom prst="round2SameRect">
-          <a:avLst>
-            <a:gd name="adj1" fmla="val 10500"/>
-            <a:gd name="adj2" fmla="val 0"/>
-          </a:avLst>
-        </a:prstGeom>
-        <a:solidFill>
-          <a:schemeClr val="accent1">
-            <a:hueOff val="0"/>
-            <a:satOff val="0"/>
-            <a:lumOff val="0"/>
-            <a:alphaOff val="0"/>
-          </a:schemeClr>
-        </a:solidFill>
-        <a:ln w="12700" cap="flat" cmpd="sng" algn="ctr">
-          <a:solidFill>
-            <a:schemeClr val="lt1">
-              <a:hueOff val="0"/>
-              <a:satOff val="0"/>
-              <a:lumOff val="0"/>
-              <a:alphaOff val="0"/>
-            </a:schemeClr>
-          </a:solidFill>
-          <a:prstDash val="solid"/>
-          <a:miter lim="800000"/>
-        </a:ln>
-        <a:effectLst/>
-      </dsp:spPr>
-      <dsp:style>
-        <a:lnRef idx="2">
-          <a:scrgbClr r="0" g="0" b="0"/>
-        </a:lnRef>
-        <a:fillRef idx="1">
-          <a:scrgbClr r="0" g="0" b="0"/>
-        </a:fillRef>
-        <a:effectRef idx="0">
-          <a:scrgbClr r="0" g="0" b="0"/>
-        </a:effectRef>
-        <a:fontRef idx="minor">
-          <a:schemeClr val="lt1"/>
-        </a:fontRef>
-      </dsp:style>
-      <dsp:txBody>
-        <a:bodyPr spcFirstLastPara="0" vert="horz" wrap="square" lIns="206248" tIns="206248" rIns="206248" bIns="206248" numCol="1" spcCol="1270" anchor="t" anchorCtr="0">
-          <a:noAutofit/>
-        </a:bodyPr>
-        <a:lstStyle/>
-        <a:p>
-          <a:pPr marL="0" lvl="0" indent="0" algn="ctr" defTabSz="1289050">
-            <a:lnSpc>
-              <a:spcPct val="90000"/>
-            </a:lnSpc>
-            <a:spcBef>
-              <a:spcPct val="0"/>
-            </a:spcBef>
-            <a:spcAft>
-              <a:spcPct val="35000"/>
-            </a:spcAft>
-            <a:buNone/>
-          </a:pPr>
-          <a:r>
-            <a:rPr lang="en-US" sz="2900" kern="1200" dirty="0"/>
-            <a:t>Anti-AI</a:t>
-          </a:r>
-        </a:p>
-      </dsp:txBody>
-      <dsp:txXfrm rot="10800000">
-        <a:off x="397411" y="2164384"/>
-        <a:ext cx="1818840" cy="2585758"/>
-      </dsp:txXfrm>
-    </dsp:sp>
-    <dsp:sp modelId="{6FBB37D4-8352-4C9F-BA3A-86016EDE27FD}">
-      <dsp:nvSpPr>
-        <dsp:cNvPr id="0" name=""/>
-        <dsp:cNvSpPr/>
-      </dsp:nvSpPr>
-      <dsp:spPr>
-        <a:xfrm>
-          <a:off x="2469657" y="288584"/>
-          <a:ext cx="1938042" cy="1587215"/>
-        </a:xfrm>
-        <a:prstGeom prst="roundRect">
-          <a:avLst>
-            <a:gd name="adj" fmla="val 10000"/>
-          </a:avLst>
-        </a:prstGeom>
-        <a:blipFill>
-          <a:blip xmlns:r="http://schemas.openxmlformats.org/officeDocument/2006/relationships" r:embed="rId2"/>
-          <a:srcRect/>
-          <a:stretch>
-            <a:fillRect l="-23000" r="-23000"/>
-          </a:stretch>
-        </a:blipFill>
-        <a:ln w="12700" cap="flat" cmpd="sng" algn="ctr">
-          <a:solidFill>
-            <a:schemeClr val="lt1">
-              <a:hueOff val="0"/>
-              <a:satOff val="0"/>
-              <a:lumOff val="0"/>
-              <a:alphaOff val="0"/>
-            </a:schemeClr>
-          </a:solidFill>
-          <a:prstDash val="solid"/>
-          <a:miter lim="800000"/>
-        </a:ln>
-        <a:effectLst/>
-      </dsp:spPr>
-      <dsp:style>
-        <a:lnRef idx="2">
-          <a:scrgbClr r="0" g="0" b="0"/>
-        </a:lnRef>
-        <a:fillRef idx="1">
-          <a:scrgbClr r="0" g="0" b="0"/>
-        </a:fillRef>
-        <a:effectRef idx="0">
-          <a:scrgbClr r="0" g="0" b="0"/>
-        </a:effectRef>
-        <a:fontRef idx="minor"/>
-      </dsp:style>
-    </dsp:sp>
-    <dsp:sp modelId="{7DD53052-AAFB-47A9-A140-B65A12CD3753}">
-      <dsp:nvSpPr>
-        <dsp:cNvPr id="0" name=""/>
-        <dsp:cNvSpPr/>
-      </dsp:nvSpPr>
-      <dsp:spPr>
-        <a:xfrm rot="10800000">
-          <a:off x="2469657" y="2164384"/>
-          <a:ext cx="1938042" cy="2645359"/>
-        </a:xfrm>
-        <a:prstGeom prst="round2SameRect">
-          <a:avLst>
-            <a:gd name="adj1" fmla="val 10500"/>
-            <a:gd name="adj2" fmla="val 0"/>
-          </a:avLst>
-        </a:prstGeom>
-        <a:solidFill>
-          <a:schemeClr val="accent1">
-            <a:hueOff val="0"/>
-            <a:satOff val="0"/>
-            <a:lumOff val="0"/>
-            <a:alphaOff val="0"/>
-          </a:schemeClr>
-        </a:solidFill>
-        <a:ln w="12700" cap="flat" cmpd="sng" algn="ctr">
-          <a:solidFill>
-            <a:schemeClr val="lt1">
-              <a:hueOff val="0"/>
-              <a:satOff val="0"/>
-              <a:lumOff val="0"/>
-              <a:alphaOff val="0"/>
-            </a:schemeClr>
-          </a:solidFill>
-          <a:prstDash val="solid"/>
-          <a:miter lim="800000"/>
-        </a:ln>
-        <a:effectLst/>
-      </dsp:spPr>
-      <dsp:style>
-        <a:lnRef idx="2">
-          <a:scrgbClr r="0" g="0" b="0"/>
-        </a:lnRef>
-        <a:fillRef idx="1">
-          <a:scrgbClr r="0" g="0" b="0"/>
-        </a:fillRef>
-        <a:effectRef idx="0">
-          <a:scrgbClr r="0" g="0" b="0"/>
-        </a:effectRef>
-        <a:fontRef idx="minor">
-          <a:schemeClr val="lt1"/>
-        </a:fontRef>
-      </dsp:style>
-      <dsp:txBody>
-        <a:bodyPr spcFirstLastPara="0" vert="horz" wrap="square" lIns="206248" tIns="206248" rIns="206248" bIns="206248" numCol="1" spcCol="1270" anchor="t" anchorCtr="0">
-          <a:noAutofit/>
-        </a:bodyPr>
-        <a:lstStyle/>
-        <a:p>
-          <a:pPr marL="0" lvl="0" indent="0" algn="ctr" defTabSz="1289050">
-            <a:lnSpc>
-              <a:spcPct val="90000"/>
-            </a:lnSpc>
-            <a:spcBef>
-              <a:spcPct val="0"/>
-            </a:spcBef>
-            <a:spcAft>
-              <a:spcPct val="35000"/>
-            </a:spcAft>
-            <a:buNone/>
-          </a:pPr>
-          <a:r>
-            <a:rPr lang="en-US" sz="2900" kern="1200"/>
-            <a:t>Chat about my problem</a:t>
-          </a:r>
-          <a:endParaRPr lang="en-US" sz="2900" kern="1200" dirty="0"/>
-        </a:p>
-      </dsp:txBody>
-      <dsp:txXfrm rot="10800000">
-        <a:off x="2529258" y="2164384"/>
-        <a:ext cx="1818840" cy="2585758"/>
-      </dsp:txXfrm>
-    </dsp:sp>
-    <dsp:sp modelId="{AC2184B4-96A1-4D8E-80AF-2763D00530C5}">
-      <dsp:nvSpPr>
-        <dsp:cNvPr id="0" name=""/>
-        <dsp:cNvSpPr/>
-      </dsp:nvSpPr>
-      <dsp:spPr>
-        <a:xfrm>
-          <a:off x="4601503" y="288584"/>
-          <a:ext cx="1938042" cy="1587215"/>
-        </a:xfrm>
-        <a:prstGeom prst="roundRect">
-          <a:avLst>
-            <a:gd name="adj" fmla="val 10000"/>
-          </a:avLst>
-        </a:prstGeom>
-        <a:blipFill>
-          <a:blip xmlns:r="http://schemas.openxmlformats.org/officeDocument/2006/relationships" r:embed="rId3"/>
-          <a:srcRect/>
-          <a:stretch>
-            <a:fillRect t="-3000" b="-3000"/>
-          </a:stretch>
-        </a:blipFill>
-        <a:ln w="12700" cap="flat" cmpd="sng" algn="ctr">
-          <a:solidFill>
-            <a:schemeClr val="lt1">
-              <a:hueOff val="0"/>
-              <a:satOff val="0"/>
-              <a:lumOff val="0"/>
-              <a:alphaOff val="0"/>
-            </a:schemeClr>
-          </a:solidFill>
-          <a:prstDash val="solid"/>
-          <a:miter lim="800000"/>
-        </a:ln>
-        <a:effectLst/>
-      </dsp:spPr>
-      <dsp:style>
-        <a:lnRef idx="2">
-          <a:scrgbClr r="0" g="0" b="0"/>
-        </a:lnRef>
-        <a:fillRef idx="1">
-          <a:scrgbClr r="0" g="0" b="0"/>
-        </a:fillRef>
-        <a:effectRef idx="0">
-          <a:scrgbClr r="0" g="0" b="0"/>
-        </a:effectRef>
-        <a:fontRef idx="minor"/>
-      </dsp:style>
-    </dsp:sp>
-    <dsp:sp modelId="{EF0EE7A5-8FB7-4BA5-8F85-1695CD4FB453}">
-      <dsp:nvSpPr>
-        <dsp:cNvPr id="0" name=""/>
-        <dsp:cNvSpPr/>
-      </dsp:nvSpPr>
-      <dsp:spPr>
-        <a:xfrm rot="10800000">
-          <a:off x="4601503" y="2164384"/>
-          <a:ext cx="1938042" cy="2645359"/>
-        </a:xfrm>
-        <a:prstGeom prst="round2SameRect">
-          <a:avLst>
-            <a:gd name="adj1" fmla="val 10500"/>
-            <a:gd name="adj2" fmla="val 0"/>
-          </a:avLst>
-        </a:prstGeom>
-        <a:solidFill>
-          <a:schemeClr val="accent1">
-            <a:hueOff val="0"/>
-            <a:satOff val="0"/>
-            <a:lumOff val="0"/>
-            <a:alphaOff val="0"/>
-          </a:schemeClr>
-        </a:solidFill>
-        <a:ln w="12700" cap="flat" cmpd="sng" algn="ctr">
-          <a:solidFill>
-            <a:schemeClr val="lt1">
-              <a:hueOff val="0"/>
-              <a:satOff val="0"/>
-              <a:lumOff val="0"/>
-              <a:alphaOff val="0"/>
-            </a:schemeClr>
-          </a:solidFill>
-          <a:prstDash val="solid"/>
-          <a:miter lim="800000"/>
-        </a:ln>
-        <a:effectLst/>
-      </dsp:spPr>
-      <dsp:style>
-        <a:lnRef idx="2">
-          <a:scrgbClr r="0" g="0" b="0"/>
-        </a:lnRef>
-        <a:fillRef idx="1">
-          <a:scrgbClr r="0" g="0" b="0"/>
-        </a:fillRef>
-        <a:effectRef idx="0">
-          <a:scrgbClr r="0" g="0" b="0"/>
-        </a:effectRef>
-        <a:fontRef idx="minor">
-          <a:schemeClr val="lt1"/>
-        </a:fontRef>
-      </dsp:style>
-      <dsp:txBody>
-        <a:bodyPr spcFirstLastPara="0" vert="horz" wrap="square" lIns="206248" tIns="206248" rIns="206248" bIns="206248" numCol="1" spcCol="1270" anchor="t" anchorCtr="0">
-          <a:noAutofit/>
-        </a:bodyPr>
-        <a:lstStyle/>
-        <a:p>
-          <a:pPr marL="0" lvl="0" indent="0" algn="ctr" defTabSz="1289050">
-            <a:lnSpc>
-              <a:spcPct val="90000"/>
-            </a:lnSpc>
-            <a:spcBef>
-              <a:spcPct val="0"/>
-            </a:spcBef>
-            <a:spcAft>
-              <a:spcPct val="35000"/>
-            </a:spcAft>
-            <a:buNone/>
-          </a:pPr>
-          <a:r>
-            <a:rPr lang="en-US" sz="2900" kern="1200" dirty="0"/>
-            <a:t>Agents help me on my tasks</a:t>
-          </a:r>
-        </a:p>
-      </dsp:txBody>
-      <dsp:txXfrm rot="10800000">
-        <a:off x="4661104" y="2164384"/>
-        <a:ext cx="1818840" cy="2585758"/>
-      </dsp:txXfrm>
-    </dsp:sp>
-    <dsp:sp modelId="{ECF2C431-7BDD-4A9E-8424-5AA5D4182050}">
-      <dsp:nvSpPr>
-        <dsp:cNvPr id="0" name=""/>
-        <dsp:cNvSpPr/>
-      </dsp:nvSpPr>
-      <dsp:spPr>
-        <a:xfrm>
-          <a:off x="6733349" y="288584"/>
-          <a:ext cx="1938042" cy="1587215"/>
-        </a:xfrm>
-        <a:prstGeom prst="roundRect">
-          <a:avLst>
-            <a:gd name="adj" fmla="val 10000"/>
-          </a:avLst>
-        </a:prstGeom>
-        <a:blipFill>
-          <a:blip xmlns:r="http://schemas.openxmlformats.org/officeDocument/2006/relationships" r:embed="rId4"/>
-          <a:srcRect/>
-          <a:stretch>
-            <a:fillRect t="-1000" b="-1000"/>
-          </a:stretch>
-        </a:blipFill>
-        <a:ln w="12700" cap="flat" cmpd="sng" algn="ctr">
-          <a:solidFill>
-            <a:schemeClr val="lt1">
-              <a:hueOff val="0"/>
-              <a:satOff val="0"/>
-              <a:lumOff val="0"/>
-              <a:alphaOff val="0"/>
-            </a:schemeClr>
-          </a:solidFill>
-          <a:prstDash val="solid"/>
-          <a:miter lim="800000"/>
-        </a:ln>
-        <a:effectLst/>
-      </dsp:spPr>
-      <dsp:style>
-        <a:lnRef idx="2">
-          <a:scrgbClr r="0" g="0" b="0"/>
-        </a:lnRef>
-        <a:fillRef idx="1">
-          <a:scrgbClr r="0" g="0" b="0"/>
-        </a:fillRef>
-        <a:effectRef idx="0">
-          <a:scrgbClr r="0" g="0" b="0"/>
-        </a:effectRef>
-        <a:fontRef idx="minor"/>
-      </dsp:style>
-    </dsp:sp>
-    <dsp:sp modelId="{42EFD938-A1CE-4444-BD5A-AB19F05097F2}">
-      <dsp:nvSpPr>
-        <dsp:cNvPr id="0" name=""/>
-        <dsp:cNvSpPr/>
-      </dsp:nvSpPr>
-      <dsp:spPr>
-        <a:xfrm rot="10800000">
-          <a:off x="6733349" y="2164384"/>
-          <a:ext cx="1938042" cy="2645359"/>
-        </a:xfrm>
-        <a:prstGeom prst="round2SameRect">
-          <a:avLst>
-            <a:gd name="adj1" fmla="val 10500"/>
-            <a:gd name="adj2" fmla="val 0"/>
-          </a:avLst>
-        </a:prstGeom>
-        <a:solidFill>
-          <a:schemeClr val="accent1">
-            <a:hueOff val="0"/>
-            <a:satOff val="0"/>
-            <a:lumOff val="0"/>
-            <a:alphaOff val="0"/>
-          </a:schemeClr>
-        </a:solidFill>
-        <a:ln w="12700" cap="flat" cmpd="sng" algn="ctr">
-          <a:solidFill>
-            <a:schemeClr val="lt1">
-              <a:hueOff val="0"/>
-              <a:satOff val="0"/>
-              <a:lumOff val="0"/>
-              <a:alphaOff val="0"/>
-            </a:schemeClr>
-          </a:solidFill>
-          <a:prstDash val="solid"/>
-          <a:miter lim="800000"/>
-        </a:ln>
-        <a:effectLst/>
-      </dsp:spPr>
-      <dsp:style>
-        <a:lnRef idx="2">
-          <a:scrgbClr r="0" g="0" b="0"/>
-        </a:lnRef>
-        <a:fillRef idx="1">
-          <a:scrgbClr r="0" g="0" b="0"/>
-        </a:fillRef>
-        <a:effectRef idx="0">
-          <a:scrgbClr r="0" g="0" b="0"/>
-        </a:effectRef>
-        <a:fontRef idx="minor">
-          <a:schemeClr val="lt1"/>
-        </a:fontRef>
-      </dsp:style>
-      <dsp:txBody>
-        <a:bodyPr spcFirstLastPara="0" vert="horz" wrap="square" lIns="206248" tIns="206248" rIns="206248" bIns="206248" numCol="1" spcCol="1270" anchor="t" anchorCtr="0">
-          <a:noAutofit/>
-        </a:bodyPr>
-        <a:lstStyle/>
-        <a:p>
-          <a:pPr marL="0" lvl="0" indent="0" algn="ctr" defTabSz="1289050">
-            <a:lnSpc>
-              <a:spcPct val="90000"/>
-            </a:lnSpc>
-            <a:spcBef>
-              <a:spcPct val="0"/>
-            </a:spcBef>
-            <a:spcAft>
-              <a:spcPct val="35000"/>
-            </a:spcAft>
-            <a:buNone/>
-          </a:pPr>
-          <a:r>
-            <a:rPr lang="en-US" sz="2900" kern="1200" dirty="0"/>
-            <a:t>I assign work to Agents and then review</a:t>
-          </a:r>
-        </a:p>
-      </dsp:txBody>
-      <dsp:txXfrm rot="10800000">
-        <a:off x="6792950" y="2164384"/>
-        <a:ext cx="1818840" cy="2585758"/>
-      </dsp:txXfrm>
-    </dsp:sp>
-    <dsp:sp modelId="{D6EF3429-4E1A-41AC-9027-A90F47F188B7}">
-      <dsp:nvSpPr>
-        <dsp:cNvPr id="0" name=""/>
-        <dsp:cNvSpPr/>
-      </dsp:nvSpPr>
-      <dsp:spPr>
-        <a:xfrm>
-          <a:off x="8865195" y="288584"/>
-          <a:ext cx="1938042" cy="1587215"/>
-        </a:xfrm>
-        <a:prstGeom prst="roundRect">
-          <a:avLst>
-            <a:gd name="adj" fmla="val 10000"/>
-          </a:avLst>
-        </a:prstGeom>
-        <a:blipFill>
-          <a:blip xmlns:r="http://schemas.openxmlformats.org/officeDocument/2006/relationships" r:embed="rId5"/>
-          <a:srcRect/>
-          <a:stretch>
-            <a:fillRect l="-29000" r="-29000"/>
-          </a:stretch>
-        </a:blipFill>
-        <a:ln w="12700" cap="flat" cmpd="sng" algn="ctr">
-          <a:solidFill>
-            <a:schemeClr val="lt1">
-              <a:hueOff val="0"/>
-              <a:satOff val="0"/>
-              <a:lumOff val="0"/>
-              <a:alphaOff val="0"/>
-            </a:schemeClr>
-          </a:solidFill>
-          <a:prstDash val="solid"/>
-          <a:miter lim="800000"/>
-        </a:ln>
-        <a:effectLst/>
-      </dsp:spPr>
-      <dsp:style>
-        <a:lnRef idx="2">
-          <a:scrgbClr r="0" g="0" b="0"/>
-        </a:lnRef>
-        <a:fillRef idx="1">
-          <a:scrgbClr r="0" g="0" b="0"/>
-        </a:fillRef>
-        <a:effectRef idx="0">
-          <a:scrgbClr r="0" g="0" b="0"/>
-        </a:effectRef>
-        <a:fontRef idx="minor"/>
-      </dsp:style>
-    </dsp:sp>
-    <dsp:sp modelId="{B49AFC41-1D78-4343-8970-3B07E1EC45BE}">
-      <dsp:nvSpPr>
-        <dsp:cNvPr id="0" name=""/>
-        <dsp:cNvSpPr/>
-      </dsp:nvSpPr>
-      <dsp:spPr>
-        <a:xfrm rot="10800000">
-          <a:off x="8865195" y="2164384"/>
-          <a:ext cx="1938042" cy="2645359"/>
-        </a:xfrm>
-        <a:prstGeom prst="round2SameRect">
-          <a:avLst>
-            <a:gd name="adj1" fmla="val 10500"/>
-            <a:gd name="adj2" fmla="val 0"/>
-          </a:avLst>
-        </a:prstGeom>
-        <a:solidFill>
-          <a:schemeClr val="accent1">
-            <a:hueOff val="0"/>
-            <a:satOff val="0"/>
-            <a:lumOff val="0"/>
-            <a:alphaOff val="0"/>
-          </a:schemeClr>
-        </a:solidFill>
-        <a:ln w="12700" cap="flat" cmpd="sng" algn="ctr">
-          <a:solidFill>
-            <a:schemeClr val="lt1">
-              <a:hueOff val="0"/>
-              <a:satOff val="0"/>
-              <a:lumOff val="0"/>
-              <a:alphaOff val="0"/>
-            </a:schemeClr>
-          </a:solidFill>
-          <a:prstDash val="solid"/>
-          <a:miter lim="800000"/>
-        </a:ln>
-        <a:effectLst/>
-      </dsp:spPr>
-      <dsp:style>
-        <a:lnRef idx="2">
-          <a:scrgbClr r="0" g="0" b="0"/>
-        </a:lnRef>
-        <a:fillRef idx="1">
-          <a:scrgbClr r="0" g="0" b="0"/>
-        </a:fillRef>
-        <a:effectRef idx="0">
-          <a:scrgbClr r="0" g="0" b="0"/>
-        </a:effectRef>
-        <a:fontRef idx="minor">
-          <a:schemeClr val="lt1"/>
-        </a:fontRef>
-      </dsp:style>
-      <dsp:txBody>
-        <a:bodyPr spcFirstLastPara="0" vert="horz" wrap="square" lIns="206248" tIns="206248" rIns="206248" bIns="206248" numCol="1" spcCol="1270" anchor="t" anchorCtr="0">
-          <a:noAutofit/>
-        </a:bodyPr>
-        <a:lstStyle/>
-        <a:p>
-          <a:pPr marL="0" lvl="0" indent="0" algn="ctr" defTabSz="1289050">
-            <a:lnSpc>
-              <a:spcPct val="90000"/>
-            </a:lnSpc>
-            <a:spcBef>
-              <a:spcPct val="0"/>
-            </a:spcBef>
-            <a:spcAft>
-              <a:spcPct val="35000"/>
-            </a:spcAft>
-            <a:buNone/>
-          </a:pPr>
-          <a:r>
-            <a:rPr lang="en-US" sz="2900" kern="1200"/>
-            <a:t>AI runs my life entirely</a:t>
-          </a:r>
-          <a:endParaRPr lang="en-US" sz="2900" kern="1200" dirty="0"/>
-        </a:p>
-      </dsp:txBody>
-      <dsp:txXfrm rot="10800000">
-        <a:off x="8924796" y="2164384"/>
-        <a:ext cx="1818840" cy="2585758"/>
-      </dsp:txXfrm>
-    </dsp:sp>
-  </dsp:spTree>
-</dsp:drawing>
-</file>
-
-<file path=ppt/diagrams/drawing2.xml><?xml version="1.0" encoding="utf-8"?>
 <dsp:drawing xmlns:dgm="http://schemas.openxmlformats.org/drawingml/2006/diagram" xmlns:dsp="http://schemas.microsoft.com/office/drawing/2008/diagram" xmlns:a="http://schemas.openxmlformats.org/drawingml/2006/main">
   <dsp:spTree>
     <dsp:nvGrpSpPr>
@@ -5449,195 +3557,6 @@
 </file>
 
 <file path=ppt/diagrams/layout1.xml><?xml version="1.0" encoding="utf-8"?>
-<dgm:layoutDef xmlns:dgm="http://schemas.openxmlformats.org/drawingml/2006/diagram" xmlns:a="http://schemas.openxmlformats.org/drawingml/2006/main" uniqueId="urn:microsoft.com/office/officeart/2005/8/layout/pList2">
-  <dgm:title val=""/>
-  <dgm:desc val=""/>
-  <dgm:catLst>
-    <dgm:cat type="list" pri="11000"/>
-    <dgm:cat type="picture" pri="24000"/>
-    <dgm:cat type="pictureconvert" pri="24000"/>
-  </dgm:catLst>
-  <dgm:sampData useDef="1">
-    <dgm:dataModel>
-      <dgm:ptLst/>
-      <dgm:bg/>
-      <dgm:whole/>
-    </dgm:dataModel>
-  </dgm:sampData>
-  <dgm:styleData>
-    <dgm:dataModel>
-      <dgm:ptLst>
-        <dgm:pt modelId="0" type="doc"/>
-        <dgm:pt modelId="1"/>
-        <dgm:pt modelId="2"/>
-      </dgm:ptLst>
-      <dgm:cxnLst>
-        <dgm:cxn modelId="3" srcId="0" destId="1" srcOrd="0" destOrd="0"/>
-        <dgm:cxn modelId="4" srcId="0" destId="2" srcOrd="1" destOrd="0"/>
-      </dgm:cxnLst>
-      <dgm:bg/>
-      <dgm:whole/>
-    </dgm:dataModel>
-  </dgm:styleData>
-  <dgm:clrData>
-    <dgm:dataModel>
-      <dgm:ptLst>
-        <dgm:pt modelId="0" type="doc"/>
-        <dgm:pt modelId="1"/>
-        <dgm:pt modelId="2"/>
-        <dgm:pt modelId="3"/>
-        <dgm:pt modelId="4"/>
-      </dgm:ptLst>
-      <dgm:cxnLst>
-        <dgm:cxn modelId="5" srcId="0" destId="1" srcOrd="0" destOrd="0"/>
-        <dgm:cxn modelId="6" srcId="0" destId="2" srcOrd="1" destOrd="0"/>
-        <dgm:cxn modelId="7" srcId="0" destId="3" srcOrd="2" destOrd="0"/>
-        <dgm:cxn modelId="8" srcId="0" destId="4" srcOrd="3" destOrd="0"/>
-      </dgm:cxnLst>
-      <dgm:bg/>
-      <dgm:whole/>
-    </dgm:dataModel>
-  </dgm:clrData>
-  <dgm:layoutNode name="Name0">
-    <dgm:varLst>
-      <dgm:dir/>
-      <dgm:resizeHandles val="exact"/>
-    </dgm:varLst>
-    <dgm:alg type="composite"/>
-    <dgm:shape xmlns:r="http://schemas.openxmlformats.org/officeDocument/2006/relationships" r:blip="">
-      <dgm:adjLst/>
-    </dgm:shape>
-    <dgm:presOf/>
-    <dgm:constrLst>
-      <dgm:constr type="w" for="ch" forName="bkgdShp" refType="w"/>
-      <dgm:constr type="h" for="ch" forName="bkgdShp" refType="h" fact="0.45"/>
-      <dgm:constr type="t" for="ch" forName="bkgdShp"/>
-      <dgm:constr type="w" for="ch" forName="linComp" refType="w" fact="0.94"/>
-      <dgm:constr type="h" for="ch" forName="linComp" refType="h"/>
-      <dgm:constr type="ctrX" for="ch" forName="linComp" refType="w" fact="0.5"/>
-    </dgm:constrLst>
-    <dgm:ruleLst/>
-    <dgm:choose name="Name1">
-      <dgm:if name="Name2" axis="ch" ptType="node" func="cnt" op="gte" val="1">
-        <dgm:layoutNode name="bkgdShp" styleLbl="alignAccFollowNode1">
-          <dgm:alg type="sp"/>
-          <dgm:shape xmlns:r="http://schemas.openxmlformats.org/officeDocument/2006/relationships" type="roundRect" r:blip="">
-            <dgm:adjLst>
-              <dgm:adj idx="1" val="0.1"/>
-            </dgm:adjLst>
-          </dgm:shape>
-          <dgm:presOf/>
-          <dgm:constrLst/>
-          <dgm:ruleLst/>
-        </dgm:layoutNode>
-        <dgm:layoutNode name="linComp">
-          <dgm:choose name="Name3">
-            <dgm:if name="Name4" func="var" arg="dir" op="equ" val="norm">
-              <dgm:alg type="lin"/>
-            </dgm:if>
-            <dgm:else name="Name5">
-              <dgm:alg type="lin">
-                <dgm:param type="linDir" val="fromR"/>
-              </dgm:alg>
-            </dgm:else>
-          </dgm:choose>
-          <dgm:shape xmlns:r="http://schemas.openxmlformats.org/officeDocument/2006/relationships" r:blip="">
-            <dgm:adjLst/>
-          </dgm:shape>
-          <dgm:presOf/>
-          <dgm:constrLst>
-            <dgm:constr type="w" for="ch" forName="compNode" refType="w"/>
-            <dgm:constr type="h" for="ch" forName="compNode" refType="h"/>
-            <dgm:constr type="w" for="ch" ptType="sibTrans" refType="w" refFor="ch" refForName="compNode" fact="0.1"/>
-            <dgm:constr type="h" for="ch" ptType="sibTrans" op="equ"/>
-            <dgm:constr type="h" for="ch" forName="compNode" op="equ"/>
-            <dgm:constr type="primFontSz" for="des" forName="node" op="equ"/>
-          </dgm:constrLst>
-          <dgm:ruleLst/>
-          <dgm:forEach name="nodesForEach" axis="ch" ptType="node">
-            <dgm:layoutNode name="compNode">
-              <dgm:alg type="composite"/>
-              <dgm:shape xmlns:r="http://schemas.openxmlformats.org/officeDocument/2006/relationships" r:blip="">
-                <dgm:adjLst/>
-              </dgm:shape>
-              <dgm:presOf/>
-              <dgm:constrLst>
-                <dgm:constr type="w" for="ch" forName="node" refType="w"/>
-                <dgm:constr type="h" for="ch" forName="node" refType="h" fact="0.55"/>
-                <dgm:constr type="b" for="ch" forName="node" refType="h"/>
-                <dgm:constr type="w" for="ch" forName="invisiNode" refType="w" fact="0.75"/>
-                <dgm:constr type="h" for="ch" forName="invisiNode" refType="h" fact="0.06"/>
-                <dgm:constr type="t" for="ch" forName="invisiNode"/>
-                <dgm:constr type="w" for="ch" forName="imagNode" refType="w"/>
-                <dgm:constr type="h" for="ch" forName="imagNode" refType="h" fact="0.33"/>
-                <dgm:constr type="ctrX" for="ch" forName="imagNode" refType="w" fact="0.5"/>
-                <dgm:constr type="t" for="ch" forName="imagNode" refType="h" fact="0.06"/>
-              </dgm:constrLst>
-              <dgm:ruleLst/>
-              <dgm:layoutNode name="node" styleLbl="node1">
-                <dgm:varLst>
-                  <dgm:bulletEnabled val="1"/>
-                </dgm:varLst>
-                <dgm:alg type="tx">
-                  <dgm:param type="txAnchorVert" val="t"/>
-                </dgm:alg>
-                <dgm:shape xmlns:r="http://schemas.openxmlformats.org/officeDocument/2006/relationships" rot="180" type="round2SameRect" r:blip="">
-                  <dgm:adjLst>
-                    <dgm:adj idx="1" val="0.105"/>
-                  </dgm:adjLst>
-                </dgm:shape>
-                <dgm:presOf axis="desOrSelf" ptType="node"/>
-                <dgm:constrLst>
-                  <dgm:constr type="primFontSz" val="65"/>
-                </dgm:constrLst>
-                <dgm:ruleLst>
-                  <dgm:rule type="primFontSz" val="5" fact="NaN" max="NaN"/>
-                </dgm:ruleLst>
-              </dgm:layoutNode>
-              <dgm:layoutNode name="invisiNode">
-                <dgm:alg type="sp"/>
-                <dgm:shape xmlns:r="http://schemas.openxmlformats.org/officeDocument/2006/relationships" type="roundRect" r:blip="" hideGeom="1">
-                  <dgm:adjLst>
-                    <dgm:adj idx="1" val="0.1"/>
-                  </dgm:adjLst>
-                </dgm:shape>
-                <dgm:presOf/>
-                <dgm:constrLst/>
-                <dgm:ruleLst/>
-              </dgm:layoutNode>
-              <dgm:layoutNode name="imagNode" styleLbl="fgImgPlace1">
-                <dgm:alg type="sp"/>
-                <dgm:shape xmlns:r="http://schemas.openxmlformats.org/officeDocument/2006/relationships" type="roundRect" r:blip="" zOrderOff="-2" blipPhldr="1">
-                  <dgm:adjLst>
-                    <dgm:adj idx="1" val="0.1"/>
-                  </dgm:adjLst>
-                </dgm:shape>
-                <dgm:presOf/>
-                <dgm:constrLst/>
-                <dgm:ruleLst/>
-              </dgm:layoutNode>
-            </dgm:layoutNode>
-            <dgm:forEach name="sibTransForEach" axis="followSib" ptType="sibTrans" cnt="1">
-              <dgm:layoutNode name="sibTrans">
-                <dgm:alg type="sp"/>
-                <dgm:shape xmlns:r="http://schemas.openxmlformats.org/officeDocument/2006/relationships" type="rect" r:blip="" hideGeom="1">
-                  <dgm:adjLst/>
-                </dgm:shape>
-                <dgm:presOf axis="self"/>
-                <dgm:constrLst/>
-                <dgm:ruleLst/>
-              </dgm:layoutNode>
-            </dgm:forEach>
-          </dgm:forEach>
-        </dgm:layoutNode>
-      </dgm:if>
-      <dgm:else name="Name6"/>
-    </dgm:choose>
-  </dgm:layoutNode>
-</dgm:layoutDef>
-</file>
-
-<file path=ppt/diagrams/layout2.xml><?xml version="1.0" encoding="utf-8"?>
 <dgm:layoutDef xmlns:dgm="http://schemas.openxmlformats.org/drawingml/2006/diagram" xmlns:a="http://schemas.openxmlformats.org/drawingml/2006/main" uniqueId="urn:microsoft.com/office/officeart/2005/8/layout/cycle1">
   <dgm:title val=""/>
   <dgm:desc val=""/>
@@ -6869,1040 +4788,6 @@
 </dgm:styleDef>
 </file>
 
-<file path=ppt/diagrams/quickStyle2.xml><?xml version="1.0" encoding="utf-8"?>
-<dgm:styleDef xmlns:dgm="http://schemas.openxmlformats.org/drawingml/2006/diagram" xmlns:a="http://schemas.openxmlformats.org/drawingml/2006/main" uniqueId="urn:microsoft.com/office/officeart/2005/8/quickstyle/simple1">
-  <dgm:title val=""/>
-  <dgm:desc val=""/>
-  <dgm:catLst>
-    <dgm:cat type="simple" pri="10100"/>
-  </dgm:catLst>
-  <dgm:scene3d>
-    <a:camera prst="orthographicFront"/>
-    <a:lightRig rig="threePt" dir="t"/>
-  </dgm:scene3d>
-  <dgm:styleLbl name="node0">
-    <dgm:scene3d>
-      <a:camera prst="orthographicFront"/>
-      <a:lightRig rig="threePt" dir="t"/>
-    </dgm:scene3d>
-    <dgm:sp3d/>
-    <dgm:txPr/>
-    <dgm:style>
-      <a:lnRef idx="2">
-        <a:scrgbClr r="0" g="0" b="0"/>
-      </a:lnRef>
-      <a:fillRef idx="1">
-        <a:scrgbClr r="0" g="0" b="0"/>
-      </a:fillRef>
-      <a:effectRef idx="0">
-        <a:scrgbClr r="0" g="0" b="0"/>
-      </a:effectRef>
-      <a:fontRef idx="minor">
-        <a:schemeClr val="lt1"/>
-      </a:fontRef>
-    </dgm:style>
-  </dgm:styleLbl>
-  <dgm:styleLbl name="lnNode1">
-    <dgm:scene3d>
-      <a:camera prst="orthographicFront"/>
-      <a:lightRig rig="threePt" dir="t"/>
-    </dgm:scene3d>
-    <dgm:sp3d/>
-    <dgm:txPr/>
-    <dgm:style>
-      <a:lnRef idx="2">
-        <a:scrgbClr r="0" g="0" b="0"/>
-      </a:lnRef>
-      <a:fillRef idx="1">
-        <a:scrgbClr r="0" g="0" b="0"/>
-      </a:fillRef>
-      <a:effectRef idx="0">
-        <a:scrgbClr r="0" g="0" b="0"/>
-      </a:effectRef>
-      <a:fontRef idx="minor">
-        <a:schemeClr val="lt1"/>
-      </a:fontRef>
-    </dgm:style>
-  </dgm:styleLbl>
-  <dgm:styleLbl name="vennNode1">
-    <dgm:scene3d>
-      <a:camera prst="orthographicFront"/>
-      <a:lightRig rig="threePt" dir="t"/>
-    </dgm:scene3d>
-    <dgm:sp3d/>
-    <dgm:txPr/>
-    <dgm:style>
-      <a:lnRef idx="2">
-        <a:scrgbClr r="0" g="0" b="0"/>
-      </a:lnRef>
-      <a:fillRef idx="1">
-        <a:scrgbClr r="0" g="0" b="0"/>
-      </a:fillRef>
-      <a:effectRef idx="0">
-        <a:scrgbClr r="0" g="0" b="0"/>
-      </a:effectRef>
-      <a:fontRef idx="minor">
-        <a:schemeClr val="tx1"/>
-      </a:fontRef>
-    </dgm:style>
-  </dgm:styleLbl>
-  <dgm:styleLbl name="alignNode1">
-    <dgm:scene3d>
-      <a:camera prst="orthographicFront"/>
-      <a:lightRig rig="threePt" dir="t"/>
-    </dgm:scene3d>
-    <dgm:sp3d/>
-    <dgm:txPr/>
-    <dgm:style>
-      <a:lnRef idx="2">
-        <a:scrgbClr r="0" g="0" b="0"/>
-      </a:lnRef>
-      <a:fillRef idx="1">
-        <a:scrgbClr r="0" g="0" b="0"/>
-      </a:fillRef>
-      <a:effectRef idx="0">
-        <a:scrgbClr r="0" g="0" b="0"/>
-      </a:effectRef>
-      <a:fontRef idx="minor">
-        <a:schemeClr val="lt1"/>
-      </a:fontRef>
-    </dgm:style>
-  </dgm:styleLbl>
-  <dgm:styleLbl name="node1">
-    <dgm:scene3d>
-      <a:camera prst="orthographicFront"/>
-      <a:lightRig rig="threePt" dir="t"/>
-    </dgm:scene3d>
-    <dgm:sp3d/>
-    <dgm:txPr/>
-    <dgm:style>
-      <a:lnRef idx="2">
-        <a:scrgbClr r="0" g="0" b="0"/>
-      </a:lnRef>
-      <a:fillRef idx="1">
-        <a:scrgbClr r="0" g="0" b="0"/>
-      </a:fillRef>
-      <a:effectRef idx="0">
-        <a:scrgbClr r="0" g="0" b="0"/>
-      </a:effectRef>
-      <a:fontRef idx="minor">
-        <a:schemeClr val="lt1"/>
-      </a:fontRef>
-    </dgm:style>
-  </dgm:styleLbl>
-  <dgm:styleLbl name="node2">
-    <dgm:scene3d>
-      <a:camera prst="orthographicFront"/>
-      <a:lightRig rig="threePt" dir="t"/>
-    </dgm:scene3d>
-    <dgm:sp3d/>
-    <dgm:txPr/>
-    <dgm:style>
-      <a:lnRef idx="2">
-        <a:scrgbClr r="0" g="0" b="0"/>
-      </a:lnRef>
-      <a:fillRef idx="1">
-        <a:scrgbClr r="0" g="0" b="0"/>
-      </a:fillRef>
-      <a:effectRef idx="0">
-        <a:scrgbClr r="0" g="0" b="0"/>
-      </a:effectRef>
-      <a:fontRef idx="minor">
-        <a:schemeClr val="lt1"/>
-      </a:fontRef>
-    </dgm:style>
-  </dgm:styleLbl>
-  <dgm:styleLbl name="node3">
-    <dgm:scene3d>
-      <a:camera prst="orthographicFront"/>
-      <a:lightRig rig="threePt" dir="t"/>
-    </dgm:scene3d>
-    <dgm:sp3d/>
-    <dgm:txPr/>
-    <dgm:style>
-      <a:lnRef idx="2">
-        <a:scrgbClr r="0" g="0" b="0"/>
-      </a:lnRef>
-      <a:fillRef idx="1">
-        <a:scrgbClr r="0" g="0" b="0"/>
-      </a:fillRef>
-      <a:effectRef idx="0">
-        <a:scrgbClr r="0" g="0" b="0"/>
-      </a:effectRef>
-      <a:fontRef idx="minor">
-        <a:schemeClr val="lt1"/>
-      </a:fontRef>
-    </dgm:style>
-  </dgm:styleLbl>
-  <dgm:styleLbl name="node4">
-    <dgm:scene3d>
-      <a:camera prst="orthographicFront"/>
-      <a:lightRig rig="threePt" dir="t"/>
-    </dgm:scene3d>
-    <dgm:sp3d/>
-    <dgm:txPr/>
-    <dgm:style>
-      <a:lnRef idx="2">
-        <a:scrgbClr r="0" g="0" b="0"/>
-      </a:lnRef>
-      <a:fillRef idx="1">
-        <a:scrgbClr r="0" g="0" b="0"/>
-      </a:fillRef>
-      <a:effectRef idx="0">
-        <a:scrgbClr r="0" g="0" b="0"/>
-      </a:effectRef>
-      <a:fontRef idx="minor">
-        <a:schemeClr val="lt1"/>
-      </a:fontRef>
-    </dgm:style>
-  </dgm:styleLbl>
-  <dgm:styleLbl name="fgImgPlace1">
-    <dgm:scene3d>
-      <a:camera prst="orthographicFront"/>
-      <a:lightRig rig="threePt" dir="t"/>
-    </dgm:scene3d>
-    <dgm:sp3d/>
-    <dgm:txPr/>
-    <dgm:style>
-      <a:lnRef idx="2">
-        <a:scrgbClr r="0" g="0" b="0"/>
-      </a:lnRef>
-      <a:fillRef idx="1">
-        <a:scrgbClr r="0" g="0" b="0"/>
-      </a:fillRef>
-      <a:effectRef idx="0">
-        <a:scrgbClr r="0" g="0" b="0"/>
-      </a:effectRef>
-      <a:fontRef idx="minor"/>
-    </dgm:style>
-  </dgm:styleLbl>
-  <dgm:styleLbl name="alignImgPlace1">
-    <dgm:scene3d>
-      <a:camera prst="orthographicFront"/>
-      <a:lightRig rig="threePt" dir="t"/>
-    </dgm:scene3d>
-    <dgm:sp3d/>
-    <dgm:txPr/>
-    <dgm:style>
-      <a:lnRef idx="2">
-        <a:scrgbClr r="0" g="0" b="0"/>
-      </a:lnRef>
-      <a:fillRef idx="1">
-        <a:scrgbClr r="0" g="0" b="0"/>
-      </a:fillRef>
-      <a:effectRef idx="0">
-        <a:scrgbClr r="0" g="0" b="0"/>
-      </a:effectRef>
-      <a:fontRef idx="minor"/>
-    </dgm:style>
-  </dgm:styleLbl>
-  <dgm:styleLbl name="bgImgPlace1">
-    <dgm:scene3d>
-      <a:camera prst="orthographicFront"/>
-      <a:lightRig rig="threePt" dir="t"/>
-    </dgm:scene3d>
-    <dgm:sp3d/>
-    <dgm:txPr/>
-    <dgm:style>
-      <a:lnRef idx="2">
-        <a:scrgbClr r="0" g="0" b="0"/>
-      </a:lnRef>
-      <a:fillRef idx="1">
-        <a:scrgbClr r="0" g="0" b="0"/>
-      </a:fillRef>
-      <a:effectRef idx="0">
-        <a:scrgbClr r="0" g="0" b="0"/>
-      </a:effectRef>
-      <a:fontRef idx="minor"/>
-    </dgm:style>
-  </dgm:styleLbl>
-  <dgm:styleLbl name="sibTrans2D1">
-    <dgm:scene3d>
-      <a:camera prst="orthographicFront"/>
-      <a:lightRig rig="threePt" dir="t"/>
-    </dgm:scene3d>
-    <dgm:sp3d/>
-    <dgm:txPr/>
-    <dgm:style>
-      <a:lnRef idx="0">
-        <a:scrgbClr r="0" g="0" b="0"/>
-      </a:lnRef>
-      <a:fillRef idx="1">
-        <a:scrgbClr r="0" g="0" b="0"/>
-      </a:fillRef>
-      <a:effectRef idx="0">
-        <a:scrgbClr r="0" g="0" b="0"/>
-      </a:effectRef>
-      <a:fontRef idx="minor">
-        <a:schemeClr val="lt1"/>
-      </a:fontRef>
-    </dgm:style>
-  </dgm:styleLbl>
-  <dgm:styleLbl name="fgSibTrans2D1">
-    <dgm:scene3d>
-      <a:camera prst="orthographicFront"/>
-      <a:lightRig rig="threePt" dir="t"/>
-    </dgm:scene3d>
-    <dgm:sp3d/>
-    <dgm:txPr/>
-    <dgm:style>
-      <a:lnRef idx="0">
-        <a:scrgbClr r="0" g="0" b="0"/>
-      </a:lnRef>
-      <a:fillRef idx="1">
-        <a:scrgbClr r="0" g="0" b="0"/>
-      </a:fillRef>
-      <a:effectRef idx="0">
-        <a:scrgbClr r="0" g="0" b="0"/>
-      </a:effectRef>
-      <a:fontRef idx="minor">
-        <a:schemeClr val="lt1"/>
-      </a:fontRef>
-    </dgm:style>
-  </dgm:styleLbl>
-  <dgm:styleLbl name="bgSibTrans2D1">
-    <dgm:scene3d>
-      <a:camera prst="orthographicFront"/>
-      <a:lightRig rig="threePt" dir="t"/>
-    </dgm:scene3d>
-    <dgm:sp3d/>
-    <dgm:txPr/>
-    <dgm:style>
-      <a:lnRef idx="0">
-        <a:scrgbClr r="0" g="0" b="0"/>
-      </a:lnRef>
-      <a:fillRef idx="1">
-        <a:scrgbClr r="0" g="0" b="0"/>
-      </a:fillRef>
-      <a:effectRef idx="0">
-        <a:scrgbClr r="0" g="0" b="0"/>
-      </a:effectRef>
-      <a:fontRef idx="minor">
-        <a:schemeClr val="lt1"/>
-      </a:fontRef>
-    </dgm:style>
-  </dgm:styleLbl>
-  <dgm:styleLbl name="sibTrans1D1">
-    <dgm:scene3d>
-      <a:camera prst="orthographicFront"/>
-      <a:lightRig rig="threePt" dir="t"/>
-    </dgm:scene3d>
-    <dgm:sp3d/>
-    <dgm:txPr/>
-    <dgm:style>
-      <a:lnRef idx="1">
-        <a:scrgbClr r="0" g="0" b="0"/>
-      </a:lnRef>
-      <a:fillRef idx="0">
-        <a:scrgbClr r="0" g="0" b="0"/>
-      </a:fillRef>
-      <a:effectRef idx="0">
-        <a:scrgbClr r="0" g="0" b="0"/>
-      </a:effectRef>
-      <a:fontRef idx="minor"/>
-    </dgm:style>
-  </dgm:styleLbl>
-  <dgm:styleLbl name="callout">
-    <dgm:scene3d>
-      <a:camera prst="orthographicFront"/>
-      <a:lightRig rig="threePt" dir="t"/>
-    </dgm:scene3d>
-    <dgm:sp3d/>
-    <dgm:txPr/>
-    <dgm:style>
-      <a:lnRef idx="2">
-        <a:scrgbClr r="0" g="0" b="0"/>
-      </a:lnRef>
-      <a:fillRef idx="1">
-        <a:scrgbClr r="0" g="0" b="0"/>
-      </a:fillRef>
-      <a:effectRef idx="0">
-        <a:scrgbClr r="0" g="0" b="0"/>
-      </a:effectRef>
-      <a:fontRef idx="minor"/>
-    </dgm:style>
-  </dgm:styleLbl>
-  <dgm:styleLbl name="asst0">
-    <dgm:scene3d>
-      <a:camera prst="orthographicFront"/>
-      <a:lightRig rig="threePt" dir="t"/>
-    </dgm:scene3d>
-    <dgm:sp3d/>
-    <dgm:txPr/>
-    <dgm:style>
-      <a:lnRef idx="2">
-        <a:scrgbClr r="0" g="0" b="0"/>
-      </a:lnRef>
-      <a:fillRef idx="1">
-        <a:scrgbClr r="0" g="0" b="0"/>
-      </a:fillRef>
-      <a:effectRef idx="0">
-        <a:scrgbClr r="0" g="0" b="0"/>
-      </a:effectRef>
-      <a:fontRef idx="minor">
-        <a:schemeClr val="lt1"/>
-      </a:fontRef>
-    </dgm:style>
-  </dgm:styleLbl>
-  <dgm:styleLbl name="asst1">
-    <dgm:scene3d>
-      <a:camera prst="orthographicFront"/>
-      <a:lightRig rig="threePt" dir="t"/>
-    </dgm:scene3d>
-    <dgm:sp3d/>
-    <dgm:txPr/>
-    <dgm:style>
-      <a:lnRef idx="2">
-        <a:scrgbClr r="0" g="0" b="0"/>
-      </a:lnRef>
-      <a:fillRef idx="1">
-        <a:scrgbClr r="0" g="0" b="0"/>
-      </a:fillRef>
-      <a:effectRef idx="0">
-        <a:scrgbClr r="0" g="0" b="0"/>
-      </a:effectRef>
-      <a:fontRef idx="minor">
-        <a:schemeClr val="lt1"/>
-      </a:fontRef>
-    </dgm:style>
-  </dgm:styleLbl>
-  <dgm:styleLbl name="asst2">
-    <dgm:scene3d>
-      <a:camera prst="orthographicFront"/>
-      <a:lightRig rig="threePt" dir="t"/>
-    </dgm:scene3d>
-    <dgm:sp3d/>
-    <dgm:txPr/>
-    <dgm:style>
-      <a:lnRef idx="2">
-        <a:scrgbClr r="0" g="0" b="0"/>
-      </a:lnRef>
-      <a:fillRef idx="1">
-        <a:scrgbClr r="0" g="0" b="0"/>
-      </a:fillRef>
-      <a:effectRef idx="0">
-        <a:scrgbClr r="0" g="0" b="0"/>
-      </a:effectRef>
-      <a:fontRef idx="minor">
-        <a:schemeClr val="lt1"/>
-      </a:fontRef>
-    </dgm:style>
-  </dgm:styleLbl>
-  <dgm:styleLbl name="asst3">
-    <dgm:scene3d>
-      <a:camera prst="orthographicFront"/>
-      <a:lightRig rig="threePt" dir="t"/>
-    </dgm:scene3d>
-    <dgm:sp3d/>
-    <dgm:txPr/>
-    <dgm:style>
-      <a:lnRef idx="2">
-        <a:scrgbClr r="0" g="0" b="0"/>
-      </a:lnRef>
-      <a:fillRef idx="1">
-        <a:scrgbClr r="0" g="0" b="0"/>
-      </a:fillRef>
-      <a:effectRef idx="0">
-        <a:scrgbClr r="0" g="0" b="0"/>
-      </a:effectRef>
-      <a:fontRef idx="minor">
-        <a:schemeClr val="lt1"/>
-      </a:fontRef>
-    </dgm:style>
-  </dgm:styleLbl>
-  <dgm:styleLbl name="asst4">
-    <dgm:scene3d>
-      <a:camera prst="orthographicFront"/>
-      <a:lightRig rig="threePt" dir="t"/>
-    </dgm:scene3d>
-    <dgm:sp3d/>
-    <dgm:txPr/>
-    <dgm:style>
-      <a:lnRef idx="2">
-        <a:scrgbClr r="0" g="0" b="0"/>
-      </a:lnRef>
-      <a:fillRef idx="1">
-        <a:scrgbClr r="0" g="0" b="0"/>
-      </a:fillRef>
-      <a:effectRef idx="0">
-        <a:scrgbClr r="0" g="0" b="0"/>
-      </a:effectRef>
-      <a:fontRef idx="minor">
-        <a:schemeClr val="lt1"/>
-      </a:fontRef>
-    </dgm:style>
-  </dgm:styleLbl>
-  <dgm:styleLbl name="parChTrans2D1">
-    <dgm:scene3d>
-      <a:camera prst="orthographicFront"/>
-      <a:lightRig rig="threePt" dir="t"/>
-    </dgm:scene3d>
-    <dgm:sp3d/>
-    <dgm:txPr/>
-    <dgm:style>
-      <a:lnRef idx="2">
-        <a:scrgbClr r="0" g="0" b="0"/>
-      </a:lnRef>
-      <a:fillRef idx="1">
-        <a:scrgbClr r="0" g="0" b="0"/>
-      </a:fillRef>
-      <a:effectRef idx="0">
-        <a:scrgbClr r="0" g="0" b="0"/>
-      </a:effectRef>
-      <a:fontRef idx="minor">
-        <a:schemeClr val="lt1"/>
-      </a:fontRef>
-    </dgm:style>
-  </dgm:styleLbl>
-  <dgm:styleLbl name="parChTrans2D2">
-    <dgm:scene3d>
-      <a:camera prst="orthographicFront"/>
-      <a:lightRig rig="threePt" dir="t"/>
-    </dgm:scene3d>
-    <dgm:sp3d/>
-    <dgm:txPr/>
-    <dgm:style>
-      <a:lnRef idx="2">
-        <a:scrgbClr r="0" g="0" b="0"/>
-      </a:lnRef>
-      <a:fillRef idx="1">
-        <a:scrgbClr r="0" g="0" b="0"/>
-      </a:fillRef>
-      <a:effectRef idx="0">
-        <a:scrgbClr r="0" g="0" b="0"/>
-      </a:effectRef>
-      <a:fontRef idx="minor">
-        <a:schemeClr val="lt1"/>
-      </a:fontRef>
-    </dgm:style>
-  </dgm:styleLbl>
-  <dgm:styleLbl name="parChTrans2D3">
-    <dgm:scene3d>
-      <a:camera prst="orthographicFront"/>
-      <a:lightRig rig="threePt" dir="t"/>
-    </dgm:scene3d>
-    <dgm:sp3d/>
-    <dgm:txPr/>
-    <dgm:style>
-      <a:lnRef idx="2">
-        <a:scrgbClr r="0" g="0" b="0"/>
-      </a:lnRef>
-      <a:fillRef idx="1">
-        <a:scrgbClr r="0" g="0" b="0"/>
-      </a:fillRef>
-      <a:effectRef idx="0">
-        <a:scrgbClr r="0" g="0" b="0"/>
-      </a:effectRef>
-      <a:fontRef idx="minor">
-        <a:schemeClr val="lt1"/>
-      </a:fontRef>
-    </dgm:style>
-  </dgm:styleLbl>
-  <dgm:styleLbl name="parChTrans2D4">
-    <dgm:scene3d>
-      <a:camera prst="orthographicFront"/>
-      <a:lightRig rig="threePt" dir="t"/>
-    </dgm:scene3d>
-    <dgm:sp3d/>
-    <dgm:txPr/>
-    <dgm:style>
-      <a:lnRef idx="2">
-        <a:scrgbClr r="0" g="0" b="0"/>
-      </a:lnRef>
-      <a:fillRef idx="1">
-        <a:scrgbClr r="0" g="0" b="0"/>
-      </a:fillRef>
-      <a:effectRef idx="0">
-        <a:scrgbClr r="0" g="0" b="0"/>
-      </a:effectRef>
-      <a:fontRef idx="minor">
-        <a:schemeClr val="lt1"/>
-      </a:fontRef>
-    </dgm:style>
-  </dgm:styleLbl>
-  <dgm:styleLbl name="parChTrans1D1">
-    <dgm:scene3d>
-      <a:camera prst="orthographicFront"/>
-      <a:lightRig rig="threePt" dir="t"/>
-    </dgm:scene3d>
-    <dgm:sp3d/>
-    <dgm:txPr/>
-    <dgm:style>
-      <a:lnRef idx="2">
-        <a:scrgbClr r="0" g="0" b="0"/>
-      </a:lnRef>
-      <a:fillRef idx="0">
-        <a:scrgbClr r="0" g="0" b="0"/>
-      </a:fillRef>
-      <a:effectRef idx="0">
-        <a:scrgbClr r="0" g="0" b="0"/>
-      </a:effectRef>
-      <a:fontRef idx="minor"/>
-    </dgm:style>
-  </dgm:styleLbl>
-  <dgm:styleLbl name="parChTrans1D2">
-    <dgm:scene3d>
-      <a:camera prst="orthographicFront"/>
-      <a:lightRig rig="threePt" dir="t"/>
-    </dgm:scene3d>
-    <dgm:sp3d/>
-    <dgm:txPr/>
-    <dgm:style>
-      <a:lnRef idx="2">
-        <a:scrgbClr r="0" g="0" b="0"/>
-      </a:lnRef>
-      <a:fillRef idx="0">
-        <a:scrgbClr r="0" g="0" b="0"/>
-      </a:fillRef>
-      <a:effectRef idx="0">
-        <a:scrgbClr r="0" g="0" b="0"/>
-      </a:effectRef>
-      <a:fontRef idx="minor"/>
-    </dgm:style>
-  </dgm:styleLbl>
-  <dgm:styleLbl name="parChTrans1D3">
-    <dgm:scene3d>
-      <a:camera prst="orthographicFront"/>
-      <a:lightRig rig="threePt" dir="t"/>
-    </dgm:scene3d>
-    <dgm:sp3d/>
-    <dgm:txPr/>
-    <dgm:style>
-      <a:lnRef idx="2">
-        <a:scrgbClr r="0" g="0" b="0"/>
-      </a:lnRef>
-      <a:fillRef idx="0">
-        <a:scrgbClr r="0" g="0" b="0"/>
-      </a:fillRef>
-      <a:effectRef idx="0">
-        <a:scrgbClr r="0" g="0" b="0"/>
-      </a:effectRef>
-      <a:fontRef idx="minor"/>
-    </dgm:style>
-  </dgm:styleLbl>
-  <dgm:styleLbl name="parChTrans1D4">
-    <dgm:scene3d>
-      <a:camera prst="orthographicFront"/>
-      <a:lightRig rig="threePt" dir="t"/>
-    </dgm:scene3d>
-    <dgm:sp3d/>
-    <dgm:txPr/>
-    <dgm:style>
-      <a:lnRef idx="2">
-        <a:scrgbClr r="0" g="0" b="0"/>
-      </a:lnRef>
-      <a:fillRef idx="0">
-        <a:scrgbClr r="0" g="0" b="0"/>
-      </a:fillRef>
-      <a:effectRef idx="0">
-        <a:scrgbClr r="0" g="0" b="0"/>
-      </a:effectRef>
-      <a:fontRef idx="minor"/>
-    </dgm:style>
-  </dgm:styleLbl>
-  <dgm:styleLbl name="fgAcc1">
-    <dgm:scene3d>
-      <a:camera prst="orthographicFront"/>
-      <a:lightRig rig="threePt" dir="t"/>
-    </dgm:scene3d>
-    <dgm:sp3d/>
-    <dgm:txPr/>
-    <dgm:style>
-      <a:lnRef idx="2">
-        <a:scrgbClr r="0" g="0" b="0"/>
-      </a:lnRef>
-      <a:fillRef idx="1">
-        <a:scrgbClr r="0" g="0" b="0"/>
-      </a:fillRef>
-      <a:effectRef idx="0">
-        <a:scrgbClr r="0" g="0" b="0"/>
-      </a:effectRef>
-      <a:fontRef idx="minor"/>
-    </dgm:style>
-  </dgm:styleLbl>
-  <dgm:styleLbl name="conFgAcc1">
-    <dgm:scene3d>
-      <a:camera prst="orthographicFront"/>
-      <a:lightRig rig="threePt" dir="t"/>
-    </dgm:scene3d>
-    <dgm:sp3d/>
-    <dgm:txPr/>
-    <dgm:style>
-      <a:lnRef idx="2">
-        <a:scrgbClr r="0" g="0" b="0"/>
-      </a:lnRef>
-      <a:fillRef idx="1">
-        <a:scrgbClr r="0" g="0" b="0"/>
-      </a:fillRef>
-      <a:effectRef idx="0">
-        <a:scrgbClr r="0" g="0" b="0"/>
-      </a:effectRef>
-      <a:fontRef idx="minor"/>
-    </dgm:style>
-  </dgm:styleLbl>
-  <dgm:styleLbl name="alignAcc1">
-    <dgm:scene3d>
-      <a:camera prst="orthographicFront"/>
-      <a:lightRig rig="threePt" dir="t"/>
-    </dgm:scene3d>
-    <dgm:sp3d/>
-    <dgm:txPr/>
-    <dgm:style>
-      <a:lnRef idx="2">
-        <a:scrgbClr r="0" g="0" b="0"/>
-      </a:lnRef>
-      <a:fillRef idx="1">
-        <a:scrgbClr r="0" g="0" b="0"/>
-      </a:fillRef>
-      <a:effectRef idx="0">
-        <a:scrgbClr r="0" g="0" b="0"/>
-      </a:effectRef>
-      <a:fontRef idx="minor"/>
-    </dgm:style>
-  </dgm:styleLbl>
-  <dgm:styleLbl name="trAlignAcc1">
-    <dgm:scene3d>
-      <a:camera prst="orthographicFront"/>
-      <a:lightRig rig="threePt" dir="t"/>
-    </dgm:scene3d>
-    <dgm:sp3d/>
-    <dgm:txPr/>
-    <dgm:style>
-      <a:lnRef idx="1">
-        <a:scrgbClr r="0" g="0" b="0"/>
-      </a:lnRef>
-      <a:fillRef idx="1">
-        <a:scrgbClr r="0" g="0" b="0"/>
-      </a:fillRef>
-      <a:effectRef idx="0">
-        <a:scrgbClr r="0" g="0" b="0"/>
-      </a:effectRef>
-      <a:fontRef idx="minor"/>
-    </dgm:style>
-  </dgm:styleLbl>
-  <dgm:styleLbl name="bgAcc1">
-    <dgm:scene3d>
-      <a:camera prst="orthographicFront"/>
-      <a:lightRig rig="threePt" dir="t"/>
-    </dgm:scene3d>
-    <dgm:sp3d/>
-    <dgm:txPr/>
-    <dgm:style>
-      <a:lnRef idx="2">
-        <a:scrgbClr r="0" g="0" b="0"/>
-      </a:lnRef>
-      <a:fillRef idx="1">
-        <a:scrgbClr r="0" g="0" b="0"/>
-      </a:fillRef>
-      <a:effectRef idx="0">
-        <a:scrgbClr r="0" g="0" b="0"/>
-      </a:effectRef>
-      <a:fontRef idx="minor"/>
-    </dgm:style>
-  </dgm:styleLbl>
-  <dgm:styleLbl name="solidFgAcc1">
-    <dgm:scene3d>
-      <a:camera prst="orthographicFront"/>
-      <a:lightRig rig="threePt" dir="t"/>
-    </dgm:scene3d>
-    <dgm:sp3d/>
-    <dgm:txPr/>
-    <dgm:style>
-      <a:lnRef idx="2">
-        <a:scrgbClr r="0" g="0" b="0"/>
-      </a:lnRef>
-      <a:fillRef idx="1">
-        <a:scrgbClr r="0" g="0" b="0"/>
-      </a:fillRef>
-      <a:effectRef idx="0">
-        <a:scrgbClr r="0" g="0" b="0"/>
-      </a:effectRef>
-      <a:fontRef idx="minor"/>
-    </dgm:style>
-  </dgm:styleLbl>
-  <dgm:styleLbl name="solidAlignAcc1">
-    <dgm:scene3d>
-      <a:camera prst="orthographicFront"/>
-      <a:lightRig rig="threePt" dir="t"/>
-    </dgm:scene3d>
-    <dgm:sp3d/>
-    <dgm:txPr/>
-    <dgm:style>
-      <a:lnRef idx="2">
-        <a:scrgbClr r="0" g="0" b="0"/>
-      </a:lnRef>
-      <a:fillRef idx="1">
-        <a:scrgbClr r="0" g="0" b="0"/>
-      </a:fillRef>
-      <a:effectRef idx="0">
-        <a:scrgbClr r="0" g="0" b="0"/>
-      </a:effectRef>
-      <a:fontRef idx="minor"/>
-    </dgm:style>
-  </dgm:styleLbl>
-  <dgm:styleLbl name="solidBgAcc1">
-    <dgm:scene3d>
-      <a:camera prst="orthographicFront"/>
-      <a:lightRig rig="threePt" dir="t"/>
-    </dgm:scene3d>
-    <dgm:sp3d/>
-    <dgm:txPr/>
-    <dgm:style>
-      <a:lnRef idx="2">
-        <a:scrgbClr r="0" g="0" b="0"/>
-      </a:lnRef>
-      <a:fillRef idx="1">
-        <a:scrgbClr r="0" g="0" b="0"/>
-      </a:fillRef>
-      <a:effectRef idx="0">
-        <a:scrgbClr r="0" g="0" b="0"/>
-      </a:effectRef>
-      <a:fontRef idx="minor"/>
-    </dgm:style>
-  </dgm:styleLbl>
-  <dgm:styleLbl name="fgAccFollowNode1">
-    <dgm:scene3d>
-      <a:camera prst="orthographicFront"/>
-      <a:lightRig rig="threePt" dir="t"/>
-    </dgm:scene3d>
-    <dgm:sp3d/>
-    <dgm:txPr/>
-    <dgm:style>
-      <a:lnRef idx="2">
-        <a:scrgbClr r="0" g="0" b="0"/>
-      </a:lnRef>
-      <a:fillRef idx="1">
-        <a:scrgbClr r="0" g="0" b="0"/>
-      </a:fillRef>
-      <a:effectRef idx="0">
-        <a:scrgbClr r="0" g="0" b="0"/>
-      </a:effectRef>
-      <a:fontRef idx="minor"/>
-    </dgm:style>
-  </dgm:styleLbl>
-  <dgm:styleLbl name="alignAccFollowNode1">
-    <dgm:scene3d>
-      <a:camera prst="orthographicFront"/>
-      <a:lightRig rig="threePt" dir="t"/>
-    </dgm:scene3d>
-    <dgm:sp3d/>
-    <dgm:txPr/>
-    <dgm:style>
-      <a:lnRef idx="2">
-        <a:scrgbClr r="0" g="0" b="0"/>
-      </a:lnRef>
-      <a:fillRef idx="1">
-        <a:scrgbClr r="0" g="0" b="0"/>
-      </a:fillRef>
-      <a:effectRef idx="0">
-        <a:scrgbClr r="0" g="0" b="0"/>
-      </a:effectRef>
-      <a:fontRef idx="minor"/>
-    </dgm:style>
-  </dgm:styleLbl>
-  <dgm:styleLbl name="bgAccFollowNode1">
-    <dgm:scene3d>
-      <a:camera prst="orthographicFront"/>
-      <a:lightRig rig="threePt" dir="t"/>
-    </dgm:scene3d>
-    <dgm:sp3d/>
-    <dgm:txPr/>
-    <dgm:style>
-      <a:lnRef idx="2">
-        <a:scrgbClr r="0" g="0" b="0"/>
-      </a:lnRef>
-      <a:fillRef idx="1">
-        <a:scrgbClr r="0" g="0" b="0"/>
-      </a:fillRef>
-      <a:effectRef idx="0">
-        <a:scrgbClr r="0" g="0" b="0"/>
-      </a:effectRef>
-      <a:fontRef idx="minor"/>
-    </dgm:style>
-  </dgm:styleLbl>
-  <dgm:styleLbl name="fgAcc0">
-    <dgm:scene3d>
-      <a:camera prst="orthographicFront"/>
-      <a:lightRig rig="threePt" dir="t"/>
-    </dgm:scene3d>
-    <dgm:sp3d/>
-    <dgm:txPr/>
-    <dgm:style>
-      <a:lnRef idx="2">
-        <a:scrgbClr r="0" g="0" b="0"/>
-      </a:lnRef>
-      <a:fillRef idx="1">
-        <a:scrgbClr r="0" g="0" b="0"/>
-      </a:fillRef>
-      <a:effectRef idx="0">
-        <a:scrgbClr r="0" g="0" b="0"/>
-      </a:effectRef>
-      <a:fontRef idx="minor"/>
-    </dgm:style>
-  </dgm:styleLbl>
-  <dgm:styleLbl name="fgAcc2">
-    <dgm:scene3d>
-      <a:camera prst="orthographicFront"/>
-      <a:lightRig rig="threePt" dir="t"/>
-    </dgm:scene3d>
-    <dgm:sp3d/>
-    <dgm:txPr/>
-    <dgm:style>
-      <a:lnRef idx="2">
-        <a:scrgbClr r="0" g="0" b="0"/>
-      </a:lnRef>
-      <a:fillRef idx="1">
-        <a:scrgbClr r="0" g="0" b="0"/>
-      </a:fillRef>
-      <a:effectRef idx="0">
-        <a:scrgbClr r="0" g="0" b="0"/>
-      </a:effectRef>
-      <a:fontRef idx="minor"/>
-    </dgm:style>
-  </dgm:styleLbl>
-  <dgm:styleLbl name="fgAcc3">
-    <dgm:scene3d>
-      <a:camera prst="orthographicFront"/>
-      <a:lightRig rig="threePt" dir="t"/>
-    </dgm:scene3d>
-    <dgm:sp3d/>
-    <dgm:txPr/>
-    <dgm:style>
-      <a:lnRef idx="2">
-        <a:scrgbClr r="0" g="0" b="0"/>
-      </a:lnRef>
-      <a:fillRef idx="1">
-        <a:scrgbClr r="0" g="0" b="0"/>
-      </a:fillRef>
-      <a:effectRef idx="0">
-        <a:scrgbClr r="0" g="0" b="0"/>
-      </a:effectRef>
-      <a:fontRef idx="minor"/>
-    </dgm:style>
-  </dgm:styleLbl>
-  <dgm:styleLbl name="fgAcc4">
-    <dgm:scene3d>
-      <a:camera prst="orthographicFront"/>
-      <a:lightRig rig="threePt" dir="t"/>
-    </dgm:scene3d>
-    <dgm:sp3d/>
-    <dgm:txPr/>
-    <dgm:style>
-      <a:lnRef idx="2">
-        <a:scrgbClr r="0" g="0" b="0"/>
-      </a:lnRef>
-      <a:fillRef idx="1">
-        <a:scrgbClr r="0" g="0" b="0"/>
-      </a:fillRef>
-      <a:effectRef idx="0">
-        <a:scrgbClr r="0" g="0" b="0"/>
-      </a:effectRef>
-      <a:fontRef idx="minor"/>
-    </dgm:style>
-  </dgm:styleLbl>
-  <dgm:styleLbl name="bgShp">
-    <dgm:scene3d>
-      <a:camera prst="orthographicFront"/>
-      <a:lightRig rig="threePt" dir="t"/>
-    </dgm:scene3d>
-    <dgm:sp3d/>
-    <dgm:txPr/>
-    <dgm:style>
-      <a:lnRef idx="0">
-        <a:scrgbClr r="0" g="0" b="0"/>
-      </a:lnRef>
-      <a:fillRef idx="1">
-        <a:scrgbClr r="0" g="0" b="0"/>
-      </a:fillRef>
-      <a:effectRef idx="0">
-        <a:scrgbClr r="0" g="0" b="0"/>
-      </a:effectRef>
-      <a:fontRef idx="minor"/>
-    </dgm:style>
-  </dgm:styleLbl>
-  <dgm:styleLbl name="dkBgShp">
-    <dgm:scene3d>
-      <a:camera prst="orthographicFront"/>
-      <a:lightRig rig="threePt" dir="t"/>
-    </dgm:scene3d>
-    <dgm:sp3d/>
-    <dgm:txPr/>
-    <dgm:style>
-      <a:lnRef idx="0">
-        <a:scrgbClr r="0" g="0" b="0"/>
-      </a:lnRef>
-      <a:fillRef idx="1">
-        <a:scrgbClr r="0" g="0" b="0"/>
-      </a:fillRef>
-      <a:effectRef idx="0">
-        <a:scrgbClr r="0" g="0" b="0"/>
-      </a:effectRef>
-      <a:fontRef idx="minor"/>
-    </dgm:style>
-  </dgm:styleLbl>
-  <dgm:styleLbl name="trBgShp">
-    <dgm:scene3d>
-      <a:camera prst="orthographicFront"/>
-      <a:lightRig rig="threePt" dir="t"/>
-    </dgm:scene3d>
-    <dgm:sp3d/>
-    <dgm:txPr/>
-    <dgm:style>
-      <a:lnRef idx="0">
-        <a:scrgbClr r="0" g="0" b="0"/>
-      </a:lnRef>
-      <a:fillRef idx="1">
-        <a:scrgbClr r="0" g="0" b="0"/>
-      </a:fillRef>
-      <a:effectRef idx="0">
-        <a:scrgbClr r="0" g="0" b="0"/>
-      </a:effectRef>
-      <a:fontRef idx="minor"/>
-    </dgm:style>
-  </dgm:styleLbl>
-  <dgm:styleLbl name="fgShp">
-    <dgm:scene3d>
-      <a:camera prst="orthographicFront"/>
-      <a:lightRig rig="threePt" dir="t"/>
-    </dgm:scene3d>
-    <dgm:sp3d/>
-    <dgm:txPr/>
-    <dgm:style>
-      <a:lnRef idx="2">
-        <a:scrgbClr r="0" g="0" b="0"/>
-      </a:lnRef>
-      <a:fillRef idx="1">
-        <a:scrgbClr r="0" g="0" b="0"/>
-      </a:fillRef>
-      <a:effectRef idx="0">
-        <a:scrgbClr r="0" g="0" b="0"/>
-      </a:effectRef>
-      <a:fontRef idx="minor"/>
-    </dgm:style>
-  </dgm:styleLbl>
-  <dgm:styleLbl name="revTx">
-    <dgm:scene3d>
-      <a:camera prst="orthographicFront"/>
-      <a:lightRig rig="threePt" dir="t"/>
-    </dgm:scene3d>
-    <dgm:sp3d/>
-    <dgm:txPr/>
-    <dgm:style>
-      <a:lnRef idx="0">
-        <a:scrgbClr r="0" g="0" b="0"/>
-      </a:lnRef>
-      <a:fillRef idx="0">
-        <a:scrgbClr r="0" g="0" b="0"/>
-      </a:fillRef>
-      <a:effectRef idx="0">
-        <a:scrgbClr r="0" g="0" b="0"/>
-      </a:effectRef>
-      <a:fontRef idx="minor"/>
-    </dgm:style>
-  </dgm:styleLbl>
-</dgm:styleDef>
-</file>
-
 <file path=ppt/notesMasters/notesMaster1.xml><?xml version="1.0" encoding="utf-8"?>
 <p:notesMaster xmlns:a="http://schemas.openxmlformats.org/drawingml/2006/main" xmlns:r="http://schemas.openxmlformats.org/officeDocument/2006/relationships" xmlns:p="http://schemas.openxmlformats.org/presentationml/2006/main">
   <p:cSld>
@@ -7984,7 +4869,7 @@
           </a:lstStyle>
           <a:p>
             <a:fld id="{CCD76652-6C29-4BAF-9849-D5686387BDDC}" type="datetimeFigureOut">
-              <a:t>12/5/2025</a:t>
+              <a:t>3/11/26</a:t>
             </a:fld>
             <a:endParaRPr lang="en-US"/>
           </a:p>
@@ -8384,8 +5269,7 @@
           <a:p>
             <a:r>
               <a:rPr lang="en-US"/>
-              <a:t>
-The Model Context Protocol (MCP) is an open-source framework developed by Anthropic to address the integration challenges faced by AI models. MCP serves as a universal connector, akin to a USB-C port, that standardizes how AI models discover and use external tools. Unlike simple function-calling mechanisms, MCP introduces a robust client-server architecture that facilitates secure and scalable interactions between AI agents and tools. The protocol defines a consistent interface for tool discovery, invocation, and context management, allowing models to access a wide range of resources without bespoke integrations. MCP supports both pre-built and custom servers, enabling developers to expose proprietary data and APIs in a compliant and secure manner. By adopting MCP, organizations can reduce integration overhead, improve interoperability, and accelerate the development of intelligent, context-aware AI agents. This architecture lays the foundation for a new ecosystem where tools and models can interact seamlessly, fostering innovation and collaboration across the AI community.</a:t>
+              <a:t>Overview and Architecture</a:t>
             </a:r>
           </a:p>
         </p:txBody>
@@ -8406,7 +5290,7 @@
           <a:lstStyle/>
           <a:p>
             <a:fld id="{322C3404-B6AB-4EFE-9F4E-60BD52F02861}" type="slidenum">
-              <a:t>16</a:t>
+              <a:t>14</a:t>
             </a:fld>
             <a:endParaRPr lang="en-US"/>
           </a:p>
@@ -8415,7 +5299,7 @@
     </p:spTree>
     <p:extLst>
       <p:ext uri="{BB962C8B-B14F-4D97-AF65-F5344CB8AC3E}">
-        <p14:creationId xmlns:p14="http://schemas.microsoft.com/office/powerpoint/2010/main" val="2859818714"/>
+        <p14:creationId xmlns:p14="http://schemas.microsoft.com/office/powerpoint/2010/main" val="1512310929"/>
       </p:ext>
     </p:extLst>
   </p:cSld>
@@ -8471,7 +5355,8 @@
           <a:p>
             <a:r>
               <a:rPr lang="en-US"/>
-              <a:t>Creating a Collaborative Ecosystem</a:t>
+              <a:t>
+The Model Context Protocol (MCP) is an open-source framework developed by Anthropic to address the integration challenges faced by AI models. MCP serves as a universal connector, akin to a USB-C port, that standardizes how AI models discover and use external tools. Unlike simple function-calling mechanisms, MCP introduces a robust client-server architecture that facilitates secure and scalable interactions between AI agents and tools. The protocol defines a consistent interface for tool discovery, invocation, and context management, allowing models to access a wide range of resources without bespoke integrations. MCP supports both pre-built and custom servers, enabling developers to expose proprietary data and APIs in a compliant and secure manner. By adopting MCP, organizations can reduce integration overhead, improve interoperability, and accelerate the development of intelligent, context-aware AI agents. This architecture lays the foundation for a new ecosystem where tools and models can interact seamlessly, fostering innovation and collaboration across the AI community.</a:t>
             </a:r>
           </a:p>
         </p:txBody>
@@ -8492,7 +5377,7 @@
           <a:lstStyle/>
           <a:p>
             <a:fld id="{322C3404-B6AB-4EFE-9F4E-60BD52F02861}" type="slidenum">
-              <a:t>23</a:t>
+              <a:t>15</a:t>
             </a:fld>
             <a:endParaRPr lang="en-US"/>
           </a:p>
@@ -8501,7 +5386,7 @@
     </p:spTree>
     <p:extLst>
       <p:ext uri="{BB962C8B-B14F-4D97-AF65-F5344CB8AC3E}">
-        <p14:creationId xmlns:p14="http://schemas.microsoft.com/office/powerpoint/2010/main" val="1163889297"/>
+        <p14:creationId xmlns:p14="http://schemas.microsoft.com/office/powerpoint/2010/main" val="2859818714"/>
       </p:ext>
     </p:extLst>
   </p:cSld>
@@ -8557,8 +5442,7 @@
           <a:p>
             <a:r>
               <a:rPr lang="en-US"/>
-              <a:t>
-Standardizing AI tool integration through protocols like MCP offers numerous benefits that extend beyond individual projects. First, it reduces the need for bespoke connectors, saving time and resources while improving reliability. Second, it fosters a collaborative ecosystem where developers can share tools, servers, and best practices, accelerating innovation across the AI community. Third, it enhances security and compliance by providing consistent mechanisms for authentication and data access. MCP’s open-source nature encourages transparency and community contributions, leading to continuous improvement and broader adoption. By aligning on a common protocol, organizations can ensure that their AI models are compatible with a wide range of tools and environments, facilitating interoperability and scalability. This standardization also supports the development of intelligent agents that are not only capable of understanding and generating content but also of taking meaningful actions. In essence, MCP transforms AI from a passive technology into an active participant in digital ecosystems, paving the way for the next generation of context-aware, tool-enabled agents.</a:t>
+              <a:t>Creating a Collaborative Ecosystem</a:t>
             </a:r>
           </a:p>
         </p:txBody>
@@ -8579,7 +5463,7 @@
           <a:lstStyle/>
           <a:p>
             <a:fld id="{322C3404-B6AB-4EFE-9F4E-60BD52F02861}" type="slidenum">
-              <a:t>24</a:t>
+              <a:t>21</a:t>
             </a:fld>
             <a:endParaRPr lang="en-US"/>
           </a:p>
@@ -8588,7 +5472,7 @@
     </p:spTree>
     <p:extLst>
       <p:ext uri="{BB962C8B-B14F-4D97-AF65-F5344CB8AC3E}">
-        <p14:creationId xmlns:p14="http://schemas.microsoft.com/office/powerpoint/2010/main" val="98862365"/>
+        <p14:creationId xmlns:p14="http://schemas.microsoft.com/office/powerpoint/2010/main" val="1163889297"/>
       </p:ext>
     </p:extLst>
   </p:cSld>
@@ -8644,7 +5528,8 @@
           <a:p>
             <a:r>
               <a:rPr lang="en-US"/>
-              <a:t>Building the Next Generation of AI Agents</a:t>
+              <a:t>
+Standardizing AI tool integration through protocols like MCP offers numerous benefits that extend beyond individual projects. First, it reduces the need for bespoke connectors, saving time and resources while improving reliability. Second, it fosters a collaborative ecosystem where developers can share tools, servers, and best practices, accelerating innovation across the AI community. Third, it enhances security and compliance by providing consistent mechanisms for authentication and data access. MCP’s open-source nature encourages transparency and community contributions, leading to continuous improvement and broader adoption. By aligning on a common protocol, organizations can ensure that their AI models are compatible with a wide range of tools and environments, facilitating interoperability and scalability. This standardization also supports the development of intelligent agents that are not only capable of understanding and generating content but also of taking meaningful actions. In essence, MCP transforms AI from a passive technology into an active participant in digital ecosystems, paving the way for the next generation of context-aware, tool-enabled agents.</a:t>
             </a:r>
           </a:p>
         </p:txBody>
@@ -8665,7 +5550,7 @@
           <a:lstStyle/>
           <a:p>
             <a:fld id="{322C3404-B6AB-4EFE-9F4E-60BD52F02861}" type="slidenum">
-              <a:t>26</a:t>
+              <a:t>22</a:t>
             </a:fld>
             <a:endParaRPr lang="en-US"/>
           </a:p>
@@ -8674,7 +5559,7 @@
     </p:spTree>
     <p:extLst>
       <p:ext uri="{BB962C8B-B14F-4D97-AF65-F5344CB8AC3E}">
-        <p14:creationId xmlns:p14="http://schemas.microsoft.com/office/powerpoint/2010/main" val="1777038106"/>
+        <p14:creationId xmlns:p14="http://schemas.microsoft.com/office/powerpoint/2010/main" val="98862365"/>
       </p:ext>
     </p:extLst>
   </p:cSld>
@@ -8730,8 +5615,7 @@
           <a:p>
             <a:r>
               <a:rPr lang="en-US"/>
-              <a:t>
-The journey from generative AI to agentic AI represents a significant evolution in the field. By adopting the Model Context Protocol, developers can move beyond building one-off connectors and start creating intelligent agents that interact with the world in meaningful ways. MCP provides the tools and standards necessary to integrate AI models with external resources securely and efficiently. This session has introduced the core concepts of MCP, demonstrated its practical applications through pre-built and custom servers, and highlighted the benefits of standardized integration. Developers are encouraged to explore MCP, contribute to its ecosystem, and leverage its capabilities to build AI agents that don’t just talk, but act. The future of AI lies in its ability to understand context, make decisions, and perform tasks autonomously. MCP is a foundational step toward realizing this vision, and by embracing it, developers can play a pivotal role in shaping the next generation of AI technology.</a:t>
+              <a:t>Building the Next Generation of AI Agents</a:t>
             </a:r>
           </a:p>
         </p:txBody>
@@ -8752,7 +5636,94 @@
           <a:lstStyle/>
           <a:p>
             <a:fld id="{322C3404-B6AB-4EFE-9F4E-60BD52F02861}" type="slidenum">
-              <a:t>27</a:t>
+              <a:t>24</a:t>
+            </a:fld>
+            <a:endParaRPr lang="en-US"/>
+          </a:p>
+        </p:txBody>
+      </p:sp>
+    </p:spTree>
+    <p:extLst>
+      <p:ext uri="{BB962C8B-B14F-4D97-AF65-F5344CB8AC3E}">
+        <p14:creationId xmlns:p14="http://schemas.microsoft.com/office/powerpoint/2010/main" val="1777038106"/>
+      </p:ext>
+    </p:extLst>
+  </p:cSld>
+  <p:clrMapOvr>
+    <a:masterClrMapping/>
+  </p:clrMapOvr>
+</p:notes>
+</file>
+
+<file path=ppt/notesSlides/notesSlide15.xml><?xml version="1.0" encoding="utf-8"?>
+<p:notes xmlns:a="http://schemas.openxmlformats.org/drawingml/2006/main" xmlns:r="http://schemas.openxmlformats.org/officeDocument/2006/relationships" xmlns:p="http://schemas.openxmlformats.org/presentationml/2006/main">
+  <p:cSld>
+    <p:spTree>
+      <p:nvGrpSpPr>
+        <p:cNvPr id="1" name=""/>
+        <p:cNvGrpSpPr/>
+        <p:nvPr/>
+      </p:nvGrpSpPr>
+      <p:grpSpPr>
+        <a:xfrm>
+          <a:off x="0" y="0"/>
+          <a:ext cx="0" cy="0"/>
+          <a:chOff x="0" y="0"/>
+          <a:chExt cx="0" cy="0"/>
+        </a:xfrm>
+      </p:grpSpPr>
+      <p:sp>
+        <p:nvSpPr>
+          <p:cNvPr id="2" name="Slide Image Placeholder 1"/>
+          <p:cNvSpPr>
+            <a:spLocks noGrp="1" noRot="1" noChangeAspect="1"/>
+          </p:cNvSpPr>
+          <p:nvPr>
+            <p:ph type="sldImg"/>
+          </p:nvPr>
+        </p:nvSpPr>
+        <p:spPr/>
+      </p:sp>
+      <p:sp>
+        <p:nvSpPr>
+          <p:cNvPr id="3" name="Notes Placeholder 2"/>
+          <p:cNvSpPr>
+            <a:spLocks noGrp="1"/>
+          </p:cNvSpPr>
+          <p:nvPr>
+            <p:ph type="body" idx="1"/>
+          </p:nvPr>
+        </p:nvSpPr>
+        <p:spPr/>
+        <p:txBody>
+          <a:bodyPr/>
+          <a:lstStyle/>
+          <a:p>
+            <a:r>
+              <a:rPr lang="en-US"/>
+              <a:t>
+The journey from generative AI to agentic AI represents a significant evolution in the field. By adopting the Model Context Protocol, developers can move beyond building one-off connectors and start creating intelligent agents that interact with the world in meaningful ways. MCP provides the tools and standards necessary to integrate AI models with external resources securely and efficiently. This session has introduced the core concepts of MCP, demonstrated its practical applications through pre-built and custom servers, and highlighted the benefits of standardized integration. Developers are encouraged to explore MCP, contribute to its ecosystem, and leverage its capabilities to build AI agents that don’t just talk, but act. The future of AI lies in its ability to understand context, make decisions, and perform tasks autonomously. MCP is a foundational step toward realizing this vision, and by embracing it, developers can play a pivotal role in shaping the next generation of AI technology.</a:t>
+            </a:r>
+          </a:p>
+        </p:txBody>
+      </p:sp>
+      <p:sp>
+        <p:nvSpPr>
+          <p:cNvPr id="4" name="Slide Number Placeholder 3"/>
+          <p:cNvSpPr>
+            <a:spLocks noGrp="1"/>
+          </p:cNvSpPr>
+          <p:nvPr>
+            <p:ph type="sldNum" sz="quarter" idx="5"/>
+          </p:nvPr>
+        </p:nvSpPr>
+        <p:spPr/>
+        <p:txBody>
+          <a:bodyPr/>
+          <a:lstStyle/>
+          <a:p>
+            <a:fld id="{322C3404-B6AB-4EFE-9F4E-60BD52F02861}" type="slidenum">
+              <a:t>25</a:t>
             </a:fld>
             <a:endParaRPr lang="en-US"/>
           </a:p>
@@ -8817,7 +5788,25 @@
           <a:p>
             <a:r>
               <a:rPr lang="en-US"/>
-              <a:t>Empowering AI with Tool Access</a:t>
+              <a:t>This is the maturity progression. Everyone is somewhere on here, both personally and in their department. This typically doesn't apply to an organization as a whole because it's domain-specific — your accounting department may be in a different place than your sales department.</a:t>
+            </a:r>
+          </a:p>
+          <a:p>
+            <a:r>
+              <a:rPr lang="en-US"/>
+              <a:t>Stage 0 (Zero AI): You don't use AI for work. Maybe you write a Valentine's note with ChatGPT, but that's not work output.</a:t>
+            </a:r>
+          </a:p>
+          <a:p>
+            <a:r>
+              <a:rPr lang="en-US"/>
+              <a:t>From the Gallup workforce survey for 2025: less than 10% of knowledge workers use AI at least once a week. Those results are almost identical to 2020. Adoption has stalled hard because people don't understand how to overcome the walls between these waves.</a:t>
+            </a:r>
+          </a:p>
+          <a:p>
+            <a:r>
+              <a:rPr lang="en-US"/>
+              <a:t>These are big shifts, not in the technology, but in how we approach work. There's also an identity issue — 'I AM a controller' vs. 'I do controlling.' When you tie identity to the activity, AI becomes threatening.</a:t>
             </a:r>
           </a:p>
         </p:txBody>
@@ -8837,19 +5826,15 @@
           <a:bodyPr/>
           <a:lstStyle/>
           <a:p>
-            <a:fld id="{322C3404-B6AB-4EFE-9F4E-60BD52F02861}" type="slidenum">
-              <a:t>5</a:t>
+            <a:fld id="{3BDEB2A5-DDCF-604F-A595-5664085F7F7D}" type="slidenum">
+              <a:rPr lang="en-MX" smtClean="0"/>
+              <a:t>3</a:t>
             </a:fld>
-            <a:endParaRPr lang="en-US"/>
+            <a:endParaRPr lang="en-MX"/>
           </a:p>
         </p:txBody>
       </p:sp>
     </p:spTree>
-    <p:extLst>
-      <p:ext uri="{BB962C8B-B14F-4D97-AF65-F5344CB8AC3E}">
-        <p14:creationId xmlns:p14="http://schemas.microsoft.com/office/powerpoint/2010/main" val="1287628361"/>
-      </p:ext>
-    </p:extLst>
   </p:cSld>
   <p:clrMapOvr>
     <a:masterClrMapping/>
@@ -8903,8 +5888,7 @@
           <a:p>
             <a:r>
               <a:rPr lang="en-US"/>
-              <a:t>
-The generative AI revolution has ushered in a new era of capabilities, enabling models to produce text, images, and other content with remarkable fluency. However, the next frontier in AI development is agency—the ability for models to interact with, query, and act upon the world around them. This shift from passive generation to active engagement requires a new approach to tool integration. Traditionally, each AI model needed a custom, often brittle integration for every external tool or data source, leading to the 'N x M integration problem.' This method is not scalable and hinders the broader adoption of AI in real-world applications. To address this, developers are exploring standardized frameworks that allow AI models to access tools like sales leads, code repositories, and IoT devices in a secure and reusable manner. This presentation introduces Anthropic’s Model Context Protocol (MCP), an open-source solution designed to solve these challenges and empower AI agents with robust tool access.</a:t>
+              <a:t>Empowering AI with Tool Access</a:t>
             </a:r>
           </a:p>
         </p:txBody>
@@ -8925,7 +5909,94 @@
           <a:lstStyle/>
           <a:p>
             <a:fld id="{322C3404-B6AB-4EFE-9F4E-60BD52F02861}" type="slidenum">
-              <a:t>6</a:t>
+              <a:t>4</a:t>
+            </a:fld>
+            <a:endParaRPr lang="en-US"/>
+          </a:p>
+        </p:txBody>
+      </p:sp>
+    </p:spTree>
+    <p:extLst>
+      <p:ext uri="{BB962C8B-B14F-4D97-AF65-F5344CB8AC3E}">
+        <p14:creationId xmlns:p14="http://schemas.microsoft.com/office/powerpoint/2010/main" val="1287628361"/>
+      </p:ext>
+    </p:extLst>
+  </p:cSld>
+  <p:clrMapOvr>
+    <a:masterClrMapping/>
+  </p:clrMapOvr>
+</p:notes>
+</file>
+
+<file path=ppt/notesSlides/notesSlide4.xml><?xml version="1.0" encoding="utf-8"?>
+<p:notes xmlns:a="http://schemas.openxmlformats.org/drawingml/2006/main" xmlns:r="http://schemas.openxmlformats.org/officeDocument/2006/relationships" xmlns:p="http://schemas.openxmlformats.org/presentationml/2006/main">
+  <p:cSld>
+    <p:spTree>
+      <p:nvGrpSpPr>
+        <p:cNvPr id="1" name=""/>
+        <p:cNvGrpSpPr/>
+        <p:nvPr/>
+      </p:nvGrpSpPr>
+      <p:grpSpPr>
+        <a:xfrm>
+          <a:off x="0" y="0"/>
+          <a:ext cx="0" cy="0"/>
+          <a:chOff x="0" y="0"/>
+          <a:chExt cx="0" cy="0"/>
+        </a:xfrm>
+      </p:grpSpPr>
+      <p:sp>
+        <p:nvSpPr>
+          <p:cNvPr id="2" name="Slide Image Placeholder 1"/>
+          <p:cNvSpPr>
+            <a:spLocks noGrp="1" noRot="1" noChangeAspect="1"/>
+          </p:cNvSpPr>
+          <p:nvPr>
+            <p:ph type="sldImg"/>
+          </p:nvPr>
+        </p:nvSpPr>
+        <p:spPr/>
+      </p:sp>
+      <p:sp>
+        <p:nvSpPr>
+          <p:cNvPr id="3" name="Notes Placeholder 2"/>
+          <p:cNvSpPr>
+            <a:spLocks noGrp="1"/>
+          </p:cNvSpPr>
+          <p:nvPr>
+            <p:ph type="body" idx="1"/>
+          </p:nvPr>
+        </p:nvSpPr>
+        <p:spPr/>
+        <p:txBody>
+          <a:bodyPr/>
+          <a:lstStyle/>
+          <a:p>
+            <a:r>
+              <a:rPr lang="en-US"/>
+              <a:t>
+The generative AI revolution has ushered in a new era of capabilities, enabling models to produce text, images, and other content with remarkable fluency. However, the next frontier in AI development is agency—the ability for models to interact with, query, and act upon the world around them. This shift from passive generation to active engagement requires a new approach to tool integration. Traditionally, each AI model needed a custom, often brittle integration for every external tool or data source, leading to the 'N x M integration problem.' This method is not scalable and hinders the broader adoption of AI in real-world applications. To address this, developers are exploring standardized frameworks that allow AI models to access tools like sales leads, code repositories, and IoT devices in a secure and reusable manner. This presentation introduces Anthropic’s Model Context Protocol (MCP), an open-source solution designed to solve these challenges and empower AI agents with robust tool access.</a:t>
+            </a:r>
+          </a:p>
+        </p:txBody>
+      </p:sp>
+      <p:sp>
+        <p:nvSpPr>
+          <p:cNvPr id="4" name="Slide Number Placeholder 3"/>
+          <p:cNvSpPr>
+            <a:spLocks noGrp="1"/>
+          </p:cNvSpPr>
+          <p:nvPr>
+            <p:ph type="sldNum" sz="quarter" idx="5"/>
+          </p:nvPr>
+        </p:nvSpPr>
+        <p:spPr/>
+        <p:txBody>
+          <a:bodyPr/>
+          <a:lstStyle/>
+          <a:p>
+            <a:fld id="{322C3404-B6AB-4EFE-9F4E-60BD52F02861}" type="slidenum">
+              <a:t>5</a:t>
             </a:fld>
             <a:endParaRPr lang="en-US"/>
           </a:p>
@@ -8944,7 +6015,7 @@
 </p:notes>
 </file>
 
-<file path=ppt/notesSlides/notesSlide4.xml><?xml version="1.0" encoding="utf-8"?>
+<file path=ppt/notesSlides/notesSlide5.xml><?xml version="1.0" encoding="utf-8"?>
 <p:notes xmlns:a="http://schemas.openxmlformats.org/drawingml/2006/main" xmlns:r="http://schemas.openxmlformats.org/officeDocument/2006/relationships" xmlns:p="http://schemas.openxmlformats.org/presentationml/2006/main">
   <p:cSld>
     <p:spTree>
@@ -9036,7 +6107,7 @@
           <a:lstStyle/>
           <a:p>
             <a:fld id="{322C3404-B6AB-4EFE-9F4E-60BD52F02861}" type="slidenum">
-              <a:t>7</a:t>
+              <a:t>6</a:t>
             </a:fld>
             <a:endParaRPr lang="en-US"/>
           </a:p>
@@ -9055,7 +6126,7 @@
 </p:notes>
 </file>
 
-<file path=ppt/notesSlides/notesSlide5.xml><?xml version="1.0" encoding="utf-8"?>
+<file path=ppt/notesSlides/notesSlide6.xml><?xml version="1.0" encoding="utf-8"?>
 <p:notes xmlns:a="http://schemas.openxmlformats.org/drawingml/2006/main" xmlns:r="http://schemas.openxmlformats.org/officeDocument/2006/relationships" xmlns:p="http://schemas.openxmlformats.org/presentationml/2006/main">
   <p:cSld>
     <p:spTree>
@@ -9147,7 +6218,7 @@
           <a:lstStyle/>
           <a:p>
             <a:fld id="{322C3404-B6AB-4EFE-9F4E-60BD52F02861}" type="slidenum">
-              <a:t>8</a:t>
+              <a:t>7</a:t>
             </a:fld>
             <a:endParaRPr lang="en-US"/>
           </a:p>
@@ -9166,7 +6237,7 @@
 </p:notes>
 </file>
 
-<file path=ppt/notesSlides/notesSlide6.xml><?xml version="1.0" encoding="utf-8"?>
+<file path=ppt/notesSlides/notesSlide7.xml><?xml version="1.0" encoding="utf-8"?>
 <p:notes xmlns:a="http://schemas.openxmlformats.org/drawingml/2006/main" xmlns:r="http://schemas.openxmlformats.org/officeDocument/2006/relationships" xmlns:p="http://schemas.openxmlformats.org/presentationml/2006/main">
   <p:cSld>
     <p:spTree>
@@ -9258,7 +6329,7 @@
           <a:lstStyle/>
           <a:p>
             <a:fld id="{322C3404-B6AB-4EFE-9F4E-60BD52F02861}" type="slidenum">
-              <a:t>9</a:t>
+              <a:t>8</a:t>
             </a:fld>
             <a:endParaRPr lang="en-US"/>
           </a:p>
@@ -9277,7 +6348,7 @@
 </p:notes>
 </file>
 
-<file path=ppt/notesSlides/notesSlide7.xml><?xml version="1.0" encoding="utf-8"?>
+<file path=ppt/notesSlides/notesSlide8.xml><?xml version="1.0" encoding="utf-8"?>
 <p:notes xmlns:a="http://schemas.openxmlformats.org/drawingml/2006/main" xmlns:r="http://schemas.openxmlformats.org/officeDocument/2006/relationships" xmlns:p="http://schemas.openxmlformats.org/presentationml/2006/main">
   <p:cSld>
     <p:spTree>
@@ -9369,7 +6440,7 @@
           <a:lstStyle/>
           <a:p>
             <a:fld id="{322C3404-B6AB-4EFE-9F4E-60BD52F02861}" type="slidenum">
-              <a:t>10</a:t>
+              <a:t>9</a:t>
             </a:fld>
             <a:endParaRPr lang="en-US"/>
           </a:p>
@@ -9379,92 +6450,6 @@
     <p:extLst>
       <p:ext uri="{BB962C8B-B14F-4D97-AF65-F5344CB8AC3E}">
         <p14:creationId xmlns:p14="http://schemas.microsoft.com/office/powerpoint/2010/main" val="166975025"/>
-      </p:ext>
-    </p:extLst>
-  </p:cSld>
-  <p:clrMapOvr>
-    <a:masterClrMapping/>
-  </p:clrMapOvr>
-</p:notes>
-</file>
-
-<file path=ppt/notesSlides/notesSlide8.xml><?xml version="1.0" encoding="utf-8"?>
-<p:notes xmlns:a="http://schemas.openxmlformats.org/drawingml/2006/main" xmlns:r="http://schemas.openxmlformats.org/officeDocument/2006/relationships" xmlns:p="http://schemas.openxmlformats.org/presentationml/2006/main">
-  <p:cSld>
-    <p:spTree>
-      <p:nvGrpSpPr>
-        <p:cNvPr id="1" name=""/>
-        <p:cNvGrpSpPr/>
-        <p:nvPr/>
-      </p:nvGrpSpPr>
-      <p:grpSpPr>
-        <a:xfrm>
-          <a:off x="0" y="0"/>
-          <a:ext cx="0" cy="0"/>
-          <a:chOff x="0" y="0"/>
-          <a:chExt cx="0" cy="0"/>
-        </a:xfrm>
-      </p:grpSpPr>
-      <p:sp>
-        <p:nvSpPr>
-          <p:cNvPr id="2" name="Slide Image Placeholder 1"/>
-          <p:cNvSpPr>
-            <a:spLocks noGrp="1" noRot="1" noChangeAspect="1"/>
-          </p:cNvSpPr>
-          <p:nvPr>
-            <p:ph type="sldImg"/>
-          </p:nvPr>
-        </p:nvSpPr>
-        <p:spPr/>
-      </p:sp>
-      <p:sp>
-        <p:nvSpPr>
-          <p:cNvPr id="3" name="Notes Placeholder 2"/>
-          <p:cNvSpPr>
-            <a:spLocks noGrp="1"/>
-          </p:cNvSpPr>
-          <p:nvPr>
-            <p:ph type="body" idx="1"/>
-          </p:nvPr>
-        </p:nvSpPr>
-        <p:spPr/>
-        <p:txBody>
-          <a:bodyPr/>
-          <a:lstStyle/>
-          <a:p>
-            <a:r>
-              <a:rPr lang="en-US"/>
-              <a:t>The N x M Integration Problem</a:t>
-            </a:r>
-          </a:p>
-        </p:txBody>
-      </p:sp>
-      <p:sp>
-        <p:nvSpPr>
-          <p:cNvPr id="4" name="Slide Number Placeholder 3"/>
-          <p:cNvSpPr>
-            <a:spLocks noGrp="1"/>
-          </p:cNvSpPr>
-          <p:nvPr>
-            <p:ph type="sldNum" sz="quarter" idx="5"/>
-          </p:nvPr>
-        </p:nvSpPr>
-        <p:spPr/>
-        <p:txBody>
-          <a:bodyPr/>
-          <a:lstStyle/>
-          <a:p>
-            <a:fld id="{322C3404-B6AB-4EFE-9F4E-60BD52F02861}" type="slidenum">
-              <a:t>13</a:t>
-            </a:fld>
-            <a:endParaRPr lang="en-US"/>
-          </a:p>
-        </p:txBody>
-      </p:sp>
-    </p:spTree>
-    <p:extLst>
-      <p:ext uri="{BB962C8B-B14F-4D97-AF65-F5344CB8AC3E}">
-        <p14:creationId xmlns:p14="http://schemas.microsoft.com/office/powerpoint/2010/main" val="2747912680"/>
       </p:ext>
     </p:extLst>
   </p:cSld>
@@ -9520,7 +6505,7 @@
           <a:p>
             <a:r>
               <a:rPr lang="en-US"/>
-              <a:t>Overview and Architecture</a:t>
+              <a:t>The N x M Integration Problem</a:t>
             </a:r>
           </a:p>
         </p:txBody>
@@ -9541,7 +6526,7 @@
           <a:lstStyle/>
           <a:p>
             <a:fld id="{322C3404-B6AB-4EFE-9F4E-60BD52F02861}" type="slidenum">
-              <a:t>15</a:t>
+              <a:t>12</a:t>
             </a:fld>
             <a:endParaRPr lang="en-US"/>
           </a:p>
@@ -9550,7 +6535,7 @@
     </p:spTree>
     <p:extLst>
       <p:ext uri="{BB962C8B-B14F-4D97-AF65-F5344CB8AC3E}">
-        <p14:creationId xmlns:p14="http://schemas.microsoft.com/office/powerpoint/2010/main" val="1512310929"/>
+        <p14:creationId xmlns:p14="http://schemas.microsoft.com/office/powerpoint/2010/main" val="2747912680"/>
       </p:ext>
     </p:extLst>
   </p:cSld>
@@ -9730,7 +6715,7 @@
           <a:p>
             <a:fld id="{3AEEF7F6-ECFE-4473-B3E9-C91BE833927A}" type="datetimeFigureOut">
               <a:rPr lang="en-US" smtClean="0"/>
-              <a:t>12/5/2025</a:t>
+              <a:t>3/11/26</a:t>
             </a:fld>
             <a:endParaRPr lang="en-US"/>
           </a:p>
@@ -10344,7 +7329,7 @@
           <a:p>
             <a:fld id="{3AEEF7F6-ECFE-4473-B3E9-C91BE833927A}" type="datetimeFigureOut">
               <a:rPr lang="en-US" smtClean="0"/>
-              <a:t>12/5/2025</a:t>
+              <a:t>3/11/26</a:t>
             </a:fld>
             <a:endParaRPr lang="en-US"/>
           </a:p>
@@ -10871,7 +7856,7 @@
           <a:p>
             <a:fld id="{3AEEF7F6-ECFE-4473-B3E9-C91BE833927A}" type="datetimeFigureOut">
               <a:rPr lang="en-US" smtClean="0"/>
-              <a:t>12/5/2025</a:t>
+              <a:t>3/11/26</a:t>
             </a:fld>
             <a:endParaRPr lang="en-US"/>
           </a:p>
@@ -11271,7 +8256,7 @@
           <a:p>
             <a:fld id="{3AEEF7F6-ECFE-4473-B3E9-C91BE833927A}" type="datetimeFigureOut">
               <a:rPr lang="en-US" smtClean="0"/>
-              <a:t>12/5/2025</a:t>
+              <a:t>3/11/26</a:t>
             </a:fld>
             <a:endParaRPr lang="en-US"/>
           </a:p>
@@ -11666,7 +8651,7 @@
           <a:p>
             <a:fld id="{3AEEF7F6-ECFE-4473-B3E9-C91BE833927A}" type="datetimeFigureOut">
               <a:rPr lang="en-US" smtClean="0"/>
-              <a:t>12/5/2025</a:t>
+              <a:t>3/11/26</a:t>
             </a:fld>
             <a:endParaRPr lang="en-US"/>
           </a:p>
@@ -12061,7 +9046,7 @@
           <a:p>
             <a:fld id="{3AEEF7F6-ECFE-4473-B3E9-C91BE833927A}" type="datetimeFigureOut">
               <a:rPr lang="en-US" smtClean="0"/>
-              <a:t>12/5/2025</a:t>
+              <a:t>3/11/26</a:t>
             </a:fld>
             <a:endParaRPr lang="en-US"/>
           </a:p>
@@ -12456,7 +9441,7 @@
           <a:p>
             <a:fld id="{3AEEF7F6-ECFE-4473-B3E9-C91BE833927A}" type="datetimeFigureOut">
               <a:rPr lang="en-US" smtClean="0"/>
-              <a:t>12/5/2025</a:t>
+              <a:t>3/11/26</a:t>
             </a:fld>
             <a:endParaRPr lang="en-US"/>
           </a:p>
@@ -12853,7 +9838,7 @@
           <a:p>
             <a:fld id="{3AEEF7F6-ECFE-4473-B3E9-C91BE833927A}" type="datetimeFigureOut">
               <a:rPr lang="en-US" smtClean="0"/>
-              <a:t>12/5/2025</a:t>
+              <a:t>3/11/26</a:t>
             </a:fld>
             <a:endParaRPr lang="en-US"/>
           </a:p>
@@ -13216,7 +10201,7 @@
           <a:p>
             <a:fld id="{3AEEF7F6-ECFE-4473-B3E9-C91BE833927A}" type="datetimeFigureOut">
               <a:rPr lang="en-US" smtClean="0"/>
-              <a:t>12/5/2025</a:t>
+              <a:t>3/11/26</a:t>
             </a:fld>
             <a:endParaRPr lang="en-US"/>
           </a:p>
@@ -13594,7 +10579,7 @@
           <a:p>
             <a:fld id="{3AEEF7F6-ECFE-4473-B3E9-C91BE833927A}" type="datetimeFigureOut">
               <a:rPr lang="en-US" smtClean="0"/>
-              <a:t>12/5/2025</a:t>
+              <a:t>3/11/26</a:t>
             </a:fld>
             <a:endParaRPr lang="en-US"/>
           </a:p>
@@ -14024,7 +11009,7 @@
           <a:p>
             <a:fld id="{3AEEF7F6-ECFE-4473-B3E9-C91BE833927A}" type="datetimeFigureOut">
               <a:rPr lang="en-US" smtClean="0"/>
-              <a:t>12/5/2025</a:t>
+              <a:t>3/11/26</a:t>
             </a:fld>
             <a:endParaRPr lang="en-US"/>
           </a:p>
@@ -14399,7 +11384,7 @@
           <a:p>
             <a:fld id="{3AEEF7F6-ECFE-4473-B3E9-C91BE833927A}" type="datetimeFigureOut">
               <a:rPr lang="en-US" smtClean="0"/>
-              <a:t>12/5/2025</a:t>
+              <a:t>3/11/26</a:t>
             </a:fld>
             <a:endParaRPr lang="en-US"/>
           </a:p>
@@ -14815,7 +11800,7 @@
           <a:p>
             <a:fld id="{3AEEF7F6-ECFE-4473-B3E9-C91BE833927A}" type="datetimeFigureOut">
               <a:rPr lang="en-US" smtClean="0"/>
-              <a:t>12/5/2025</a:t>
+              <a:t>3/11/26</a:t>
             </a:fld>
             <a:endParaRPr lang="en-US"/>
           </a:p>
@@ -15030,7 +12015,7 @@
           <a:p>
             <a:fld id="{3AEEF7F6-ECFE-4473-B3E9-C91BE833927A}" type="datetimeFigureOut">
               <a:rPr lang="en-US" smtClean="0"/>
-              <a:t>12/5/2025</a:t>
+              <a:t>3/11/26</a:t>
             </a:fld>
             <a:endParaRPr lang="en-US"/>
           </a:p>
@@ -15647,7 +12632,7 @@
           <a:p>
             <a:fld id="{3AEEF7F6-ECFE-4473-B3E9-C91BE833927A}" type="datetimeFigureOut">
               <a:rPr lang="en-US" smtClean="0"/>
-              <a:t>12/5/2025</a:t>
+              <a:t>3/11/26</a:t>
             </a:fld>
             <a:endParaRPr lang="en-US"/>
           </a:p>
@@ -16016,7 +13001,7 @@
           <a:p>
             <a:fld id="{3AEEF7F6-ECFE-4473-B3E9-C91BE833927A}" type="datetimeFigureOut">
               <a:rPr lang="en-US" smtClean="0"/>
-              <a:t>12/5/2025</a:t>
+              <a:t>3/11/26</a:t>
             </a:fld>
             <a:endParaRPr lang="en-US"/>
           </a:p>
@@ -16288,7 +13273,7 @@
           <a:p>
             <a:fld id="{3AEEF7F6-ECFE-4473-B3E9-C91BE833927A}" type="datetimeFigureOut">
               <a:rPr lang="en-US" smtClean="0"/>
-              <a:t>12/5/2025</a:t>
+              <a:t>3/11/26</a:t>
             </a:fld>
             <a:endParaRPr lang="en-US"/>
           </a:p>
@@ -16913,7 +13898,7 @@
           <a:p>
             <a:fld id="{3AEEF7F6-ECFE-4473-B3E9-C91BE833927A}" type="datetimeFigureOut">
               <a:rPr lang="en-US" smtClean="0"/>
-              <a:t>12/5/2025</a:t>
+              <a:t>3/11/26</a:t>
             </a:fld>
             <a:endParaRPr lang="en-US"/>
           </a:p>
@@ -17347,7 +14332,7 @@
           <a:p>
             <a:fld id="{3AEEF7F6-ECFE-4473-B3E9-C91BE833927A}" type="datetimeFigureOut">
               <a:rPr lang="en-US" smtClean="0"/>
-              <a:t>12/5/2025</a:t>
+              <a:t>3/11/26</a:t>
             </a:fld>
             <a:endParaRPr lang="en-US"/>
           </a:p>
@@ -17594,7 +14579,7 @@
           <a:p>
             <a:fld id="{3AEEF7F6-ECFE-4473-B3E9-C91BE833927A}" type="datetimeFigureOut">
               <a:rPr lang="en-US" smtClean="0"/>
-              <a:t>12/5/2025</a:t>
+              <a:t>3/11/26</a:t>
             </a:fld>
             <a:endParaRPr lang="en-US"/>
           </a:p>
@@ -18234,7 +15219,7 @@
           <a:p>
             <a:fld id="{3AEEF7F6-ECFE-4473-B3E9-C91BE833927A}" type="datetimeFigureOut">
               <a:rPr lang="en-US" smtClean="0"/>
-              <a:t>12/5/2025</a:t>
+              <a:t>3/11/26</a:t>
             </a:fld>
             <a:endParaRPr lang="en-US"/>
           </a:p>
@@ -18675,7 +15660,7 @@
           <a:p>
             <a:fld id="{3AEEF7F6-ECFE-4473-B3E9-C91BE833927A}" type="datetimeFigureOut">
               <a:rPr lang="en-US" smtClean="0"/>
-              <a:t>12/5/2025</a:t>
+              <a:t>3/11/26</a:t>
             </a:fld>
             <a:endParaRPr lang="en-US"/>
           </a:p>
@@ -19093,7 +16078,7 @@
           <a:p>
             <a:fld id="{3AEEF7F6-ECFE-4473-B3E9-C91BE833927A}" type="datetimeFigureOut">
               <a:rPr lang="en-US" smtClean="0"/>
-              <a:t>12/5/2025</a:t>
+              <a:t>3/11/26</a:t>
             </a:fld>
             <a:endParaRPr lang="en-US"/>
           </a:p>
@@ -19401,7 +16386,7 @@
           <a:p>
             <a:fld id="{3AEEF7F6-ECFE-4473-B3E9-C91BE833927A}" type="datetimeFigureOut">
               <a:rPr lang="en-US" smtClean="0"/>
-              <a:t>12/5/2025</a:t>
+              <a:t>3/11/26</a:t>
             </a:fld>
             <a:endParaRPr lang="en-US"/>
           </a:p>
@@ -19807,7 +16792,7 @@
           <a:p>
             <a:fld id="{3AEEF7F6-ECFE-4473-B3E9-C91BE833927A}" type="datetimeFigureOut">
               <a:rPr lang="en-US" smtClean="0"/>
-              <a:t>12/5/2025</a:t>
+              <a:t>3/11/26</a:t>
             </a:fld>
             <a:endParaRPr lang="en-US"/>
           </a:p>
@@ -20213,7 +17198,7 @@
           <a:p>
             <a:fld id="{3AEEF7F6-ECFE-4473-B3E9-C91BE833927A}" type="datetimeFigureOut">
               <a:rPr lang="en-US" smtClean="0"/>
-              <a:t>12/5/2025</a:t>
+              <a:t>3/11/26</a:t>
             </a:fld>
             <a:endParaRPr lang="en-US"/>
           </a:p>
@@ -20619,7 +17604,7 @@
           <a:p>
             <a:fld id="{3AEEF7F6-ECFE-4473-B3E9-C91BE833927A}" type="datetimeFigureOut">
               <a:rPr lang="en-US" smtClean="0"/>
-              <a:t>12/5/2025</a:t>
+              <a:t>3/11/26</a:t>
             </a:fld>
             <a:endParaRPr lang="en-US"/>
           </a:p>
@@ -21301,7 +18286,7 @@
           <a:p>
             <a:fld id="{3AEEF7F6-ECFE-4473-B3E9-C91BE833927A}" type="datetimeFigureOut">
               <a:rPr lang="en-US" smtClean="0"/>
-              <a:t>12/5/2025</a:t>
+              <a:t>3/11/26</a:t>
             </a:fld>
             <a:endParaRPr lang="en-US"/>
           </a:p>
@@ -21519,7 +18504,7 @@
           <a:p>
             <a:fld id="{3AEEF7F6-ECFE-4473-B3E9-C91BE833927A}" type="datetimeFigureOut">
               <a:rPr lang="en-US" smtClean="0"/>
-              <a:t>12/5/2025</a:t>
+              <a:t>3/11/26</a:t>
             </a:fld>
             <a:endParaRPr lang="en-US"/>
           </a:p>
@@ -21732,7 +18717,7 @@
           <a:p>
             <a:fld id="{3AEEF7F6-ECFE-4473-B3E9-C91BE833927A}" type="datetimeFigureOut">
               <a:rPr lang="en-US" smtClean="0"/>
-              <a:t>12/5/2025</a:t>
+              <a:t>3/11/26</a:t>
             </a:fld>
             <a:endParaRPr lang="en-US"/>
           </a:p>
@@ -22039,7 +19024,7 @@
           <a:p>
             <a:fld id="{3AEEF7F6-ECFE-4473-B3E9-C91BE833927A}" type="datetimeFigureOut">
               <a:rPr lang="en-US" smtClean="0"/>
-              <a:t>12/5/2025</a:t>
+              <a:t>3/11/26</a:t>
             </a:fld>
             <a:endParaRPr lang="en-US"/>
           </a:p>
@@ -23050,7 +20035,7 @@
           <a:p>
             <a:fld id="{3AEEF7F6-ECFE-4473-B3E9-C91BE833927A}" type="datetimeFigureOut">
               <a:rPr lang="en-US" smtClean="0"/>
-              <a:t>12/5/2025</a:t>
+              <a:t>3/11/26</a:t>
             </a:fld>
             <a:endParaRPr lang="en-US"/>
           </a:p>
@@ -23668,7 +20653,7 @@
           <a:p>
             <a:fld id="{3AEEF7F6-ECFE-4473-B3E9-C91BE833927A}" type="datetimeFigureOut">
               <a:rPr lang="en-US" smtClean="0"/>
-              <a:t>12/5/2025</a:t>
+              <a:t>3/11/26</a:t>
             </a:fld>
             <a:endParaRPr lang="en-US"/>
           </a:p>
@@ -24102,7 +21087,7 @@
           <a:p>
             <a:fld id="{3AEEF7F6-ECFE-4473-B3E9-C91BE833927A}" type="datetimeFigureOut">
               <a:rPr lang="en-US" smtClean="0"/>
-              <a:t>12/5/2025</a:t>
+              <a:t>3/11/26</a:t>
             </a:fld>
             <a:endParaRPr lang="en-US"/>
           </a:p>
@@ -24329,7 +21314,7 @@
           <a:p>
             <a:fld id="{3AEEF7F6-ECFE-4473-B3E9-C91BE833927A}" type="datetimeFigureOut">
               <a:rPr lang="en-US" smtClean="0"/>
-              <a:t>12/5/2025</a:t>
+              <a:t>3/11/26</a:t>
             </a:fld>
             <a:endParaRPr lang="en-US"/>
           </a:p>
@@ -25015,7 +22000,7 @@
           <a:p>
             <a:fld id="{3AEEF7F6-ECFE-4473-B3E9-C91BE833927A}" type="datetimeFigureOut">
               <a:rPr lang="en-US" smtClean="0"/>
-              <a:t>12/5/2025</a:t>
+              <a:t>3/11/26</a:t>
             </a:fld>
             <a:endParaRPr lang="en-US"/>
           </a:p>
@@ -25544,7 +22529,7 @@
           <a:p>
             <a:fld id="{3AEEF7F6-ECFE-4473-B3E9-C91BE833927A}" type="datetimeFigureOut">
               <a:rPr lang="en-US" smtClean="0"/>
-              <a:t>12/5/2025</a:t>
+              <a:t>3/11/26</a:t>
             </a:fld>
             <a:endParaRPr lang="en-US"/>
           </a:p>
@@ -25885,7 +22870,7 @@
           <a:p>
             <a:fld id="{3AEEF7F6-ECFE-4473-B3E9-C91BE833927A}" type="datetimeFigureOut">
               <a:rPr lang="en-US" smtClean="0"/>
-              <a:t>12/5/2025</a:t>
+              <a:t>3/11/26</a:t>
             </a:fld>
             <a:endParaRPr lang="en-US"/>
           </a:p>
@@ -26378,7 +23363,7 @@
           <a:p>
             <a:fld id="{3AEEF7F6-ECFE-4473-B3E9-C91BE833927A}" type="datetimeFigureOut">
               <a:rPr lang="en-US" smtClean="0"/>
-              <a:t>12/5/2025</a:t>
+              <a:t>3/11/26</a:t>
             </a:fld>
             <a:endParaRPr lang="en-US"/>
           </a:p>
@@ -26520,7 +23505,7 @@
           <a:p>
             <a:fld id="{3AEEF7F6-ECFE-4473-B3E9-C91BE833927A}" type="datetimeFigureOut">
               <a:rPr lang="en-US" smtClean="0"/>
-              <a:t>12/5/2025</a:t>
+              <a:t>3/11/26</a:t>
             </a:fld>
             <a:endParaRPr lang="en-US"/>
           </a:p>
@@ -26633,7 +23618,7 @@
           <a:p>
             <a:fld id="{3AEEF7F6-ECFE-4473-B3E9-C91BE833927A}" type="datetimeFigureOut">
               <a:rPr lang="en-US" smtClean="0"/>
-              <a:t>12/5/2025</a:t>
+              <a:t>3/11/26</a:t>
             </a:fld>
             <a:endParaRPr lang="en-US"/>
           </a:p>
@@ -27090,7 +24075,7 @@
           <a:p>
             <a:fld id="{3AEEF7F6-ECFE-4473-B3E9-C91BE833927A}" type="datetimeFigureOut">
               <a:rPr lang="en-US" smtClean="0"/>
-              <a:t>12/5/2025</a:t>
+              <a:t>3/11/26</a:t>
             </a:fld>
             <a:endParaRPr lang="en-US"/>
           </a:p>
@@ -27511,7 +24496,7 @@
           <a:p>
             <a:fld id="{3AEEF7F6-ECFE-4473-B3E9-C91BE833927A}" type="datetimeFigureOut">
               <a:rPr lang="en-US" smtClean="0"/>
-              <a:t>12/5/2025</a:t>
+              <a:t>3/11/26</a:t>
             </a:fld>
             <a:endParaRPr lang="en-US"/>
           </a:p>
@@ -27911,7 +24896,7 @@
           <a:p>
             <a:fld id="{3AEEF7F6-ECFE-4473-B3E9-C91BE833927A}" type="datetimeFigureOut">
               <a:rPr lang="en-US" smtClean="0"/>
-              <a:t>12/5/2025</a:t>
+              <a:t>3/11/26</a:t>
             </a:fld>
             <a:endParaRPr lang="en-US"/>
           </a:p>
@@ -28124,7 +25109,7 @@
           <a:p>
             <a:fld id="{3AEEF7F6-ECFE-4473-B3E9-C91BE833927A}" type="datetimeFigureOut">
               <a:rPr lang="en-US" smtClean="0"/>
-              <a:t>12/5/2025</a:t>
+              <a:t>3/11/26</a:t>
             </a:fld>
             <a:endParaRPr lang="en-US"/>
           </a:p>
@@ -28396,7 +25381,7 @@
           <a:p>
             <a:fld id="{3AEEF7F6-ECFE-4473-B3E9-C91BE833927A}" type="datetimeFigureOut">
               <a:rPr lang="en-US" smtClean="0"/>
-              <a:t>12/5/2025</a:t>
+              <a:t>3/11/26</a:t>
             </a:fld>
             <a:endParaRPr lang="en-US"/>
           </a:p>
@@ -28841,7 +25826,7 @@
           <a:p>
             <a:fld id="{6048702F-412C-4CEF-ABE7-C49B765E9059}" type="datetimeFigureOut">
               <a:rPr lang="en-US" smtClean="0"/>
-              <a:t>12/5/2025</a:t>
+              <a:t>3/11/26</a:t>
             </a:fld>
             <a:endParaRPr lang="en-US"/>
           </a:p>
@@ -29103,7 +26088,7 @@
           <a:p>
             <a:fld id="{3AEEF7F6-ECFE-4473-B3E9-C91BE833927A}" type="datetimeFigureOut">
               <a:rPr lang="en-US" smtClean="0"/>
-              <a:t>12/5/2025</a:t>
+              <a:t>3/11/26</a:t>
             </a:fld>
             <a:endParaRPr lang="en-US"/>
           </a:p>
@@ -29662,7 +26647,7 @@
           <a:p>
             <a:fld id="{3AEEF7F6-ECFE-4473-B3E9-C91BE833927A}" type="datetimeFigureOut">
               <a:rPr lang="en-US" smtClean="0"/>
-              <a:t>12/5/2025</a:t>
+              <a:t>3/11/26</a:t>
             </a:fld>
             <a:endParaRPr lang="en-US"/>
           </a:p>
@@ -30199,7 +27184,7 @@
           <a:p>
             <a:fld id="{3AEEF7F6-ECFE-4473-B3E9-C91BE833927A}" type="datetimeFigureOut">
               <a:rPr lang="en-US" smtClean="0"/>
-              <a:t>12/5/2025</a:t>
+              <a:t>3/11/26</a:t>
             </a:fld>
             <a:endParaRPr lang="en-US"/>
           </a:p>
@@ -30378,7 +27363,7 @@
           <a:p>
             <a:fld id="{3AEEF7F6-ECFE-4473-B3E9-C91BE833927A}" type="datetimeFigureOut">
               <a:rPr lang="en-US" smtClean="0"/>
-              <a:t>12/5/2025</a:t>
+              <a:t>3/11/26</a:t>
             </a:fld>
             <a:endParaRPr lang="en-US"/>
           </a:p>
@@ -30635,7 +27620,7 @@
           <a:p>
             <a:fld id="{3AEEF7F6-ECFE-4473-B3E9-C91BE833927A}" type="datetimeFigureOut">
               <a:rPr lang="en-US" smtClean="0"/>
-              <a:t>12/5/2025</a:t>
+              <a:t>3/11/26</a:t>
             </a:fld>
             <a:endParaRPr lang="en-US"/>
           </a:p>
@@ -31407,777 +28392,6 @@
   <p:cSld>
     <p:spTree>
       <p:nvGrpSpPr>
-        <p:cNvPr id="1" name="">
-          <a:extLst>
-            <a:ext uri="{FF2B5EF4-FFF2-40B4-BE49-F238E27FC236}">
-              <a16:creationId xmlns:a16="http://schemas.microsoft.com/office/drawing/2014/main" id="{99782830-F01E-94BA-E16A-B36FFA4692F7}"/>
-            </a:ext>
-          </a:extLst>
-        </p:cNvPr>
-        <p:cNvGrpSpPr/>
-        <p:nvPr/>
-      </p:nvGrpSpPr>
-      <p:grpSpPr>
-        <a:xfrm>
-          <a:off x="0" y="0"/>
-          <a:ext cx="0" cy="0"/>
-          <a:chOff x="0" y="0"/>
-          <a:chExt cx="0" cy="0"/>
-        </a:xfrm>
-      </p:grpSpPr>
-      <p:sp>
-        <p:nvSpPr>
-          <p:cNvPr id="2" name="Title 1">
-            <a:extLst>
-              <a:ext uri="{FF2B5EF4-FFF2-40B4-BE49-F238E27FC236}">
-                <a16:creationId xmlns:a16="http://schemas.microsoft.com/office/drawing/2014/main" id="{D421B248-D08C-724F-D33E-D7F4C428537C}"/>
-              </a:ext>
-            </a:extLst>
-          </p:cNvPr>
-          <p:cNvSpPr>
-            <a:spLocks noGrp="1"/>
-          </p:cNvSpPr>
-          <p:nvPr>
-            <p:ph type="title"/>
-          </p:nvPr>
-        </p:nvSpPr>
-        <p:spPr>
-          <a:xfrm>
-            <a:off x="612648" y="502920"/>
-            <a:ext cx="4669536" cy="1453896"/>
-          </a:xfrm>
-        </p:spPr>
-        <p:txBody>
-          <a:bodyPr anchor="t">
-            <a:normAutofit/>
-          </a:bodyPr>
-          <a:lstStyle/>
-          <a:p>
-            <a:r>
-              <a:rPr lang="en-US" sz="4400" dirty="0"/>
-              <a:t>Where does AI Belong?</a:t>
-            </a:r>
-          </a:p>
-        </p:txBody>
-      </p:sp>
-      <p:pic>
-        <p:nvPicPr>
-          <p:cNvPr id="5" name="Content Placeholder 4" descr="Abstract  Digital concept which shows network security optimization and internet technology  ">
-            <a:extLst>
-              <a:ext uri="{FF2B5EF4-FFF2-40B4-BE49-F238E27FC236}">
-                <a16:creationId xmlns:a16="http://schemas.microsoft.com/office/drawing/2014/main" id="{EA9ED319-250E-5821-DF7D-2458738CD738}"/>
-              </a:ext>
-            </a:extLst>
-          </p:cNvPr>
-          <p:cNvPicPr>
-            <a:picLocks noGrp="1" noChangeAspect="1"/>
-          </p:cNvPicPr>
-          <p:nvPr>
-            <p:ph type="pic" sz="quarter" idx="15"/>
-          </p:nvPr>
-        </p:nvPicPr>
-        <p:blipFill>
-          <a:blip r:embed="rId3"/>
-          <a:srcRect r="12979" b="-2"/>
-          <a:stretch>
-            <a:fillRect/>
-          </a:stretch>
-        </p:blipFill>
-        <p:spPr>
-          <a:xfrm>
-            <a:off x="612648" y="2293938"/>
-            <a:ext cx="4669536" cy="4024566"/>
-          </a:xfrm>
-          <a:prstGeom prst="rect">
-            <a:avLst/>
-          </a:prstGeom>
-          <a:noFill/>
-        </p:spPr>
-      </p:pic>
-      <p:sp>
-        <p:nvSpPr>
-          <p:cNvPr id="7" name="Rectangle 6">
-            <a:extLst>
-              <a:ext uri="{FF2B5EF4-FFF2-40B4-BE49-F238E27FC236}">
-                <a16:creationId xmlns:a16="http://schemas.microsoft.com/office/drawing/2014/main" id="{EA05639E-AC16-4352-44C4-A046ACCBEC69}"/>
-              </a:ext>
-            </a:extLst>
-          </p:cNvPr>
-          <p:cNvSpPr/>
-          <p:nvPr/>
-        </p:nvSpPr>
-        <p:spPr>
-          <a:xfrm>
-            <a:off x="5841635" y="2833641"/>
-            <a:ext cx="598636" cy="598636"/>
-          </a:xfrm>
-          <a:prstGeom prst="rect">
-            <a:avLst/>
-          </a:prstGeom>
-        </p:spPr>
-        <p:style>
-          <a:lnRef idx="2">
-            <a:schemeClr val="accent1">
-              <a:shade val="15000"/>
-            </a:schemeClr>
-          </a:lnRef>
-          <a:fillRef idx="1">
-            <a:schemeClr val="accent1"/>
-          </a:fillRef>
-          <a:effectRef idx="0">
-            <a:schemeClr val="accent1"/>
-          </a:effectRef>
-          <a:fontRef idx="minor">
-            <a:schemeClr val="lt1"/>
-          </a:fontRef>
-        </p:style>
-        <p:txBody>
-          <a:bodyPr rtlCol="0" anchor="ctr"/>
-          <a:lstStyle/>
-          <a:p>
-            <a:pPr algn="ctr"/>
-            <a:endParaRPr lang="en-US"/>
-          </a:p>
-        </p:txBody>
-      </p:sp>
-      <p:sp>
-        <p:nvSpPr>
-          <p:cNvPr id="9" name="Rectangle 8">
-            <a:extLst>
-              <a:ext uri="{FF2B5EF4-FFF2-40B4-BE49-F238E27FC236}">
-                <a16:creationId xmlns:a16="http://schemas.microsoft.com/office/drawing/2014/main" id="{4FCF5F1C-544C-1676-343A-4E21CAF49025}"/>
-              </a:ext>
-            </a:extLst>
-          </p:cNvPr>
-          <p:cNvSpPr/>
-          <p:nvPr/>
-        </p:nvSpPr>
-        <p:spPr>
-          <a:xfrm>
-            <a:off x="6609948" y="2833641"/>
-            <a:ext cx="166653" cy="598636"/>
-          </a:xfrm>
-          <a:prstGeom prst="rect">
-            <a:avLst/>
-          </a:prstGeom>
-          <a:solidFill>
-            <a:srgbClr val="FFC000"/>
-          </a:solidFill>
-        </p:spPr>
-        <p:style>
-          <a:lnRef idx="2">
-            <a:schemeClr val="accent1">
-              <a:shade val="15000"/>
-            </a:schemeClr>
-          </a:lnRef>
-          <a:fillRef idx="1">
-            <a:schemeClr val="accent1"/>
-          </a:fillRef>
-          <a:effectRef idx="0">
-            <a:schemeClr val="accent1"/>
-          </a:effectRef>
-          <a:fontRef idx="minor">
-            <a:schemeClr val="lt1"/>
-          </a:fontRef>
-        </p:style>
-        <p:txBody>
-          <a:bodyPr rtlCol="0" anchor="ctr"/>
-          <a:lstStyle/>
-          <a:p>
-            <a:pPr algn="ctr"/>
-            <a:endParaRPr lang="en-US"/>
-          </a:p>
-        </p:txBody>
-      </p:sp>
-      <p:sp>
-        <p:nvSpPr>
-          <p:cNvPr id="10" name="Rectangle 9">
-            <a:extLst>
-              <a:ext uri="{FF2B5EF4-FFF2-40B4-BE49-F238E27FC236}">
-                <a16:creationId xmlns:a16="http://schemas.microsoft.com/office/drawing/2014/main" id="{1E566B7E-05F9-E325-4DE5-94B5163AFCC1}"/>
-              </a:ext>
-            </a:extLst>
-          </p:cNvPr>
-          <p:cNvSpPr/>
-          <p:nvPr/>
-        </p:nvSpPr>
-        <p:spPr>
-          <a:xfrm>
-            <a:off x="6765638" y="2833641"/>
-            <a:ext cx="598636" cy="598636"/>
-          </a:xfrm>
-          <a:prstGeom prst="rect">
-            <a:avLst/>
-          </a:prstGeom>
-        </p:spPr>
-        <p:style>
-          <a:lnRef idx="2">
-            <a:schemeClr val="accent1">
-              <a:shade val="15000"/>
-            </a:schemeClr>
-          </a:lnRef>
-          <a:fillRef idx="1">
-            <a:schemeClr val="accent1"/>
-          </a:fillRef>
-          <a:effectRef idx="0">
-            <a:schemeClr val="accent1"/>
-          </a:effectRef>
-          <a:fontRef idx="minor">
-            <a:schemeClr val="lt1"/>
-          </a:fontRef>
-        </p:style>
-        <p:txBody>
-          <a:bodyPr rtlCol="0" anchor="ctr"/>
-          <a:lstStyle/>
-          <a:p>
-            <a:pPr algn="ctr"/>
-            <a:endParaRPr lang="en-US"/>
-          </a:p>
-        </p:txBody>
-      </p:sp>
-      <p:sp>
-        <p:nvSpPr>
-          <p:cNvPr id="13" name="Rectangle 12">
-            <a:extLst>
-              <a:ext uri="{FF2B5EF4-FFF2-40B4-BE49-F238E27FC236}">
-                <a16:creationId xmlns:a16="http://schemas.microsoft.com/office/drawing/2014/main" id="{08A58595-8BD7-F6FC-CF2B-53E78423B663}"/>
-              </a:ext>
-            </a:extLst>
-          </p:cNvPr>
-          <p:cNvSpPr/>
-          <p:nvPr/>
-        </p:nvSpPr>
-        <p:spPr>
-          <a:xfrm>
-            <a:off x="7697581" y="2830364"/>
-            <a:ext cx="598636" cy="598636"/>
-          </a:xfrm>
-          <a:prstGeom prst="rect">
-            <a:avLst/>
-          </a:prstGeom>
-        </p:spPr>
-        <p:style>
-          <a:lnRef idx="2">
-            <a:schemeClr val="accent1">
-              <a:shade val="15000"/>
-            </a:schemeClr>
-          </a:lnRef>
-          <a:fillRef idx="1">
-            <a:schemeClr val="accent1"/>
-          </a:fillRef>
-          <a:effectRef idx="0">
-            <a:schemeClr val="accent1"/>
-          </a:effectRef>
-          <a:fontRef idx="minor">
-            <a:schemeClr val="lt1"/>
-          </a:fontRef>
-        </p:style>
-        <p:txBody>
-          <a:bodyPr rtlCol="0" anchor="ctr"/>
-          <a:lstStyle/>
-          <a:p>
-            <a:pPr algn="ctr"/>
-            <a:endParaRPr lang="en-US"/>
-          </a:p>
-        </p:txBody>
-      </p:sp>
-      <p:sp>
-        <p:nvSpPr>
-          <p:cNvPr id="16" name="Rectangle 15">
-            <a:extLst>
-              <a:ext uri="{FF2B5EF4-FFF2-40B4-BE49-F238E27FC236}">
-                <a16:creationId xmlns:a16="http://schemas.microsoft.com/office/drawing/2014/main" id="{42180B80-32FB-70AC-DEE8-702FCD3F2EE7}"/>
-              </a:ext>
-            </a:extLst>
-          </p:cNvPr>
-          <p:cNvSpPr/>
-          <p:nvPr/>
-        </p:nvSpPr>
-        <p:spPr>
-          <a:xfrm>
-            <a:off x="8609749" y="2830364"/>
-            <a:ext cx="598636" cy="598636"/>
-          </a:xfrm>
-          <a:prstGeom prst="rect">
-            <a:avLst/>
-          </a:prstGeom>
-        </p:spPr>
-        <p:style>
-          <a:lnRef idx="2">
-            <a:schemeClr val="accent1">
-              <a:shade val="15000"/>
-            </a:schemeClr>
-          </a:lnRef>
-          <a:fillRef idx="1">
-            <a:schemeClr val="accent1"/>
-          </a:fillRef>
-          <a:effectRef idx="0">
-            <a:schemeClr val="accent1"/>
-          </a:effectRef>
-          <a:fontRef idx="minor">
-            <a:schemeClr val="lt1"/>
-          </a:fontRef>
-        </p:style>
-        <p:txBody>
-          <a:bodyPr rtlCol="0" anchor="ctr"/>
-          <a:lstStyle/>
-          <a:p>
-            <a:pPr algn="ctr"/>
-            <a:endParaRPr lang="en-US"/>
-          </a:p>
-        </p:txBody>
-      </p:sp>
-      <p:sp>
-        <p:nvSpPr>
-          <p:cNvPr id="3" name="Rectangle 2">
-            <a:extLst>
-              <a:ext uri="{FF2B5EF4-FFF2-40B4-BE49-F238E27FC236}">
-                <a16:creationId xmlns:a16="http://schemas.microsoft.com/office/drawing/2014/main" id="{115C6174-6D03-1098-2EAE-22E682750AA7}"/>
-              </a:ext>
-            </a:extLst>
-          </p:cNvPr>
-          <p:cNvSpPr/>
-          <p:nvPr/>
-        </p:nvSpPr>
-        <p:spPr>
-          <a:xfrm>
-            <a:off x="8454059" y="2830364"/>
-            <a:ext cx="166653" cy="598636"/>
-          </a:xfrm>
-          <a:prstGeom prst="rect">
-            <a:avLst/>
-          </a:prstGeom>
-          <a:solidFill>
-            <a:srgbClr val="FFC000"/>
-          </a:solidFill>
-        </p:spPr>
-        <p:style>
-          <a:lnRef idx="2">
-            <a:schemeClr val="accent1">
-              <a:shade val="15000"/>
-            </a:schemeClr>
-          </a:lnRef>
-          <a:fillRef idx="1">
-            <a:schemeClr val="accent1"/>
-          </a:fillRef>
-          <a:effectRef idx="0">
-            <a:schemeClr val="accent1"/>
-          </a:effectRef>
-          <a:fontRef idx="minor">
-            <a:schemeClr val="lt1"/>
-          </a:fontRef>
-        </p:style>
-        <p:txBody>
-          <a:bodyPr rtlCol="0" anchor="ctr"/>
-          <a:lstStyle/>
-          <a:p>
-            <a:pPr algn="ctr"/>
-            <a:endParaRPr lang="en-US"/>
-          </a:p>
-        </p:txBody>
-      </p:sp>
-      <p:sp>
-        <p:nvSpPr>
-          <p:cNvPr id="4" name="Rectangle 3">
-            <a:extLst>
-              <a:ext uri="{FF2B5EF4-FFF2-40B4-BE49-F238E27FC236}">
-                <a16:creationId xmlns:a16="http://schemas.microsoft.com/office/drawing/2014/main" id="{3792BC8D-CA06-7CF4-FE60-551183DF184A}"/>
-              </a:ext>
-            </a:extLst>
-          </p:cNvPr>
-          <p:cNvSpPr/>
-          <p:nvPr/>
-        </p:nvSpPr>
-        <p:spPr>
-          <a:xfrm>
-            <a:off x="7530928" y="2830364"/>
-            <a:ext cx="166653" cy="598636"/>
-          </a:xfrm>
-          <a:prstGeom prst="rect">
-            <a:avLst/>
-          </a:prstGeom>
-          <a:solidFill>
-            <a:srgbClr val="FFC000"/>
-          </a:solidFill>
-        </p:spPr>
-        <p:style>
-          <a:lnRef idx="2">
-            <a:schemeClr val="accent1">
-              <a:shade val="15000"/>
-            </a:schemeClr>
-          </a:lnRef>
-          <a:fillRef idx="1">
-            <a:schemeClr val="accent1"/>
-          </a:fillRef>
-          <a:effectRef idx="0">
-            <a:schemeClr val="accent1"/>
-          </a:effectRef>
-          <a:fontRef idx="minor">
-            <a:schemeClr val="lt1"/>
-          </a:fontRef>
-        </p:style>
-        <p:txBody>
-          <a:bodyPr rtlCol="0" anchor="ctr"/>
-          <a:lstStyle/>
-          <a:p>
-            <a:pPr algn="ctr"/>
-            <a:endParaRPr lang="en-US"/>
-          </a:p>
-        </p:txBody>
-      </p:sp>
-      <p:sp>
-        <p:nvSpPr>
-          <p:cNvPr id="6" name="Rectangle 5">
-            <a:extLst>
-              <a:ext uri="{FF2B5EF4-FFF2-40B4-BE49-F238E27FC236}">
-                <a16:creationId xmlns:a16="http://schemas.microsoft.com/office/drawing/2014/main" id="{40BE1336-FEEF-F163-4BEB-CF17080EBD21}"/>
-              </a:ext>
-            </a:extLst>
-          </p:cNvPr>
-          <p:cNvSpPr/>
-          <p:nvPr/>
-        </p:nvSpPr>
-        <p:spPr>
-          <a:xfrm>
-            <a:off x="9208386" y="2833641"/>
-            <a:ext cx="2611934" cy="598636"/>
-          </a:xfrm>
-          <a:prstGeom prst="rect">
-            <a:avLst/>
-          </a:prstGeom>
-          <a:noFill/>
-          <a:ln>
-            <a:prstDash val="sysDot"/>
-          </a:ln>
-        </p:spPr>
-        <p:style>
-          <a:lnRef idx="2">
-            <a:schemeClr val="accent1">
-              <a:shade val="15000"/>
-            </a:schemeClr>
-          </a:lnRef>
-          <a:fillRef idx="1">
-            <a:schemeClr val="accent1"/>
-          </a:fillRef>
-          <a:effectRef idx="0">
-            <a:schemeClr val="accent1"/>
-          </a:effectRef>
-          <a:fontRef idx="minor">
-            <a:schemeClr val="lt1"/>
-          </a:fontRef>
-        </p:style>
-        <p:txBody>
-          <a:bodyPr rtlCol="0" anchor="ctr"/>
-          <a:lstStyle/>
-          <a:p>
-            <a:pPr algn="ctr"/>
-            <a:endParaRPr lang="en-US" dirty="0"/>
-          </a:p>
-        </p:txBody>
-      </p:sp>
-      <p:sp>
-        <p:nvSpPr>
-          <p:cNvPr id="19" name="Rectangle 18">
-            <a:extLst>
-              <a:ext uri="{FF2B5EF4-FFF2-40B4-BE49-F238E27FC236}">
-                <a16:creationId xmlns:a16="http://schemas.microsoft.com/office/drawing/2014/main" id="{907DD57D-CFED-B13A-B8E4-8DB2438E59BF}"/>
-              </a:ext>
-            </a:extLst>
-          </p:cNvPr>
-          <p:cNvSpPr/>
-          <p:nvPr/>
-        </p:nvSpPr>
-        <p:spPr>
-          <a:xfrm>
-            <a:off x="5901451" y="3903790"/>
-            <a:ext cx="6007286" cy="2554545"/>
-          </a:xfrm>
-          <a:prstGeom prst="rect">
-            <a:avLst/>
-          </a:prstGeom>
-          <a:noFill/>
-        </p:spPr>
-        <p:txBody>
-          <a:bodyPr wrap="none" lIns="91440" tIns="45720" rIns="91440" bIns="45720">
-            <a:spAutoFit/>
-          </a:bodyPr>
-          <a:lstStyle/>
-          <a:p>
-            <a:pPr algn="ctr"/>
-            <a:r>
-              <a:rPr lang="en-US" sz="8000" b="1" cap="none" spc="0" dirty="0">
-                <a:ln w="22225">
-                  <a:solidFill>
-                    <a:schemeClr val="accent2"/>
-                  </a:solidFill>
-                  <a:prstDash val="solid"/>
-                </a:ln>
-                <a:solidFill>
-                  <a:schemeClr val="accent2">
-                    <a:lumMod val="40000"/>
-                    <a:lumOff val="60000"/>
-                  </a:schemeClr>
-                </a:solidFill>
-                <a:effectLst/>
-              </a:rPr>
-              <a:t>Better</a:t>
-            </a:r>
-          </a:p>
-          <a:p>
-            <a:pPr algn="ctr"/>
-            <a:r>
-              <a:rPr lang="en-US" sz="8000" b="1" dirty="0">
-                <a:ln w="22225">
-                  <a:solidFill>
-                    <a:schemeClr val="accent2"/>
-                  </a:solidFill>
-                  <a:prstDash val="solid"/>
-                </a:ln>
-                <a:solidFill>
-                  <a:schemeClr val="accent2">
-                    <a:lumMod val="40000"/>
-                    <a:lumOff val="60000"/>
-                  </a:schemeClr>
-                </a:solidFill>
-              </a:rPr>
-              <a:t>Compression</a:t>
-            </a:r>
-            <a:endParaRPr lang="en-US" sz="8000" b="1" cap="none" spc="0" dirty="0">
-              <a:ln w="22225">
-                <a:solidFill>
-                  <a:schemeClr val="accent2"/>
-                </a:solidFill>
-                <a:prstDash val="solid"/>
-              </a:ln>
-              <a:solidFill>
-                <a:schemeClr val="accent2">
-                  <a:lumMod val="40000"/>
-                  <a:lumOff val="60000"/>
-                </a:schemeClr>
-              </a:solidFill>
-              <a:effectLst/>
-            </a:endParaRPr>
-          </a:p>
-        </p:txBody>
-      </p:sp>
-      <p:sp>
-        <p:nvSpPr>
-          <p:cNvPr id="12" name="Rectangle 11">
-            <a:extLst>
-              <a:ext uri="{FF2B5EF4-FFF2-40B4-BE49-F238E27FC236}">
-                <a16:creationId xmlns:a16="http://schemas.microsoft.com/office/drawing/2014/main" id="{6DC513F4-E5AE-AED5-8A2A-879D571E154A}"/>
-              </a:ext>
-            </a:extLst>
-          </p:cNvPr>
-          <p:cNvSpPr/>
-          <p:nvPr/>
-        </p:nvSpPr>
-        <p:spPr>
-          <a:xfrm>
-            <a:off x="5544295" y="577650"/>
-            <a:ext cx="6385211" cy="1323439"/>
-          </a:xfrm>
-          <a:prstGeom prst="rect">
-            <a:avLst/>
-          </a:prstGeom>
-          <a:noFill/>
-        </p:spPr>
-        <p:txBody>
-          <a:bodyPr wrap="none" lIns="91440" tIns="45720" rIns="91440" bIns="45720">
-            <a:spAutoFit/>
-          </a:bodyPr>
-          <a:lstStyle/>
-          <a:p>
-            <a:pPr algn="ctr"/>
-            <a:r>
-              <a:rPr lang="en-US" sz="8000" b="1" cap="none" spc="0" dirty="0">
-                <a:ln w="22225">
-                  <a:solidFill>
-                    <a:schemeClr val="accent2"/>
-                  </a:solidFill>
-                  <a:prstDash val="solid"/>
-                </a:ln>
-                <a:solidFill>
-                  <a:schemeClr val="accent2">
-                    <a:lumMod val="40000"/>
-                    <a:lumOff val="60000"/>
-                  </a:schemeClr>
-                </a:solidFill>
-                <a:effectLst/>
-              </a:rPr>
-              <a:t>Better Context</a:t>
-            </a:r>
-          </a:p>
-        </p:txBody>
-      </p:sp>
-      <p:sp>
-        <p:nvSpPr>
-          <p:cNvPr id="15" name="Rectangle 14">
-            <a:extLst>
-              <a:ext uri="{FF2B5EF4-FFF2-40B4-BE49-F238E27FC236}">
-                <a16:creationId xmlns:a16="http://schemas.microsoft.com/office/drawing/2014/main" id="{29892087-EEDE-7865-BFDE-63391AFF6B0E}"/>
-              </a:ext>
-            </a:extLst>
-          </p:cNvPr>
-          <p:cNvSpPr/>
-          <p:nvPr/>
-        </p:nvSpPr>
-        <p:spPr>
-          <a:xfrm>
-            <a:off x="6440271" y="2833641"/>
-            <a:ext cx="166653" cy="598636"/>
-          </a:xfrm>
-          <a:prstGeom prst="rect">
-            <a:avLst/>
-          </a:prstGeom>
-          <a:solidFill>
-            <a:srgbClr val="FFC000"/>
-          </a:solidFill>
-        </p:spPr>
-        <p:style>
-          <a:lnRef idx="2">
-            <a:schemeClr val="accent1">
-              <a:shade val="15000"/>
-            </a:schemeClr>
-          </a:lnRef>
-          <a:fillRef idx="1">
-            <a:schemeClr val="accent1"/>
-          </a:fillRef>
-          <a:effectRef idx="0">
-            <a:schemeClr val="accent1"/>
-          </a:effectRef>
-          <a:fontRef idx="minor">
-            <a:schemeClr val="lt1"/>
-          </a:fontRef>
-        </p:style>
-        <p:txBody>
-          <a:bodyPr rtlCol="0" anchor="ctr"/>
-          <a:lstStyle/>
-          <a:p>
-            <a:pPr algn="ctr"/>
-            <a:endParaRPr lang="en-US"/>
-          </a:p>
-        </p:txBody>
-      </p:sp>
-      <p:sp>
-        <p:nvSpPr>
-          <p:cNvPr id="17" name="Rectangle 16">
-            <a:extLst>
-              <a:ext uri="{FF2B5EF4-FFF2-40B4-BE49-F238E27FC236}">
-                <a16:creationId xmlns:a16="http://schemas.microsoft.com/office/drawing/2014/main" id="{EAFE27EB-DE1E-EE43-5FA4-178F16780580}"/>
-              </a:ext>
-            </a:extLst>
-          </p:cNvPr>
-          <p:cNvSpPr/>
-          <p:nvPr/>
-        </p:nvSpPr>
-        <p:spPr>
-          <a:xfrm>
-            <a:off x="7364274" y="2830364"/>
-            <a:ext cx="166653" cy="598636"/>
-          </a:xfrm>
-          <a:prstGeom prst="rect">
-            <a:avLst/>
-          </a:prstGeom>
-          <a:solidFill>
-            <a:srgbClr val="FFC000"/>
-          </a:solidFill>
-        </p:spPr>
-        <p:style>
-          <a:lnRef idx="2">
-            <a:schemeClr val="accent1">
-              <a:shade val="15000"/>
-            </a:schemeClr>
-          </a:lnRef>
-          <a:fillRef idx="1">
-            <a:schemeClr val="accent1"/>
-          </a:fillRef>
-          <a:effectRef idx="0">
-            <a:schemeClr val="accent1"/>
-          </a:effectRef>
-          <a:fontRef idx="minor">
-            <a:schemeClr val="lt1"/>
-          </a:fontRef>
-        </p:style>
-        <p:txBody>
-          <a:bodyPr rtlCol="0" anchor="ctr"/>
-          <a:lstStyle/>
-          <a:p>
-            <a:pPr algn="ctr"/>
-            <a:endParaRPr lang="en-US"/>
-          </a:p>
-        </p:txBody>
-      </p:sp>
-      <p:sp>
-        <p:nvSpPr>
-          <p:cNvPr id="18" name="Rectangle 17">
-            <a:extLst>
-              <a:ext uri="{FF2B5EF4-FFF2-40B4-BE49-F238E27FC236}">
-                <a16:creationId xmlns:a16="http://schemas.microsoft.com/office/drawing/2014/main" id="{32B69063-A1AD-A03D-1D70-1A02A5AE111F}"/>
-              </a:ext>
-            </a:extLst>
-          </p:cNvPr>
-          <p:cNvSpPr/>
-          <p:nvPr/>
-        </p:nvSpPr>
-        <p:spPr>
-          <a:xfrm>
-            <a:off x="8288277" y="2830364"/>
-            <a:ext cx="166653" cy="598636"/>
-          </a:xfrm>
-          <a:prstGeom prst="rect">
-            <a:avLst/>
-          </a:prstGeom>
-          <a:solidFill>
-            <a:srgbClr val="FFC000"/>
-          </a:solidFill>
-        </p:spPr>
-        <p:style>
-          <a:lnRef idx="2">
-            <a:schemeClr val="accent1">
-              <a:shade val="15000"/>
-            </a:schemeClr>
-          </a:lnRef>
-          <a:fillRef idx="1">
-            <a:schemeClr val="accent1"/>
-          </a:fillRef>
-          <a:effectRef idx="0">
-            <a:schemeClr val="accent1"/>
-          </a:effectRef>
-          <a:fontRef idx="minor">
-            <a:schemeClr val="lt1"/>
-          </a:fontRef>
-        </p:style>
-        <p:txBody>
-          <a:bodyPr rtlCol="0" anchor="ctr"/>
-          <a:lstStyle/>
-          <a:p>
-            <a:pPr algn="ctr"/>
-            <a:endParaRPr lang="en-US"/>
-          </a:p>
-        </p:txBody>
-      </p:sp>
-    </p:spTree>
-    <p:extLst>
-      <p:ext uri="{BB962C8B-B14F-4D97-AF65-F5344CB8AC3E}">
-        <p14:creationId xmlns:p14="http://schemas.microsoft.com/office/powerpoint/2010/main" val="671516021"/>
-      </p:ext>
-    </p:extLst>
-  </p:cSld>
-  <p:clrMapOvr>
-    <a:masterClrMapping/>
-  </p:clrMapOvr>
-  <p:transition>
-    <p:fade/>
-  </p:transition>
-</p:sld>
-</file>
-
-<file path=ppt/slides/slide11.xml><?xml version="1.0" encoding="utf-8"?>
-<p:sld xmlns:a="http://schemas.openxmlformats.org/drawingml/2006/main" xmlns:r="http://schemas.openxmlformats.org/officeDocument/2006/relationships" xmlns:p="http://schemas.openxmlformats.org/presentationml/2006/main">
-  <p:cSld>
-    <p:spTree>
-      <p:nvGrpSpPr>
         <p:cNvPr id="1" name=""/>
         <p:cNvGrpSpPr/>
         <p:nvPr/>
@@ -32283,7 +28497,7 @@
 </p:sld>
 </file>
 
-<file path=ppt/slides/slide12.xml><?xml version="1.0" encoding="utf-8"?>
+<file path=ppt/slides/slide11.xml><?xml version="1.0" encoding="utf-8"?>
 <p:sld xmlns:a="http://schemas.openxmlformats.org/drawingml/2006/main" xmlns:r="http://schemas.openxmlformats.org/officeDocument/2006/relationships" xmlns:p="http://schemas.openxmlformats.org/presentationml/2006/main">
   <p:cSld>
     <p:spTree>
@@ -32341,7 +28555,7 @@
 </p:sld>
 </file>
 
-<file path=ppt/slides/slide13.xml><?xml version="1.0" encoding="utf-8"?>
+<file path=ppt/slides/slide12.xml><?xml version="1.0" encoding="utf-8"?>
 <p:sld xmlns:a="http://schemas.openxmlformats.org/drawingml/2006/main" xmlns:r="http://schemas.openxmlformats.org/officeDocument/2006/relationships" xmlns:p="http://schemas.openxmlformats.org/presentationml/2006/main">
   <p:cSld>
     <p:spTree>
@@ -32501,7 +28715,7 @@
 </p:sld>
 </file>
 
-<file path=ppt/slides/slide14.xml><?xml version="1.0" encoding="utf-8"?>
+<file path=ppt/slides/slide13.xml><?xml version="1.0" encoding="utf-8"?>
 <p:sld xmlns:a="http://schemas.openxmlformats.org/drawingml/2006/main" xmlns:r="http://schemas.openxmlformats.org/officeDocument/2006/relationships" xmlns:p="http://schemas.openxmlformats.org/presentationml/2006/main">
   <p:cSld>
     <p:spTree>
@@ -32609,7 +28823,7 @@
 </p:sld>
 </file>
 
-<file path=ppt/slides/slide15.xml><?xml version="1.0" encoding="utf-8"?>
+<file path=ppt/slides/slide14.xml><?xml version="1.0" encoding="utf-8"?>
 <p:sld xmlns:a="http://schemas.openxmlformats.org/drawingml/2006/main" xmlns:r="http://schemas.openxmlformats.org/officeDocument/2006/relationships" xmlns:p="http://schemas.openxmlformats.org/presentationml/2006/main">
   <p:cSld>
     <p:spTree>
@@ -32769,7 +28983,7 @@
 </p:sld>
 </file>
 
-<file path=ppt/slides/slide16.xml><?xml version="1.0" encoding="utf-8"?>
+<file path=ppt/slides/slide15.xml><?xml version="1.0" encoding="utf-8"?>
 <p:sld xmlns:a="http://schemas.openxmlformats.org/drawingml/2006/main" xmlns:r="http://schemas.openxmlformats.org/officeDocument/2006/relationships" xmlns:p="http://schemas.openxmlformats.org/presentationml/2006/main">
   <p:cSld>
     <p:spTree>
@@ -33087,7 +29301,7 @@
 </p:sld>
 </file>
 
-<file path=ppt/slides/slide17.xml><?xml version="1.0" encoding="utf-8"?>
+<file path=ppt/slides/slide16.xml><?xml version="1.0" encoding="utf-8"?>
 <p:sld xmlns:a="http://schemas.openxmlformats.org/drawingml/2006/main" xmlns:r="http://schemas.openxmlformats.org/officeDocument/2006/relationships" xmlns:p="http://schemas.openxmlformats.org/presentationml/2006/main">
   <p:cSld>
     <p:spTree>
@@ -33762,7 +29976,7 @@
 </p:sld>
 </file>
 
-<file path=ppt/slides/slide18.xml><?xml version="1.0" encoding="utf-8"?>
+<file path=ppt/slides/slide17.xml><?xml version="1.0" encoding="utf-8"?>
 <p:sld xmlns:a="http://schemas.openxmlformats.org/drawingml/2006/main" xmlns:r="http://schemas.openxmlformats.org/officeDocument/2006/relationships" xmlns:p="http://schemas.openxmlformats.org/presentationml/2006/main">
   <p:cSld>
     <p:spTree>
@@ -34695,7 +30909,7 @@
 </p:sld>
 </file>
 
-<file path=ppt/slides/slide19.xml><?xml version="1.0" encoding="utf-8"?>
+<file path=ppt/slides/slide18.xml><?xml version="1.0" encoding="utf-8"?>
 <p:sld xmlns:a="http://schemas.openxmlformats.org/drawingml/2006/main" xmlns:r="http://schemas.openxmlformats.org/officeDocument/2006/relationships" xmlns:p="http://schemas.openxmlformats.org/presentationml/2006/main">
   <p:cSld>
     <p:spTree>
@@ -34884,62 +31098,7 @@
 </p:sld>
 </file>
 
-<file path=ppt/slides/slide2.xml><?xml version="1.0" encoding="utf-8"?>
-<p:sld xmlns:a="http://schemas.openxmlformats.org/drawingml/2006/main" xmlns:r="http://schemas.openxmlformats.org/officeDocument/2006/relationships" xmlns:p="http://schemas.openxmlformats.org/presentationml/2006/main">
-  <p:cSld>
-    <p:spTree>
-      <p:nvGrpSpPr>
-        <p:cNvPr id="1" name=""/>
-        <p:cNvGrpSpPr/>
-        <p:nvPr/>
-      </p:nvGrpSpPr>
-      <p:grpSpPr>
-        <a:xfrm>
-          <a:off x="0" y="0"/>
-          <a:ext cx="0" cy="0"/>
-          <a:chOff x="0" y="0"/>
-          <a:chExt cx="0" cy="0"/>
-        </a:xfrm>
-      </p:grpSpPr>
-      <p:pic>
-        <p:nvPicPr>
-          <p:cNvPr id="16" name="Picture 15">
-            <a:extLst>
-              <a:ext uri="{FF2B5EF4-FFF2-40B4-BE49-F238E27FC236}">
-                <a16:creationId xmlns:a16="http://schemas.microsoft.com/office/drawing/2014/main" id="{AF4C48C5-4F66-3B0C-8F06-80C218133F91}"/>
-              </a:ext>
-            </a:extLst>
-          </p:cNvPr>
-          <p:cNvPicPr>
-            <a:picLocks noChangeAspect="1"/>
-          </p:cNvPicPr>
-          <p:nvPr/>
-        </p:nvPicPr>
-        <p:blipFill>
-          <a:blip r:embed="rId2"/>
-          <a:stretch>
-            <a:fillRect/>
-          </a:stretch>
-        </p:blipFill>
-        <p:spPr>
-          <a:xfrm>
-            <a:off x="0" y="9374"/>
-            <a:ext cx="12192000" cy="6839252"/>
-          </a:xfrm>
-          <a:prstGeom prst="rect">
-            <a:avLst/>
-          </a:prstGeom>
-        </p:spPr>
-      </p:pic>
-    </p:spTree>
-  </p:cSld>
-  <p:clrMapOvr>
-    <a:masterClrMapping/>
-  </p:clrMapOvr>
-</p:sld>
-</file>
-
-<file path=ppt/slides/slide20.xml><?xml version="1.0" encoding="utf-8"?>
+<file path=ppt/slides/slide19.xml><?xml version="1.0" encoding="utf-8"?>
 <p:sld xmlns:a="http://schemas.openxmlformats.org/drawingml/2006/main" xmlns:r="http://schemas.openxmlformats.org/officeDocument/2006/relationships" xmlns:p="http://schemas.openxmlformats.org/presentationml/2006/main">
   <p:cSld>
     <p:spTree>
@@ -35216,7 +31375,7 @@
 </p:sld>
 </file>
 
-<file path=ppt/slides/slide21.xml><?xml version="1.0" encoding="utf-8"?>
+<file path=ppt/slides/slide2.xml><?xml version="1.0" encoding="utf-8"?>
 <p:sld xmlns:a="http://schemas.openxmlformats.org/drawingml/2006/main" xmlns:r="http://schemas.openxmlformats.org/officeDocument/2006/relationships" xmlns:p="http://schemas.openxmlformats.org/presentationml/2006/main">
   <p:cSld>
     <p:spTree>
@@ -35238,7 +31397,7 @@
           <p:cNvPr id="5" name="Title 4">
             <a:extLst>
               <a:ext uri="{FF2B5EF4-FFF2-40B4-BE49-F238E27FC236}">
-                <a16:creationId xmlns:a16="http://schemas.microsoft.com/office/drawing/2014/main" id="{A18D4A22-5F39-C9F4-EF5A-FB81BC8128D7}"/>
+                <a16:creationId xmlns:a16="http://schemas.microsoft.com/office/drawing/2014/main" id="{A052CA08-BFB4-E89B-4D92-B77BCC2B40CA}"/>
               </a:ext>
             </a:extLst>
           </p:cNvPr>
@@ -35246,27 +31405,34 @@
             <a:spLocks noGrp="1"/>
           </p:cNvSpPr>
           <p:nvPr>
-            <p:ph type="ctrTitle"/>
+            <p:ph type="title"/>
           </p:nvPr>
         </p:nvSpPr>
-        <p:spPr/>
-        <p:txBody>
-          <a:bodyPr/>
+        <p:spPr>
+          <a:xfrm>
+            <a:off x="5970589" y="131546"/>
+            <a:ext cx="5664198" cy="863023"/>
+          </a:xfrm>
+        </p:spPr>
+        <p:txBody>
+          <a:bodyPr>
+            <a:normAutofit fontScale="90000"/>
+          </a:bodyPr>
           <a:lstStyle/>
           <a:p>
             <a:r>
               <a:rPr lang="en-US" dirty="0"/>
-              <a:t>GitHub Remote Server</a:t>
-            </a:r>
-          </a:p>
-        </p:txBody>
-      </p:sp>
-      <p:sp>
-        <p:nvSpPr>
-          <p:cNvPr id="6" name="Subtitle 5">
-            <a:extLst>
-              <a:ext uri="{FF2B5EF4-FFF2-40B4-BE49-F238E27FC236}">
-                <a16:creationId xmlns:a16="http://schemas.microsoft.com/office/drawing/2014/main" id="{43994C03-9C0C-B305-596C-072F88C94D5B}"/>
+              <a:t>Tim Rayburn</a:t>
+            </a:r>
+          </a:p>
+        </p:txBody>
+      </p:sp>
+      <p:sp>
+        <p:nvSpPr>
+          <p:cNvPr id="6" name="Content Placeholder 5">
+            <a:extLst>
+              <a:ext uri="{FF2B5EF4-FFF2-40B4-BE49-F238E27FC236}">
+                <a16:creationId xmlns:a16="http://schemas.microsoft.com/office/drawing/2014/main" id="{48FF2279-58EF-0FFD-23EC-F46B5F9C650B}"/>
               </a:ext>
             </a:extLst>
           </p:cNvPr>
@@ -35274,25 +31440,264 @@
             <a:spLocks noGrp="1"/>
           </p:cNvSpPr>
           <p:nvPr>
-            <p:ph type="subTitle" idx="1"/>
+            <p:ph sz="quarter" idx="13"/>
           </p:nvPr>
         </p:nvSpPr>
-        <p:spPr/>
-        <p:txBody>
-          <a:bodyPr/>
+        <p:spPr>
+          <a:xfrm>
+            <a:off x="5785980" y="994569"/>
+            <a:ext cx="6351199" cy="5597005"/>
+          </a:xfrm>
+        </p:spPr>
+        <p:txBody>
+          <a:bodyPr anchor="t">
+            <a:normAutofit/>
+          </a:bodyPr>
           <a:lstStyle/>
           <a:p>
             <a:r>
-              <a:rPr lang="en-US" dirty="0"/>
-              <a:t>Demonstration</a:t>
-            </a:r>
-          </a:p>
-        </p:txBody>
-      </p:sp>
+              <a:rPr lang="en-US" dirty="0">
+                <a:latin typeface="Calibri" panose="020F0502020204030204" pitchFamily="34" charset="0"/>
+                <a:ea typeface="Calibri" panose="020F0502020204030204" pitchFamily="34" charset="0"/>
+                <a:cs typeface="Calibri" panose="020F0502020204030204" pitchFamily="34" charset="0"/>
+              </a:rPr>
+              <a:t>11-time </a:t>
+            </a:r>
+            <a:r>
+              <a:rPr lang="en-US" b="1" dirty="0">
+                <a:latin typeface="Calibri" panose="020F0502020204030204" pitchFamily="34" charset="0"/>
+                <a:ea typeface="Calibri" panose="020F0502020204030204" pitchFamily="34" charset="0"/>
+                <a:cs typeface="Calibri" panose="020F0502020204030204" pitchFamily="34" charset="0"/>
+              </a:rPr>
+              <a:t>Microsoft MVP </a:t>
+            </a:r>
+            <a:r>
+              <a:rPr lang="en-US" dirty="0">
+                <a:latin typeface="Calibri" panose="020F0502020204030204" pitchFamily="34" charset="0"/>
+                <a:ea typeface="Calibri" panose="020F0502020204030204" pitchFamily="34" charset="0"/>
+                <a:cs typeface="Calibri" panose="020F0502020204030204" pitchFamily="34" charset="0"/>
+              </a:rPr>
+              <a:t>(2007-2018)</a:t>
+            </a:r>
+          </a:p>
+          <a:p>
+            <a:r>
+              <a:rPr lang="en-US" b="1" dirty="0">
+                <a:latin typeface="Calibri" panose="020F0502020204030204" pitchFamily="34" charset="0"/>
+                <a:ea typeface="Calibri" panose="020F0502020204030204" pitchFamily="34" charset="0"/>
+                <a:cs typeface="Calibri" panose="020F0502020204030204" pitchFamily="34" charset="0"/>
+              </a:rPr>
+              <a:t>Open Source Maintainer</a:t>
+            </a:r>
+            <a:r>
+              <a:rPr lang="en-US" dirty="0">
+                <a:latin typeface="Calibri" panose="020F0502020204030204" pitchFamily="34" charset="0"/>
+                <a:ea typeface="Calibri" panose="020F0502020204030204" pitchFamily="34" charset="0"/>
+                <a:cs typeface="Calibri" panose="020F0502020204030204" pitchFamily="34" charset="0"/>
+              </a:rPr>
+              <a:t> for Highway Framework</a:t>
+            </a:r>
+          </a:p>
+          <a:p>
+            <a:r>
+              <a:rPr lang="en-US" b="1" dirty="0">
+                <a:latin typeface="Calibri" panose="020F0502020204030204" pitchFamily="34" charset="0"/>
+                <a:ea typeface="Calibri" panose="020F0502020204030204" pitchFamily="34" charset="0"/>
+                <a:cs typeface="Calibri" panose="020F0502020204030204" pitchFamily="34" charset="0"/>
+              </a:rPr>
+              <a:t>BBQ Fanatic </a:t>
+            </a:r>
+            <a:r>
+              <a:rPr lang="en-US" dirty="0">
+                <a:latin typeface="Calibri" panose="020F0502020204030204" pitchFamily="34" charset="0"/>
+                <a:ea typeface="Calibri" panose="020F0502020204030204" pitchFamily="34" charset="0"/>
+                <a:cs typeface="Calibri" panose="020F0502020204030204" pitchFamily="34" charset="0"/>
+              </a:rPr>
+              <a:t>– Feed over 200 people every July 4</a:t>
+            </a:r>
+            <a:r>
+              <a:rPr lang="en-US" baseline="30000" dirty="0">
+                <a:latin typeface="Calibri" panose="020F0502020204030204" pitchFamily="34" charset="0"/>
+                <a:ea typeface="Calibri" panose="020F0502020204030204" pitchFamily="34" charset="0"/>
+                <a:cs typeface="Calibri" panose="020F0502020204030204" pitchFamily="34" charset="0"/>
+              </a:rPr>
+              <a:t>th</a:t>
+            </a:r>
+            <a:r>
+              <a:rPr lang="en-US" dirty="0">
+                <a:latin typeface="Calibri" panose="020F0502020204030204" pitchFamily="34" charset="0"/>
+                <a:ea typeface="Calibri" panose="020F0502020204030204" pitchFamily="34" charset="0"/>
+                <a:cs typeface="Calibri" panose="020F0502020204030204" pitchFamily="34" charset="0"/>
+              </a:rPr>
+              <a:t> at the Improving Dallas office</a:t>
+            </a:r>
+          </a:p>
+          <a:p>
+            <a:r>
+              <a:rPr lang="en-US" b="1" dirty="0">
+                <a:latin typeface="Calibri" panose="020F0502020204030204" pitchFamily="34" charset="0"/>
+                <a:ea typeface="Calibri" panose="020F0502020204030204" pitchFamily="34" charset="0"/>
+                <a:cs typeface="Calibri" panose="020F0502020204030204" pitchFamily="34" charset="0"/>
+              </a:rPr>
+              <a:t>Soccer Fan </a:t>
+            </a:r>
+            <a:r>
+              <a:rPr lang="en-US" dirty="0">
+                <a:latin typeface="Calibri" panose="020F0502020204030204" pitchFamily="34" charset="0"/>
+                <a:ea typeface="Calibri" panose="020F0502020204030204" pitchFamily="34" charset="0"/>
+                <a:cs typeface="Calibri" panose="020F0502020204030204" pitchFamily="34" charset="0"/>
+              </a:rPr>
+              <a:t>– Season ticket holder for FC Dallas, Followed the USWNT through the World Cup playoff rounds in France (2019)</a:t>
+            </a:r>
+          </a:p>
+          <a:p>
+            <a:r>
+              <a:rPr lang="en-US" dirty="0">
+                <a:latin typeface="Calibri" panose="020F0502020204030204" pitchFamily="34" charset="0"/>
+                <a:ea typeface="Calibri" panose="020F0502020204030204" pitchFamily="34" charset="0"/>
+                <a:cs typeface="Calibri" panose="020F0502020204030204" pitchFamily="34" charset="0"/>
+              </a:rPr>
+              <a:t>Former </a:t>
+            </a:r>
+            <a:r>
+              <a:rPr lang="en-US" b="1" dirty="0">
+                <a:latin typeface="Calibri" panose="020F0502020204030204" pitchFamily="34" charset="0"/>
+                <a:ea typeface="Calibri" panose="020F0502020204030204" pitchFamily="34" charset="0"/>
+                <a:cs typeface="Calibri" panose="020F0502020204030204" pitchFamily="34" charset="0"/>
+              </a:rPr>
+              <a:t>Game Store Owner</a:t>
+            </a:r>
+          </a:p>
+          <a:p>
+            <a:r>
+              <a:rPr lang="en-US" dirty="0">
+                <a:latin typeface="Calibri" panose="020F0502020204030204" pitchFamily="34" charset="0"/>
+                <a:ea typeface="Calibri" panose="020F0502020204030204" pitchFamily="34" charset="0"/>
+                <a:cs typeface="Calibri" panose="020F0502020204030204" pitchFamily="34" charset="0"/>
+              </a:rPr>
+              <a:t>Avid </a:t>
+            </a:r>
+            <a:r>
+              <a:rPr lang="en-US" b="1" dirty="0">
+                <a:latin typeface="Calibri" panose="020F0502020204030204" pitchFamily="34" charset="0"/>
+                <a:ea typeface="Calibri" panose="020F0502020204030204" pitchFamily="34" charset="0"/>
+                <a:cs typeface="Calibri" panose="020F0502020204030204" pitchFamily="34" charset="0"/>
+              </a:rPr>
+              <a:t>Magic the Gathering </a:t>
+            </a:r>
+            <a:r>
+              <a:rPr lang="en-US" dirty="0">
+                <a:latin typeface="Calibri" panose="020F0502020204030204" pitchFamily="34" charset="0"/>
+                <a:ea typeface="Calibri" panose="020F0502020204030204" pitchFamily="34" charset="0"/>
+                <a:cs typeface="Calibri" panose="020F0502020204030204" pitchFamily="34" charset="0"/>
+              </a:rPr>
+              <a:t>player (Commander)</a:t>
+            </a:r>
+          </a:p>
+          <a:p>
+            <a:r>
+              <a:rPr lang="en-US" dirty="0">
+                <a:latin typeface="Calibri" panose="020F0502020204030204" pitchFamily="34" charset="0"/>
+                <a:ea typeface="Calibri" panose="020F0502020204030204" pitchFamily="34" charset="0"/>
+                <a:cs typeface="Calibri" panose="020F0502020204030204" pitchFamily="34" charset="0"/>
+              </a:rPr>
+              <a:t>Former</a:t>
+            </a:r>
+            <a:r>
+              <a:rPr lang="en-US" b="1" dirty="0">
+                <a:latin typeface="Calibri" panose="020F0502020204030204" pitchFamily="34" charset="0"/>
+                <a:ea typeface="Calibri" panose="020F0502020204030204" pitchFamily="34" charset="0"/>
+                <a:cs typeface="Calibri" panose="020F0502020204030204" pitchFamily="34" charset="0"/>
+              </a:rPr>
+              <a:t> D&amp;D Podcaster </a:t>
+            </a:r>
+            <a:r>
+              <a:rPr lang="en-US" dirty="0">
+                <a:latin typeface="Calibri" panose="020F0502020204030204" pitchFamily="34" charset="0"/>
+                <a:ea typeface="Calibri" panose="020F0502020204030204" pitchFamily="34" charset="0"/>
+                <a:cs typeface="Calibri" panose="020F0502020204030204" pitchFamily="34" charset="0"/>
+              </a:rPr>
+              <a:t>(Radio Free </a:t>
+            </a:r>
+            <a:r>
+              <a:rPr lang="en-US" dirty="0" err="1">
+                <a:latin typeface="Calibri" panose="020F0502020204030204" pitchFamily="34" charset="0"/>
+                <a:ea typeface="Calibri" panose="020F0502020204030204" pitchFamily="34" charset="0"/>
+                <a:cs typeface="Calibri" panose="020F0502020204030204" pitchFamily="34" charset="0"/>
+              </a:rPr>
+              <a:t>Hommlet</a:t>
+            </a:r>
+            <a:r>
+              <a:rPr lang="en-US" dirty="0">
+                <a:latin typeface="Calibri" panose="020F0502020204030204" pitchFamily="34" charset="0"/>
+                <a:ea typeface="Calibri" panose="020F0502020204030204" pitchFamily="34" charset="0"/>
+                <a:cs typeface="Calibri" panose="020F0502020204030204" pitchFamily="34" charset="0"/>
+              </a:rPr>
+              <a:t>)</a:t>
+            </a:r>
+          </a:p>
+          <a:p>
+            <a:r>
+              <a:rPr lang="en-US" b="1" dirty="0">
+                <a:latin typeface="Calibri" panose="020F0502020204030204" pitchFamily="34" charset="0"/>
+                <a:ea typeface="Calibri" panose="020F0502020204030204" pitchFamily="34" charset="0"/>
+                <a:cs typeface="Calibri" panose="020F0502020204030204" pitchFamily="34" charset="0"/>
+              </a:rPr>
+              <a:t>Drone Pilot</a:t>
+            </a:r>
+          </a:p>
+          <a:p>
+            <a:r>
+              <a:rPr lang="en-US" b="1" dirty="0">
+                <a:latin typeface="Calibri" panose="020F0502020204030204" pitchFamily="34" charset="0"/>
+                <a:ea typeface="Calibri" panose="020F0502020204030204" pitchFamily="34" charset="0"/>
+                <a:cs typeface="Calibri" panose="020F0502020204030204" pitchFamily="34" charset="0"/>
+              </a:rPr>
+              <a:t>Specialization is for Insects.</a:t>
+            </a:r>
+          </a:p>
+        </p:txBody>
+      </p:sp>
+      <p:pic>
+        <p:nvPicPr>
+          <p:cNvPr id="9" name="Content Placeholder 9" descr="A picture containing person, person, outdoor, standing&#10;&#10;Description automatically generated">
+            <a:extLst>
+              <a:ext uri="{FF2B5EF4-FFF2-40B4-BE49-F238E27FC236}">
+                <a16:creationId xmlns:a16="http://schemas.microsoft.com/office/drawing/2014/main" id="{8B421111-3E74-15D2-B0D7-5DF537E91BA1}"/>
+              </a:ext>
+            </a:extLst>
+          </p:cNvPr>
+          <p:cNvPicPr>
+            <a:picLocks noGrp="1" noChangeAspect="1"/>
+          </p:cNvPicPr>
+          <p:nvPr>
+            <p:ph type="pic" sz="quarter" idx="17"/>
+          </p:nvPr>
+        </p:nvPicPr>
+        <p:blipFill>
+          <a:blip r:embed="rId2">
+            <a:extLst>
+              <a:ext uri="{28A0092B-C50C-407E-A947-70E740481C1C}">
+                <a14:useLocalDpi xmlns:a14="http://schemas.microsoft.com/office/drawing/2010/main" val="0"/>
+              </a:ext>
+            </a:extLst>
+          </a:blip>
+          <a:srcRect l="10532" r="10532"/>
+          <a:stretch>
+            <a:fillRect/>
+          </a:stretch>
+        </p:blipFill>
+        <p:spPr>
+          <a:xfrm>
+            <a:off x="119063" y="0"/>
+            <a:ext cx="5413375" cy="6858000"/>
+          </a:xfrm>
+        </p:spPr>
+      </p:pic>
     </p:spTree>
     <p:extLst>
       <p:ext uri="{BB962C8B-B14F-4D97-AF65-F5344CB8AC3E}">
-        <p14:creationId xmlns:p14="http://schemas.microsoft.com/office/powerpoint/2010/main" val="1803766686"/>
+        <p14:creationId xmlns:p14="http://schemas.microsoft.com/office/powerpoint/2010/main" val="4031217866"/>
       </p:ext>
     </p:extLst>
   </p:cSld>
@@ -35302,7 +31707,7 @@
 </p:sld>
 </file>
 
-<file path=ppt/slides/slide22.xml><?xml version="1.0" encoding="utf-8"?>
+<file path=ppt/slides/slide20.xml><?xml version="1.0" encoding="utf-8"?>
 <p:sld xmlns:a="http://schemas.openxmlformats.org/drawingml/2006/main" xmlns:r="http://schemas.openxmlformats.org/officeDocument/2006/relationships" xmlns:p="http://schemas.openxmlformats.org/presentationml/2006/main">
   <p:cSld>
     <p:spTree>
@@ -35398,7 +31803,7 @@
 </p:sld>
 </file>
 
-<file path=ppt/slides/slide23.xml><?xml version="1.0" encoding="utf-8"?>
+<file path=ppt/slides/slide21.xml><?xml version="1.0" encoding="utf-8"?>
 <p:sld xmlns:a="http://schemas.openxmlformats.org/drawingml/2006/main" xmlns:r="http://schemas.openxmlformats.org/officeDocument/2006/relationships" xmlns:p="http://schemas.openxmlformats.org/presentationml/2006/main">
   <p:cSld>
     <p:spTree>
@@ -35558,7 +31963,7 @@
 </p:sld>
 </file>
 
-<file path=ppt/slides/slide24.xml><?xml version="1.0" encoding="utf-8"?>
+<file path=ppt/slides/slide22.xml><?xml version="1.0" encoding="utf-8"?>
 <p:sld xmlns:a="http://schemas.openxmlformats.org/drawingml/2006/main" xmlns:r="http://schemas.openxmlformats.org/officeDocument/2006/relationships" xmlns:p="http://schemas.openxmlformats.org/presentationml/2006/main">
   <p:cSld>
     <p:spTree>
@@ -35929,7 +32334,7 @@
 </p:sld>
 </file>
 
-<file path=ppt/slides/slide25.xml><?xml version="1.0" encoding="utf-8"?>
+<file path=ppt/slides/slide23.xml><?xml version="1.0" encoding="utf-8"?>
 <p:sld xmlns:a="http://schemas.openxmlformats.org/drawingml/2006/main" xmlns:r="http://schemas.openxmlformats.org/officeDocument/2006/relationships" xmlns:p="http://schemas.openxmlformats.org/presentationml/2006/main">
   <p:cSld>
     <p:spTree>
@@ -36021,7 +32426,7 @@
 </p:sld>
 </file>
 
-<file path=ppt/slides/slide26.xml><?xml version="1.0" encoding="utf-8"?>
+<file path=ppt/slides/slide24.xml><?xml version="1.0" encoding="utf-8"?>
 <p:sld xmlns:a="http://schemas.openxmlformats.org/drawingml/2006/main" xmlns:r="http://schemas.openxmlformats.org/officeDocument/2006/relationships" xmlns:p="http://schemas.openxmlformats.org/presentationml/2006/main">
   <p:cSld>
     <p:spTree>
@@ -36181,7 +32586,7 @@
 </p:sld>
 </file>
 
-<file path=ppt/slides/slide27.xml><?xml version="1.0" encoding="utf-8"?>
+<file path=ppt/slides/slide25.xml><?xml version="1.0" encoding="utf-8"?>
 <p:sld xmlns:a="http://schemas.openxmlformats.org/drawingml/2006/main" xmlns:r="http://schemas.openxmlformats.org/officeDocument/2006/relationships" xmlns:p="http://schemas.openxmlformats.org/presentationml/2006/main">
   <p:cSld>
     <p:spTree>
@@ -36317,312 +32722,1496 @@
       </p:grpSpPr>
       <p:sp>
         <p:nvSpPr>
-          <p:cNvPr id="5" name="Title 4">
-            <a:extLst>
-              <a:ext uri="{FF2B5EF4-FFF2-40B4-BE49-F238E27FC236}">
-                <a16:creationId xmlns:a16="http://schemas.microsoft.com/office/drawing/2014/main" id="{A052CA08-BFB4-E89B-4D92-B77BCC2B40CA}"/>
-              </a:ext>
-            </a:extLst>
-          </p:cNvPr>
-          <p:cNvSpPr>
-            <a:spLocks noGrp="1"/>
-          </p:cNvSpPr>
-          <p:nvPr>
-            <p:ph type="title"/>
-          </p:nvPr>
+          <p:cNvPr id="2" name="Rectangle 1"/>
+          <p:cNvSpPr/>
+          <p:nvPr/>
         </p:nvSpPr>
         <p:spPr>
           <a:xfrm>
-            <a:off x="5970589" y="131546"/>
-            <a:ext cx="5664198" cy="863023"/>
+            <a:off x="0" y="0"/>
+            <a:ext cx="12191695" cy="137160"/>
           </a:xfrm>
+          <a:prstGeom prst="rect">
+            <a:avLst/>
+          </a:prstGeom>
+          <a:solidFill>
+            <a:srgbClr val="005596"/>
+          </a:solidFill>
+          <a:ln>
+            <a:noFill/>
+          </a:ln>
         </p:spPr>
-        <p:txBody>
-          <a:bodyPr>
-            <a:normAutofit fontScale="90000"/>
+        <p:style>
+          <a:lnRef idx="1">
+            <a:schemeClr val="accent1"/>
+          </a:lnRef>
+          <a:fillRef idx="3">
+            <a:schemeClr val="accent1"/>
+          </a:fillRef>
+          <a:effectRef idx="2">
+            <a:schemeClr val="accent1"/>
+          </a:effectRef>
+          <a:fontRef idx="minor">
+            <a:schemeClr val="lt1"/>
+          </a:fontRef>
+        </p:style>
+        <p:txBody>
+          <a:bodyPr rtlCol="0" anchor="ctr"/>
+          <a:lstStyle/>
+          <a:p>
+            <a:pPr algn="ctr"/>
+            <a:endParaRPr/>
+          </a:p>
+        </p:txBody>
+      </p:sp>
+      <p:sp>
+        <p:nvSpPr>
+          <p:cNvPr id="3" name="TextBox 2"/>
+          <p:cNvSpPr txBox="1"/>
+          <p:nvPr/>
+        </p:nvSpPr>
+        <p:spPr>
+          <a:xfrm>
+            <a:off x="457200" y="365760"/>
+            <a:ext cx="10972800" cy="584775"/>
+          </a:xfrm>
+          <a:prstGeom prst="rect">
+            <a:avLst/>
+          </a:prstGeom>
+          <a:noFill/>
+        </p:spPr>
+        <p:txBody>
+          <a:bodyPr wrap="square">
+            <a:spAutoFit/>
           </a:bodyPr>
           <a:lstStyle/>
           <a:p>
+            <a:pPr algn="l">
+              <a:defRPr sz="3200" b="1">
+                <a:solidFill>
+                  <a:srgbClr val="005596"/>
+                </a:solidFill>
+                <a:latin typeface="Arial"/>
+              </a:defRPr>
+            </a:pPr>
             <a:r>
               <a:rPr lang="en-US" dirty="0"/>
-              <a:t>Tim Rayburn</a:t>
-            </a:r>
-          </a:p>
-        </p:txBody>
-      </p:sp>
-      <p:sp>
-        <p:nvSpPr>
-          <p:cNvPr id="6" name="Content Placeholder 5">
-            <a:extLst>
-              <a:ext uri="{FF2B5EF4-FFF2-40B4-BE49-F238E27FC236}">
-                <a16:creationId xmlns:a16="http://schemas.microsoft.com/office/drawing/2014/main" id="{48FF2279-58EF-0FFD-23EC-F46B5F9C650B}"/>
-              </a:ext>
-            </a:extLst>
-          </p:cNvPr>
-          <p:cNvSpPr>
-            <a:spLocks noGrp="1"/>
-          </p:cNvSpPr>
-          <p:nvPr>
-            <p:ph sz="quarter" idx="13"/>
-          </p:nvPr>
+              <a:t>Where are you today?</a:t>
+            </a:r>
+            <a:endParaRPr dirty="0"/>
+          </a:p>
+        </p:txBody>
+      </p:sp>
+      <p:sp>
+        <p:nvSpPr>
+          <p:cNvPr id="4" name="Rectangle 3"/>
+          <p:cNvSpPr/>
+          <p:nvPr/>
         </p:nvSpPr>
         <p:spPr>
           <a:xfrm>
-            <a:off x="5785980" y="994569"/>
-            <a:ext cx="6351199" cy="5597005"/>
+            <a:off x="365760" y="5223053"/>
+            <a:ext cx="1371600" cy="457200"/>
           </a:xfrm>
+          <a:prstGeom prst="rect">
+            <a:avLst/>
+          </a:prstGeom>
+          <a:solidFill>
+            <a:srgbClr val="999999"/>
+          </a:solidFill>
+          <a:ln>
+            <a:noFill/>
+          </a:ln>
         </p:spPr>
-        <p:txBody>
-          <a:bodyPr anchor="t">
-            <a:normAutofit/>
+        <p:style>
+          <a:lnRef idx="1">
+            <a:schemeClr val="accent1"/>
+          </a:lnRef>
+          <a:fillRef idx="3">
+            <a:schemeClr val="accent1"/>
+          </a:fillRef>
+          <a:effectRef idx="2">
+            <a:schemeClr val="accent1"/>
+          </a:effectRef>
+          <a:fontRef idx="minor">
+            <a:schemeClr val="lt1"/>
+          </a:fontRef>
+        </p:style>
+        <p:txBody>
+          <a:bodyPr rtlCol="0" anchor="ctr"/>
+          <a:lstStyle/>
+          <a:p>
+            <a:pPr algn="ctr"/>
+            <a:endParaRPr/>
+          </a:p>
+        </p:txBody>
+      </p:sp>
+      <p:sp>
+        <p:nvSpPr>
+          <p:cNvPr id="5" name="Oval 4"/>
+          <p:cNvSpPr/>
+          <p:nvPr/>
+        </p:nvSpPr>
+        <p:spPr>
+          <a:xfrm>
+            <a:off x="822960" y="4903013"/>
+            <a:ext cx="457200" cy="457200"/>
+          </a:xfrm>
+          <a:prstGeom prst="ellipse">
+            <a:avLst/>
+          </a:prstGeom>
+          <a:solidFill>
+            <a:srgbClr val="999999"/>
+          </a:solidFill>
+          <a:ln>
+            <a:noFill/>
+          </a:ln>
+        </p:spPr>
+        <p:style>
+          <a:lnRef idx="1">
+            <a:schemeClr val="accent1"/>
+          </a:lnRef>
+          <a:fillRef idx="3">
+            <a:schemeClr val="accent1"/>
+          </a:fillRef>
+          <a:effectRef idx="2">
+            <a:schemeClr val="accent1"/>
+          </a:effectRef>
+          <a:fontRef idx="minor">
+            <a:schemeClr val="lt1"/>
+          </a:fontRef>
+        </p:style>
+        <p:txBody>
+          <a:bodyPr wrap="square" rtlCol="0" anchor="ctr"/>
+          <a:lstStyle/>
+          <a:p>
+            <a:pPr algn="ctr">
+              <a:defRPr sz="1400" b="1">
+                <a:solidFill>
+                  <a:srgbClr val="FFFFFF"/>
+                </a:solidFill>
+                <a:latin typeface="Arial"/>
+              </a:defRPr>
+            </a:pPr>
+            <a:r>
+              <a:t>1</a:t>
+            </a:r>
+          </a:p>
+        </p:txBody>
+      </p:sp>
+      <p:sp>
+        <p:nvSpPr>
+          <p:cNvPr id="6" name="TextBox 5"/>
+          <p:cNvSpPr txBox="1"/>
+          <p:nvPr/>
+        </p:nvSpPr>
+        <p:spPr>
+          <a:xfrm>
+            <a:off x="365760" y="5268773"/>
+            <a:ext cx="1371600" cy="365760"/>
+          </a:xfrm>
+          <a:prstGeom prst="rect">
+            <a:avLst/>
+          </a:prstGeom>
+          <a:noFill/>
+        </p:spPr>
+        <p:txBody>
+          <a:bodyPr wrap="square">
+            <a:spAutoFit/>
           </a:bodyPr>
           <a:lstStyle/>
           <a:p>
-            <a:r>
-              <a:rPr lang="en-US" dirty="0">
-                <a:latin typeface="Calibri" panose="020F0502020204030204" pitchFamily="34" charset="0"/>
-                <a:ea typeface="Calibri" panose="020F0502020204030204" pitchFamily="34" charset="0"/>
-                <a:cs typeface="Calibri" panose="020F0502020204030204" pitchFamily="34" charset="0"/>
-              </a:rPr>
-              <a:t>11-time </a:t>
-            </a:r>
-            <a:r>
-              <a:rPr lang="en-US" b="1" dirty="0">
-                <a:latin typeface="Calibri" panose="020F0502020204030204" pitchFamily="34" charset="0"/>
-                <a:ea typeface="Calibri" panose="020F0502020204030204" pitchFamily="34" charset="0"/>
-                <a:cs typeface="Calibri" panose="020F0502020204030204" pitchFamily="34" charset="0"/>
-              </a:rPr>
-              <a:t>Microsoft MVP </a:t>
-            </a:r>
-            <a:r>
-              <a:rPr lang="en-US" dirty="0">
-                <a:latin typeface="Calibri" panose="020F0502020204030204" pitchFamily="34" charset="0"/>
-                <a:ea typeface="Calibri" panose="020F0502020204030204" pitchFamily="34" charset="0"/>
-                <a:cs typeface="Calibri" panose="020F0502020204030204" pitchFamily="34" charset="0"/>
-              </a:rPr>
-              <a:t>(2007-2018)</a:t>
-            </a:r>
-          </a:p>
-          <a:p>
-            <a:r>
-              <a:rPr lang="en-US" b="1" dirty="0">
-                <a:latin typeface="Calibri" panose="020F0502020204030204" pitchFamily="34" charset="0"/>
-                <a:ea typeface="Calibri" panose="020F0502020204030204" pitchFamily="34" charset="0"/>
-                <a:cs typeface="Calibri" panose="020F0502020204030204" pitchFamily="34" charset="0"/>
-              </a:rPr>
-              <a:t>Open Source Maintainer</a:t>
-            </a:r>
-            <a:r>
-              <a:rPr lang="en-US" dirty="0">
-                <a:latin typeface="Calibri" panose="020F0502020204030204" pitchFamily="34" charset="0"/>
-                <a:ea typeface="Calibri" panose="020F0502020204030204" pitchFamily="34" charset="0"/>
-                <a:cs typeface="Calibri" panose="020F0502020204030204" pitchFamily="34" charset="0"/>
-              </a:rPr>
-              <a:t> for Highway Framework</a:t>
-            </a:r>
-          </a:p>
-          <a:p>
-            <a:r>
-              <a:rPr lang="en-US" b="1" dirty="0">
-                <a:latin typeface="Calibri" panose="020F0502020204030204" pitchFamily="34" charset="0"/>
-                <a:ea typeface="Calibri" panose="020F0502020204030204" pitchFamily="34" charset="0"/>
-                <a:cs typeface="Calibri" panose="020F0502020204030204" pitchFamily="34" charset="0"/>
-              </a:rPr>
-              <a:t>BBQ Fanatic </a:t>
-            </a:r>
-            <a:r>
-              <a:rPr lang="en-US" dirty="0">
-                <a:latin typeface="Calibri" panose="020F0502020204030204" pitchFamily="34" charset="0"/>
-                <a:ea typeface="Calibri" panose="020F0502020204030204" pitchFamily="34" charset="0"/>
-                <a:cs typeface="Calibri" panose="020F0502020204030204" pitchFamily="34" charset="0"/>
-              </a:rPr>
-              <a:t>– Feed over 200 people every July 4</a:t>
-            </a:r>
-            <a:r>
-              <a:rPr lang="en-US" baseline="30000" dirty="0">
-                <a:latin typeface="Calibri" panose="020F0502020204030204" pitchFamily="34" charset="0"/>
-                <a:ea typeface="Calibri" panose="020F0502020204030204" pitchFamily="34" charset="0"/>
-                <a:cs typeface="Calibri" panose="020F0502020204030204" pitchFamily="34" charset="0"/>
-              </a:rPr>
-              <a:t>th</a:t>
-            </a:r>
-            <a:r>
-              <a:rPr lang="en-US" dirty="0">
-                <a:latin typeface="Calibri" panose="020F0502020204030204" pitchFamily="34" charset="0"/>
-                <a:ea typeface="Calibri" panose="020F0502020204030204" pitchFamily="34" charset="0"/>
-                <a:cs typeface="Calibri" panose="020F0502020204030204" pitchFamily="34" charset="0"/>
-              </a:rPr>
-              <a:t> at the Improving Dallas office</a:t>
-            </a:r>
-          </a:p>
-          <a:p>
-            <a:r>
-              <a:rPr lang="en-US" b="1" dirty="0">
-                <a:latin typeface="Calibri" panose="020F0502020204030204" pitchFamily="34" charset="0"/>
-                <a:ea typeface="Calibri" panose="020F0502020204030204" pitchFamily="34" charset="0"/>
-                <a:cs typeface="Calibri" panose="020F0502020204030204" pitchFamily="34" charset="0"/>
-              </a:rPr>
-              <a:t>Soccer Fan </a:t>
-            </a:r>
-            <a:r>
-              <a:rPr lang="en-US" dirty="0">
-                <a:latin typeface="Calibri" panose="020F0502020204030204" pitchFamily="34" charset="0"/>
-                <a:ea typeface="Calibri" panose="020F0502020204030204" pitchFamily="34" charset="0"/>
-                <a:cs typeface="Calibri" panose="020F0502020204030204" pitchFamily="34" charset="0"/>
-              </a:rPr>
-              <a:t>– Season ticket holder for FC Dallas, Followed the USWNT through the World Cup playoff rounds in France (2019)</a:t>
-            </a:r>
-          </a:p>
-          <a:p>
-            <a:r>
-              <a:rPr lang="en-US" dirty="0">
-                <a:latin typeface="Calibri" panose="020F0502020204030204" pitchFamily="34" charset="0"/>
-                <a:ea typeface="Calibri" panose="020F0502020204030204" pitchFamily="34" charset="0"/>
-                <a:cs typeface="Calibri" panose="020F0502020204030204" pitchFamily="34" charset="0"/>
-              </a:rPr>
-              <a:t>Former </a:t>
-            </a:r>
-            <a:r>
-              <a:rPr lang="en-US" b="1" dirty="0">
-                <a:latin typeface="Calibri" panose="020F0502020204030204" pitchFamily="34" charset="0"/>
-                <a:ea typeface="Calibri" panose="020F0502020204030204" pitchFamily="34" charset="0"/>
-                <a:cs typeface="Calibri" panose="020F0502020204030204" pitchFamily="34" charset="0"/>
-              </a:rPr>
-              <a:t>Game Store Owner</a:t>
-            </a:r>
-          </a:p>
-          <a:p>
-            <a:r>
-              <a:rPr lang="en-US" dirty="0">
-                <a:latin typeface="Calibri" panose="020F0502020204030204" pitchFamily="34" charset="0"/>
-                <a:ea typeface="Calibri" panose="020F0502020204030204" pitchFamily="34" charset="0"/>
-                <a:cs typeface="Calibri" panose="020F0502020204030204" pitchFamily="34" charset="0"/>
-              </a:rPr>
-              <a:t>Avid </a:t>
-            </a:r>
-            <a:r>
-              <a:rPr lang="en-US" b="1" dirty="0">
-                <a:latin typeface="Calibri" panose="020F0502020204030204" pitchFamily="34" charset="0"/>
-                <a:ea typeface="Calibri" panose="020F0502020204030204" pitchFamily="34" charset="0"/>
-                <a:cs typeface="Calibri" panose="020F0502020204030204" pitchFamily="34" charset="0"/>
-              </a:rPr>
-              <a:t>Magic the Gathering </a:t>
-            </a:r>
-            <a:r>
-              <a:rPr lang="en-US" dirty="0">
-                <a:latin typeface="Calibri" panose="020F0502020204030204" pitchFamily="34" charset="0"/>
-                <a:ea typeface="Calibri" panose="020F0502020204030204" pitchFamily="34" charset="0"/>
-                <a:cs typeface="Calibri" panose="020F0502020204030204" pitchFamily="34" charset="0"/>
-              </a:rPr>
-              <a:t>player (Commander)</a:t>
-            </a:r>
-          </a:p>
-          <a:p>
-            <a:r>
-              <a:rPr lang="en-US" dirty="0">
-                <a:latin typeface="Calibri" panose="020F0502020204030204" pitchFamily="34" charset="0"/>
-                <a:ea typeface="Calibri" panose="020F0502020204030204" pitchFamily="34" charset="0"/>
-                <a:cs typeface="Calibri" panose="020F0502020204030204" pitchFamily="34" charset="0"/>
-              </a:rPr>
-              <a:t>Former</a:t>
-            </a:r>
-            <a:r>
-              <a:rPr lang="en-US" b="1" dirty="0">
-                <a:latin typeface="Calibri" panose="020F0502020204030204" pitchFamily="34" charset="0"/>
-                <a:ea typeface="Calibri" panose="020F0502020204030204" pitchFamily="34" charset="0"/>
-                <a:cs typeface="Calibri" panose="020F0502020204030204" pitchFamily="34" charset="0"/>
-              </a:rPr>
-              <a:t> D&amp;D Podcaster </a:t>
-            </a:r>
-            <a:r>
-              <a:rPr lang="en-US" dirty="0">
-                <a:latin typeface="Calibri" panose="020F0502020204030204" pitchFamily="34" charset="0"/>
-                <a:ea typeface="Calibri" panose="020F0502020204030204" pitchFamily="34" charset="0"/>
-                <a:cs typeface="Calibri" panose="020F0502020204030204" pitchFamily="34" charset="0"/>
-              </a:rPr>
-              <a:t>(Radio Free </a:t>
-            </a:r>
-            <a:r>
-              <a:rPr lang="en-US" dirty="0" err="1">
-                <a:latin typeface="Calibri" panose="020F0502020204030204" pitchFamily="34" charset="0"/>
-                <a:ea typeface="Calibri" panose="020F0502020204030204" pitchFamily="34" charset="0"/>
-                <a:cs typeface="Calibri" panose="020F0502020204030204" pitchFamily="34" charset="0"/>
-              </a:rPr>
-              <a:t>Hommlet</a:t>
-            </a:r>
-            <a:r>
-              <a:rPr lang="en-US" dirty="0">
-                <a:latin typeface="Calibri" panose="020F0502020204030204" pitchFamily="34" charset="0"/>
-                <a:ea typeface="Calibri" panose="020F0502020204030204" pitchFamily="34" charset="0"/>
-                <a:cs typeface="Calibri" panose="020F0502020204030204" pitchFamily="34" charset="0"/>
-              </a:rPr>
-              <a:t>)</a:t>
-            </a:r>
-          </a:p>
-          <a:p>
-            <a:r>
-              <a:rPr lang="en-US" b="1" dirty="0">
-                <a:latin typeface="Calibri" panose="020F0502020204030204" pitchFamily="34" charset="0"/>
-                <a:ea typeface="Calibri" panose="020F0502020204030204" pitchFamily="34" charset="0"/>
-                <a:cs typeface="Calibri" panose="020F0502020204030204" pitchFamily="34" charset="0"/>
-              </a:rPr>
-              <a:t>Drone Pilot</a:t>
-            </a:r>
-          </a:p>
-          <a:p>
-            <a:r>
-              <a:rPr lang="en-US" b="1" dirty="0">
-                <a:latin typeface="Calibri" panose="020F0502020204030204" pitchFamily="34" charset="0"/>
-                <a:ea typeface="Calibri" panose="020F0502020204030204" pitchFamily="34" charset="0"/>
-                <a:cs typeface="Calibri" panose="020F0502020204030204" pitchFamily="34" charset="0"/>
-              </a:rPr>
-              <a:t>Specialization is for Insects.</a:t>
-            </a:r>
-          </a:p>
-        </p:txBody>
-      </p:sp>
-      <p:pic>
-        <p:nvPicPr>
-          <p:cNvPr id="9" name="Content Placeholder 9" descr="A picture containing person, person, outdoor, standing&#10;&#10;Description automatically generated">
-            <a:extLst>
-              <a:ext uri="{FF2B5EF4-FFF2-40B4-BE49-F238E27FC236}">
-                <a16:creationId xmlns:a16="http://schemas.microsoft.com/office/drawing/2014/main" id="{8B421111-3E74-15D2-B0D7-5DF537E91BA1}"/>
-              </a:ext>
-            </a:extLst>
-          </p:cNvPr>
-          <p:cNvPicPr>
-            <a:picLocks noGrp="1" noChangeAspect="1"/>
-          </p:cNvPicPr>
-          <p:nvPr>
-            <p:ph type="pic" sz="quarter" idx="17"/>
-          </p:nvPr>
-        </p:nvPicPr>
-        <p:blipFill>
-          <a:blip r:embed="rId2">
-            <a:extLst>
-              <a:ext uri="{28A0092B-C50C-407E-A947-70E740481C1C}">
-                <a14:useLocalDpi xmlns:a14="http://schemas.microsoft.com/office/drawing/2010/main" val="0"/>
-              </a:ext>
-            </a:extLst>
-          </a:blip>
-          <a:srcRect l="10532" r="10532"/>
-          <a:stretch>
-            <a:fillRect/>
-          </a:stretch>
-        </p:blipFill>
+            <a:pPr algn="ctr">
+              <a:defRPr sz="1000" b="1">
+                <a:solidFill>
+                  <a:srgbClr val="FFFFFF"/>
+                </a:solidFill>
+                <a:latin typeface="Arial"/>
+              </a:defRPr>
+            </a:pPr>
+            <a:r>
+              <a:t>Zero AI</a:t>
+            </a:r>
+          </a:p>
+        </p:txBody>
+      </p:sp>
+      <p:sp>
+        <p:nvSpPr>
+          <p:cNvPr id="7" name="Rectangle 6"/>
+          <p:cNvSpPr/>
+          <p:nvPr/>
+        </p:nvSpPr>
         <p:spPr>
           <a:xfrm>
-            <a:off x="119063" y="0"/>
-            <a:ext cx="5413375" cy="6858000"/>
+            <a:off x="1810512" y="4811573"/>
+            <a:ext cx="1371600" cy="868680"/>
           </a:xfrm>
+          <a:prstGeom prst="rect">
+            <a:avLst/>
+          </a:prstGeom>
+          <a:solidFill>
+            <a:srgbClr val="999999"/>
+          </a:solidFill>
+          <a:ln>
+            <a:noFill/>
+          </a:ln>
         </p:spPr>
-      </p:pic>
+        <p:style>
+          <a:lnRef idx="1">
+            <a:schemeClr val="accent1"/>
+          </a:lnRef>
+          <a:fillRef idx="3">
+            <a:schemeClr val="accent1"/>
+          </a:fillRef>
+          <a:effectRef idx="2">
+            <a:schemeClr val="accent1"/>
+          </a:effectRef>
+          <a:fontRef idx="minor">
+            <a:schemeClr val="lt1"/>
+          </a:fontRef>
+        </p:style>
+        <p:txBody>
+          <a:bodyPr rtlCol="0" anchor="ctr"/>
+          <a:lstStyle/>
+          <a:p>
+            <a:pPr algn="ctr"/>
+            <a:endParaRPr/>
+          </a:p>
+        </p:txBody>
+      </p:sp>
+      <p:sp>
+        <p:nvSpPr>
+          <p:cNvPr id="8" name="Oval 7"/>
+          <p:cNvSpPr/>
+          <p:nvPr/>
+        </p:nvSpPr>
+        <p:spPr>
+          <a:xfrm>
+            <a:off x="2267712" y="4491533"/>
+            <a:ext cx="457200" cy="457200"/>
+          </a:xfrm>
+          <a:prstGeom prst="ellipse">
+            <a:avLst/>
+          </a:prstGeom>
+          <a:solidFill>
+            <a:srgbClr val="999999"/>
+          </a:solidFill>
+          <a:ln>
+            <a:noFill/>
+          </a:ln>
+        </p:spPr>
+        <p:style>
+          <a:lnRef idx="1">
+            <a:schemeClr val="accent1"/>
+          </a:lnRef>
+          <a:fillRef idx="3">
+            <a:schemeClr val="accent1"/>
+          </a:fillRef>
+          <a:effectRef idx="2">
+            <a:schemeClr val="accent1"/>
+          </a:effectRef>
+          <a:fontRef idx="minor">
+            <a:schemeClr val="lt1"/>
+          </a:fontRef>
+        </p:style>
+        <p:txBody>
+          <a:bodyPr wrap="square" rtlCol="0" anchor="ctr"/>
+          <a:lstStyle/>
+          <a:p>
+            <a:pPr algn="ctr">
+              <a:defRPr sz="1400" b="1">
+                <a:solidFill>
+                  <a:srgbClr val="FFFFFF"/>
+                </a:solidFill>
+                <a:latin typeface="Arial"/>
+              </a:defRPr>
+            </a:pPr>
+            <a:r>
+              <a:t>2</a:t>
+            </a:r>
+          </a:p>
+        </p:txBody>
+      </p:sp>
+      <p:sp>
+        <p:nvSpPr>
+          <p:cNvPr id="9" name="TextBox 8"/>
+          <p:cNvSpPr txBox="1"/>
+          <p:nvPr/>
+        </p:nvSpPr>
+        <p:spPr>
+          <a:xfrm>
+            <a:off x="1810512" y="4857293"/>
+            <a:ext cx="1371600" cy="246221"/>
+          </a:xfrm>
+          <a:prstGeom prst="rect">
+            <a:avLst/>
+          </a:prstGeom>
+          <a:noFill/>
+        </p:spPr>
+        <p:txBody>
+          <a:bodyPr wrap="square">
+            <a:spAutoFit/>
+          </a:bodyPr>
+          <a:lstStyle/>
+          <a:p>
+            <a:pPr algn="ctr">
+              <a:defRPr sz="1000" b="1">
+                <a:solidFill>
+                  <a:srgbClr val="FFFFFF"/>
+                </a:solidFill>
+                <a:latin typeface="Arial"/>
+              </a:defRPr>
+            </a:pPr>
+            <a:r>
+              <a:rPr lang="en-US"/>
+              <a:t>Off the shelf</a:t>
+            </a:r>
+            <a:endParaRPr/>
+          </a:p>
+        </p:txBody>
+      </p:sp>
+      <p:sp>
+        <p:nvSpPr>
+          <p:cNvPr id="10" name="Rectangle 9"/>
+          <p:cNvSpPr/>
+          <p:nvPr/>
+        </p:nvSpPr>
+        <p:spPr>
+          <a:xfrm>
+            <a:off x="3255264" y="4400093"/>
+            <a:ext cx="1371600" cy="1280160"/>
+          </a:xfrm>
+          <a:prstGeom prst="rect">
+            <a:avLst/>
+          </a:prstGeom>
+          <a:solidFill>
+            <a:srgbClr val="4597D3"/>
+          </a:solidFill>
+          <a:ln>
+            <a:noFill/>
+          </a:ln>
+        </p:spPr>
+        <p:style>
+          <a:lnRef idx="1">
+            <a:schemeClr val="accent1"/>
+          </a:lnRef>
+          <a:fillRef idx="3">
+            <a:schemeClr val="accent1"/>
+          </a:fillRef>
+          <a:effectRef idx="2">
+            <a:schemeClr val="accent1"/>
+          </a:effectRef>
+          <a:fontRef idx="minor">
+            <a:schemeClr val="lt1"/>
+          </a:fontRef>
+        </p:style>
+        <p:txBody>
+          <a:bodyPr rtlCol="0" anchor="ctr"/>
+          <a:lstStyle/>
+          <a:p>
+            <a:pPr algn="ctr"/>
+            <a:endParaRPr/>
+          </a:p>
+        </p:txBody>
+      </p:sp>
+      <p:sp>
+        <p:nvSpPr>
+          <p:cNvPr id="11" name="Oval 10"/>
+          <p:cNvSpPr/>
+          <p:nvPr/>
+        </p:nvSpPr>
+        <p:spPr>
+          <a:xfrm>
+            <a:off x="3712464" y="4080053"/>
+            <a:ext cx="457200" cy="457200"/>
+          </a:xfrm>
+          <a:prstGeom prst="ellipse">
+            <a:avLst/>
+          </a:prstGeom>
+          <a:solidFill>
+            <a:srgbClr val="4597D3"/>
+          </a:solidFill>
+          <a:ln>
+            <a:noFill/>
+          </a:ln>
+        </p:spPr>
+        <p:style>
+          <a:lnRef idx="1">
+            <a:schemeClr val="accent1"/>
+          </a:lnRef>
+          <a:fillRef idx="3">
+            <a:schemeClr val="accent1"/>
+          </a:fillRef>
+          <a:effectRef idx="2">
+            <a:schemeClr val="accent1"/>
+          </a:effectRef>
+          <a:fontRef idx="minor">
+            <a:schemeClr val="lt1"/>
+          </a:fontRef>
+        </p:style>
+        <p:txBody>
+          <a:bodyPr wrap="square" rtlCol="0" anchor="ctr"/>
+          <a:lstStyle/>
+          <a:p>
+            <a:pPr algn="ctr">
+              <a:defRPr sz="1400" b="1">
+                <a:solidFill>
+                  <a:srgbClr val="FFFFFF"/>
+                </a:solidFill>
+                <a:latin typeface="Arial"/>
+              </a:defRPr>
+            </a:pPr>
+            <a:r>
+              <a:t>3</a:t>
+            </a:r>
+          </a:p>
+        </p:txBody>
+      </p:sp>
+      <p:sp>
+        <p:nvSpPr>
+          <p:cNvPr id="12" name="TextBox 11"/>
+          <p:cNvSpPr txBox="1"/>
+          <p:nvPr/>
+        </p:nvSpPr>
+        <p:spPr>
+          <a:xfrm>
+            <a:off x="3255264" y="4445813"/>
+            <a:ext cx="1371600" cy="246221"/>
+          </a:xfrm>
+          <a:prstGeom prst="rect">
+            <a:avLst/>
+          </a:prstGeom>
+          <a:noFill/>
+        </p:spPr>
+        <p:txBody>
+          <a:bodyPr wrap="square">
+            <a:spAutoFit/>
+          </a:bodyPr>
+          <a:lstStyle/>
+          <a:p>
+            <a:pPr algn="ctr">
+              <a:defRPr sz="1000" b="1">
+                <a:solidFill>
+                  <a:srgbClr val="FFFFFF"/>
+                </a:solidFill>
+                <a:latin typeface="Arial"/>
+              </a:defRPr>
+            </a:pPr>
+            <a:r>
+              <a:rPr lang="en-US"/>
+              <a:t>Task</a:t>
+            </a:r>
+            <a:endParaRPr/>
+          </a:p>
+        </p:txBody>
+      </p:sp>
+      <p:sp>
+        <p:nvSpPr>
+          <p:cNvPr id="13" name="Rectangle 12"/>
+          <p:cNvSpPr/>
+          <p:nvPr/>
+        </p:nvSpPr>
+        <p:spPr>
+          <a:xfrm>
+            <a:off x="4700016" y="3988613"/>
+            <a:ext cx="1371600" cy="1691640"/>
+          </a:xfrm>
+          <a:prstGeom prst="rect">
+            <a:avLst/>
+          </a:prstGeom>
+          <a:solidFill>
+            <a:srgbClr val="4597D3"/>
+          </a:solidFill>
+          <a:ln>
+            <a:noFill/>
+          </a:ln>
+        </p:spPr>
+        <p:style>
+          <a:lnRef idx="1">
+            <a:schemeClr val="accent1"/>
+          </a:lnRef>
+          <a:fillRef idx="3">
+            <a:schemeClr val="accent1"/>
+          </a:fillRef>
+          <a:effectRef idx="2">
+            <a:schemeClr val="accent1"/>
+          </a:effectRef>
+          <a:fontRef idx="minor">
+            <a:schemeClr val="lt1"/>
+          </a:fontRef>
+        </p:style>
+        <p:txBody>
+          <a:bodyPr rtlCol="0" anchor="ctr"/>
+          <a:lstStyle/>
+          <a:p>
+            <a:pPr algn="ctr"/>
+            <a:endParaRPr/>
+          </a:p>
+        </p:txBody>
+      </p:sp>
+      <p:sp>
+        <p:nvSpPr>
+          <p:cNvPr id="14" name="Oval 13"/>
+          <p:cNvSpPr/>
+          <p:nvPr/>
+        </p:nvSpPr>
+        <p:spPr>
+          <a:xfrm>
+            <a:off x="5157216" y="3668573"/>
+            <a:ext cx="457200" cy="457200"/>
+          </a:xfrm>
+          <a:prstGeom prst="ellipse">
+            <a:avLst/>
+          </a:prstGeom>
+          <a:solidFill>
+            <a:srgbClr val="4597D3"/>
+          </a:solidFill>
+          <a:ln>
+            <a:noFill/>
+          </a:ln>
+        </p:spPr>
+        <p:style>
+          <a:lnRef idx="1">
+            <a:schemeClr val="accent1"/>
+          </a:lnRef>
+          <a:fillRef idx="3">
+            <a:schemeClr val="accent1"/>
+          </a:fillRef>
+          <a:effectRef idx="2">
+            <a:schemeClr val="accent1"/>
+          </a:effectRef>
+          <a:fontRef idx="minor">
+            <a:schemeClr val="lt1"/>
+          </a:fontRef>
+        </p:style>
+        <p:txBody>
+          <a:bodyPr wrap="square" rtlCol="0" anchor="ctr"/>
+          <a:lstStyle/>
+          <a:p>
+            <a:pPr algn="ctr">
+              <a:defRPr sz="1400" b="1">
+                <a:solidFill>
+                  <a:srgbClr val="FFFFFF"/>
+                </a:solidFill>
+                <a:latin typeface="Arial"/>
+              </a:defRPr>
+            </a:pPr>
+            <a:r>
+              <a:t>4</a:t>
+            </a:r>
+          </a:p>
+        </p:txBody>
+      </p:sp>
+      <p:sp>
+        <p:nvSpPr>
+          <p:cNvPr id="15" name="TextBox 14"/>
+          <p:cNvSpPr txBox="1"/>
+          <p:nvPr/>
+        </p:nvSpPr>
+        <p:spPr>
+          <a:xfrm>
+            <a:off x="4700016" y="4034333"/>
+            <a:ext cx="1371600" cy="246221"/>
+          </a:xfrm>
+          <a:prstGeom prst="rect">
+            <a:avLst/>
+          </a:prstGeom>
+          <a:noFill/>
+        </p:spPr>
+        <p:txBody>
+          <a:bodyPr wrap="square">
+            <a:spAutoFit/>
+          </a:bodyPr>
+          <a:lstStyle/>
+          <a:p>
+            <a:pPr algn="ctr">
+              <a:defRPr sz="1000" b="1">
+                <a:solidFill>
+                  <a:srgbClr val="FFFFFF"/>
+                </a:solidFill>
+                <a:latin typeface="Arial"/>
+              </a:defRPr>
+            </a:pPr>
+            <a:r>
+              <a:t>W</a:t>
+            </a:r>
+            <a:r>
+              <a:rPr lang="en-US"/>
+              <a:t>orkflow</a:t>
+            </a:r>
+            <a:endParaRPr/>
+          </a:p>
+        </p:txBody>
+      </p:sp>
+      <p:sp>
+        <p:nvSpPr>
+          <p:cNvPr id="16" name="Rectangle 15"/>
+          <p:cNvSpPr/>
+          <p:nvPr/>
+        </p:nvSpPr>
+        <p:spPr>
+          <a:xfrm>
+            <a:off x="6144768" y="3577133"/>
+            <a:ext cx="1371600" cy="2103120"/>
+          </a:xfrm>
+          <a:prstGeom prst="rect">
+            <a:avLst/>
+          </a:prstGeom>
+          <a:solidFill>
+            <a:srgbClr val="5BC2A7"/>
+          </a:solidFill>
+          <a:ln>
+            <a:noFill/>
+          </a:ln>
+        </p:spPr>
+        <p:style>
+          <a:lnRef idx="1">
+            <a:schemeClr val="accent1"/>
+          </a:lnRef>
+          <a:fillRef idx="3">
+            <a:schemeClr val="accent1"/>
+          </a:fillRef>
+          <a:effectRef idx="2">
+            <a:schemeClr val="accent1"/>
+          </a:effectRef>
+          <a:fontRef idx="minor">
+            <a:schemeClr val="lt1"/>
+          </a:fontRef>
+        </p:style>
+        <p:txBody>
+          <a:bodyPr rtlCol="0" anchor="ctr"/>
+          <a:lstStyle/>
+          <a:p>
+            <a:pPr algn="ctr"/>
+            <a:endParaRPr/>
+          </a:p>
+        </p:txBody>
+      </p:sp>
+      <p:sp>
+        <p:nvSpPr>
+          <p:cNvPr id="17" name="Oval 16"/>
+          <p:cNvSpPr/>
+          <p:nvPr/>
+        </p:nvSpPr>
+        <p:spPr>
+          <a:xfrm>
+            <a:off x="6601968" y="3257093"/>
+            <a:ext cx="457200" cy="457200"/>
+          </a:xfrm>
+          <a:prstGeom prst="ellipse">
+            <a:avLst/>
+          </a:prstGeom>
+          <a:solidFill>
+            <a:srgbClr val="5BC2A7"/>
+          </a:solidFill>
+          <a:ln>
+            <a:noFill/>
+          </a:ln>
+        </p:spPr>
+        <p:style>
+          <a:lnRef idx="1">
+            <a:schemeClr val="accent1"/>
+          </a:lnRef>
+          <a:fillRef idx="3">
+            <a:schemeClr val="accent1"/>
+          </a:fillRef>
+          <a:effectRef idx="2">
+            <a:schemeClr val="accent1"/>
+          </a:effectRef>
+          <a:fontRef idx="minor">
+            <a:schemeClr val="lt1"/>
+          </a:fontRef>
+        </p:style>
+        <p:txBody>
+          <a:bodyPr wrap="square" rtlCol="0" anchor="ctr"/>
+          <a:lstStyle/>
+          <a:p>
+            <a:pPr algn="ctr">
+              <a:defRPr sz="1400" b="1">
+                <a:solidFill>
+                  <a:srgbClr val="FFFFFF"/>
+                </a:solidFill>
+                <a:latin typeface="Arial"/>
+              </a:defRPr>
+            </a:pPr>
+            <a:r>
+              <a:t>5</a:t>
+            </a:r>
+          </a:p>
+        </p:txBody>
+      </p:sp>
+      <p:sp>
+        <p:nvSpPr>
+          <p:cNvPr id="18" name="TextBox 17"/>
+          <p:cNvSpPr txBox="1"/>
+          <p:nvPr/>
+        </p:nvSpPr>
+        <p:spPr>
+          <a:xfrm>
+            <a:off x="6144768" y="3622853"/>
+            <a:ext cx="1371600" cy="246221"/>
+          </a:xfrm>
+          <a:prstGeom prst="rect">
+            <a:avLst/>
+          </a:prstGeom>
+          <a:noFill/>
+        </p:spPr>
+        <p:txBody>
+          <a:bodyPr wrap="square">
+            <a:spAutoFit/>
+          </a:bodyPr>
+          <a:lstStyle/>
+          <a:p>
+            <a:pPr algn="ctr">
+              <a:defRPr sz="1000" b="1">
+                <a:solidFill>
+                  <a:srgbClr val="FFFFFF"/>
+                </a:solidFill>
+                <a:latin typeface="Arial"/>
+              </a:defRPr>
+            </a:pPr>
+            <a:r>
+              <a:rPr lang="en-US"/>
+              <a:t>Delegate</a:t>
+            </a:r>
+            <a:endParaRPr/>
+          </a:p>
+        </p:txBody>
+      </p:sp>
+      <p:sp>
+        <p:nvSpPr>
+          <p:cNvPr id="20" name="Rectangle 19"/>
+          <p:cNvSpPr/>
+          <p:nvPr/>
+        </p:nvSpPr>
+        <p:spPr>
+          <a:xfrm>
+            <a:off x="7589520" y="3165653"/>
+            <a:ext cx="1371600" cy="2514600"/>
+          </a:xfrm>
+          <a:prstGeom prst="rect">
+            <a:avLst/>
+          </a:prstGeom>
+          <a:solidFill>
+            <a:srgbClr val="5BC2A7"/>
+          </a:solidFill>
+          <a:ln>
+            <a:noFill/>
+          </a:ln>
+        </p:spPr>
+        <p:style>
+          <a:lnRef idx="1">
+            <a:schemeClr val="accent1"/>
+          </a:lnRef>
+          <a:fillRef idx="3">
+            <a:schemeClr val="accent1"/>
+          </a:fillRef>
+          <a:effectRef idx="2">
+            <a:schemeClr val="accent1"/>
+          </a:effectRef>
+          <a:fontRef idx="minor">
+            <a:schemeClr val="lt1"/>
+          </a:fontRef>
+        </p:style>
+        <p:txBody>
+          <a:bodyPr rtlCol="0" anchor="ctr"/>
+          <a:lstStyle/>
+          <a:p>
+            <a:pPr algn="ctr"/>
+            <a:endParaRPr/>
+          </a:p>
+        </p:txBody>
+      </p:sp>
+      <p:sp>
+        <p:nvSpPr>
+          <p:cNvPr id="21" name="Oval 20"/>
+          <p:cNvSpPr/>
+          <p:nvPr/>
+        </p:nvSpPr>
+        <p:spPr>
+          <a:xfrm>
+            <a:off x="8046720" y="2845613"/>
+            <a:ext cx="457200" cy="457200"/>
+          </a:xfrm>
+          <a:prstGeom prst="ellipse">
+            <a:avLst/>
+          </a:prstGeom>
+          <a:solidFill>
+            <a:srgbClr val="5BC2A7"/>
+          </a:solidFill>
+          <a:ln>
+            <a:noFill/>
+          </a:ln>
+        </p:spPr>
+        <p:style>
+          <a:lnRef idx="1">
+            <a:schemeClr val="accent1"/>
+          </a:lnRef>
+          <a:fillRef idx="3">
+            <a:schemeClr val="accent1"/>
+          </a:fillRef>
+          <a:effectRef idx="2">
+            <a:schemeClr val="accent1"/>
+          </a:effectRef>
+          <a:fontRef idx="minor">
+            <a:schemeClr val="lt1"/>
+          </a:fontRef>
+        </p:style>
+        <p:txBody>
+          <a:bodyPr wrap="square" rtlCol="0" anchor="ctr"/>
+          <a:lstStyle/>
+          <a:p>
+            <a:pPr algn="ctr">
+              <a:defRPr sz="1400" b="1">
+                <a:solidFill>
+                  <a:srgbClr val="FFFFFF"/>
+                </a:solidFill>
+                <a:latin typeface="Arial"/>
+              </a:defRPr>
+            </a:pPr>
+            <a:r>
+              <a:t>6</a:t>
+            </a:r>
+          </a:p>
+        </p:txBody>
+      </p:sp>
+      <p:sp>
+        <p:nvSpPr>
+          <p:cNvPr id="22" name="TextBox 21"/>
+          <p:cNvSpPr txBox="1"/>
+          <p:nvPr/>
+        </p:nvSpPr>
+        <p:spPr>
+          <a:xfrm>
+            <a:off x="7589520" y="3211373"/>
+            <a:ext cx="1371600" cy="246221"/>
+          </a:xfrm>
+          <a:prstGeom prst="rect">
+            <a:avLst/>
+          </a:prstGeom>
+          <a:noFill/>
+        </p:spPr>
+        <p:txBody>
+          <a:bodyPr wrap="square">
+            <a:spAutoFit/>
+          </a:bodyPr>
+          <a:lstStyle/>
+          <a:p>
+            <a:pPr algn="ctr">
+              <a:defRPr sz="1000" b="1">
+                <a:solidFill>
+                  <a:srgbClr val="FFFFFF"/>
+                </a:solidFill>
+                <a:latin typeface="Arial"/>
+              </a:defRPr>
+            </a:pPr>
+            <a:r>
+              <a:rPr lang="en-US"/>
+              <a:t>Coordinate</a:t>
+            </a:r>
+            <a:endParaRPr/>
+          </a:p>
+        </p:txBody>
+      </p:sp>
+      <p:sp>
+        <p:nvSpPr>
+          <p:cNvPr id="24" name="Rectangle 23"/>
+          <p:cNvSpPr/>
+          <p:nvPr/>
+        </p:nvSpPr>
+        <p:spPr>
+          <a:xfrm>
+            <a:off x="9034272" y="2754173"/>
+            <a:ext cx="1371600" cy="2926080"/>
+          </a:xfrm>
+          <a:prstGeom prst="rect">
+            <a:avLst/>
+          </a:prstGeom>
+          <a:solidFill>
+            <a:srgbClr val="F5BB41"/>
+          </a:solidFill>
+          <a:ln>
+            <a:noFill/>
+          </a:ln>
+        </p:spPr>
+        <p:style>
+          <a:lnRef idx="1">
+            <a:schemeClr val="accent1"/>
+          </a:lnRef>
+          <a:fillRef idx="3">
+            <a:schemeClr val="accent1"/>
+          </a:fillRef>
+          <a:effectRef idx="2">
+            <a:schemeClr val="accent1"/>
+          </a:effectRef>
+          <a:fontRef idx="minor">
+            <a:schemeClr val="lt1"/>
+          </a:fontRef>
+        </p:style>
+        <p:txBody>
+          <a:bodyPr rtlCol="0" anchor="ctr"/>
+          <a:lstStyle/>
+          <a:p>
+            <a:pPr algn="ctr"/>
+            <a:endParaRPr/>
+          </a:p>
+        </p:txBody>
+      </p:sp>
+      <p:sp>
+        <p:nvSpPr>
+          <p:cNvPr id="25" name="Oval 24"/>
+          <p:cNvSpPr/>
+          <p:nvPr/>
+        </p:nvSpPr>
+        <p:spPr>
+          <a:xfrm>
+            <a:off x="9491472" y="2434133"/>
+            <a:ext cx="457200" cy="457200"/>
+          </a:xfrm>
+          <a:prstGeom prst="ellipse">
+            <a:avLst/>
+          </a:prstGeom>
+          <a:solidFill>
+            <a:srgbClr val="F5BB41"/>
+          </a:solidFill>
+          <a:ln>
+            <a:noFill/>
+          </a:ln>
+        </p:spPr>
+        <p:style>
+          <a:lnRef idx="1">
+            <a:schemeClr val="accent1"/>
+          </a:lnRef>
+          <a:fillRef idx="3">
+            <a:schemeClr val="accent1"/>
+          </a:fillRef>
+          <a:effectRef idx="2">
+            <a:schemeClr val="accent1"/>
+          </a:effectRef>
+          <a:fontRef idx="minor">
+            <a:schemeClr val="lt1"/>
+          </a:fontRef>
+        </p:style>
+        <p:txBody>
+          <a:bodyPr wrap="square" rtlCol="0" anchor="ctr"/>
+          <a:lstStyle/>
+          <a:p>
+            <a:pPr algn="ctr">
+              <a:defRPr sz="1400" b="1">
+                <a:solidFill>
+                  <a:srgbClr val="FFFFFF"/>
+                </a:solidFill>
+                <a:latin typeface="Arial"/>
+              </a:defRPr>
+            </a:pPr>
+            <a:r>
+              <a:t>7</a:t>
+            </a:r>
+          </a:p>
+        </p:txBody>
+      </p:sp>
+      <p:sp>
+        <p:nvSpPr>
+          <p:cNvPr id="26" name="TextBox 25"/>
+          <p:cNvSpPr txBox="1"/>
+          <p:nvPr/>
+        </p:nvSpPr>
+        <p:spPr>
+          <a:xfrm>
+            <a:off x="9034272" y="2799893"/>
+            <a:ext cx="1371600" cy="246221"/>
+          </a:xfrm>
+          <a:prstGeom prst="rect">
+            <a:avLst/>
+          </a:prstGeom>
+          <a:noFill/>
+        </p:spPr>
+        <p:txBody>
+          <a:bodyPr wrap="square">
+            <a:spAutoFit/>
+          </a:bodyPr>
+          <a:lstStyle/>
+          <a:p>
+            <a:pPr algn="ctr">
+              <a:defRPr sz="1000" b="1">
+                <a:solidFill>
+                  <a:srgbClr val="FFFFFF"/>
+                </a:solidFill>
+                <a:latin typeface="Arial"/>
+              </a:defRPr>
+            </a:pPr>
+            <a:r>
+              <a:rPr lang="en-US"/>
+              <a:t>Supervise</a:t>
+            </a:r>
+            <a:endParaRPr/>
+          </a:p>
+        </p:txBody>
+      </p:sp>
+      <p:sp>
+        <p:nvSpPr>
+          <p:cNvPr id="28" name="Rectangle 27"/>
+          <p:cNvSpPr/>
+          <p:nvPr/>
+        </p:nvSpPr>
+        <p:spPr>
+          <a:xfrm>
+            <a:off x="10479024" y="2342693"/>
+            <a:ext cx="1371600" cy="3337560"/>
+          </a:xfrm>
+          <a:prstGeom prst="rect">
+            <a:avLst/>
+          </a:prstGeom>
+          <a:solidFill>
+            <a:srgbClr val="F5BB41"/>
+          </a:solidFill>
+          <a:ln>
+            <a:noFill/>
+          </a:ln>
+        </p:spPr>
+        <p:style>
+          <a:lnRef idx="1">
+            <a:schemeClr val="accent1"/>
+          </a:lnRef>
+          <a:fillRef idx="3">
+            <a:schemeClr val="accent1"/>
+          </a:fillRef>
+          <a:effectRef idx="2">
+            <a:schemeClr val="accent1"/>
+          </a:effectRef>
+          <a:fontRef idx="minor">
+            <a:schemeClr val="lt1"/>
+          </a:fontRef>
+        </p:style>
+        <p:txBody>
+          <a:bodyPr rtlCol="0" anchor="ctr"/>
+          <a:lstStyle/>
+          <a:p>
+            <a:pPr algn="ctr"/>
+            <a:endParaRPr/>
+          </a:p>
+        </p:txBody>
+      </p:sp>
+      <p:sp>
+        <p:nvSpPr>
+          <p:cNvPr id="29" name="Oval 28"/>
+          <p:cNvSpPr/>
+          <p:nvPr/>
+        </p:nvSpPr>
+        <p:spPr>
+          <a:xfrm>
+            <a:off x="10936224" y="2022653"/>
+            <a:ext cx="457200" cy="457200"/>
+          </a:xfrm>
+          <a:prstGeom prst="ellipse">
+            <a:avLst/>
+          </a:prstGeom>
+          <a:solidFill>
+            <a:srgbClr val="F5BB41"/>
+          </a:solidFill>
+          <a:ln>
+            <a:noFill/>
+          </a:ln>
+        </p:spPr>
+        <p:style>
+          <a:lnRef idx="1">
+            <a:schemeClr val="accent1"/>
+          </a:lnRef>
+          <a:fillRef idx="3">
+            <a:schemeClr val="accent1"/>
+          </a:fillRef>
+          <a:effectRef idx="2">
+            <a:schemeClr val="accent1"/>
+          </a:effectRef>
+          <a:fontRef idx="minor">
+            <a:schemeClr val="lt1"/>
+          </a:fontRef>
+        </p:style>
+        <p:txBody>
+          <a:bodyPr wrap="square" rtlCol="0" anchor="ctr"/>
+          <a:lstStyle/>
+          <a:p>
+            <a:pPr algn="ctr">
+              <a:defRPr sz="1400" b="1">
+                <a:solidFill>
+                  <a:srgbClr val="FFFFFF"/>
+                </a:solidFill>
+                <a:latin typeface="Arial"/>
+              </a:defRPr>
+            </a:pPr>
+            <a:r>
+              <a:t>8</a:t>
+            </a:r>
+          </a:p>
+        </p:txBody>
+      </p:sp>
+      <p:sp>
+        <p:nvSpPr>
+          <p:cNvPr id="30" name="TextBox 29"/>
+          <p:cNvSpPr txBox="1"/>
+          <p:nvPr/>
+        </p:nvSpPr>
+        <p:spPr>
+          <a:xfrm>
+            <a:off x="10479024" y="2388413"/>
+            <a:ext cx="1371600" cy="246221"/>
+          </a:xfrm>
+          <a:prstGeom prst="rect">
+            <a:avLst/>
+          </a:prstGeom>
+          <a:noFill/>
+        </p:spPr>
+        <p:txBody>
+          <a:bodyPr wrap="square">
+            <a:spAutoFit/>
+          </a:bodyPr>
+          <a:lstStyle/>
+          <a:p>
+            <a:pPr algn="ctr">
+              <a:defRPr sz="1000" b="1">
+                <a:solidFill>
+                  <a:srgbClr val="FFFFFF"/>
+                </a:solidFill>
+                <a:latin typeface="Arial"/>
+              </a:defRPr>
+            </a:pPr>
+            <a:r>
+              <a:rPr lang="en-US"/>
+              <a:t>Orchestrate</a:t>
+            </a:r>
+            <a:endParaRPr/>
+          </a:p>
+        </p:txBody>
+      </p:sp>
+      <p:sp>
+        <p:nvSpPr>
+          <p:cNvPr id="32" name="Rectangle 31"/>
+          <p:cNvSpPr/>
+          <p:nvPr/>
+        </p:nvSpPr>
+        <p:spPr>
+          <a:xfrm>
+            <a:off x="365760" y="5863133"/>
+            <a:ext cx="2889504" cy="365760"/>
+          </a:xfrm>
+          <a:prstGeom prst="rect">
+            <a:avLst/>
+          </a:prstGeom>
+          <a:solidFill>
+            <a:srgbClr val="999999"/>
+          </a:solidFill>
+          <a:ln>
+            <a:noFill/>
+          </a:ln>
+        </p:spPr>
+        <p:style>
+          <a:lnRef idx="1">
+            <a:schemeClr val="accent1"/>
+          </a:lnRef>
+          <a:fillRef idx="3">
+            <a:schemeClr val="accent1"/>
+          </a:fillRef>
+          <a:effectRef idx="2">
+            <a:schemeClr val="accent1"/>
+          </a:effectRef>
+          <a:fontRef idx="minor">
+            <a:schemeClr val="lt1"/>
+          </a:fontRef>
+        </p:style>
+        <p:txBody>
+          <a:bodyPr wrap="square" rtlCol="0" anchor="ctr"/>
+          <a:lstStyle/>
+          <a:p>
+            <a:pPr algn="ctr">
+              <a:defRPr sz="1100" b="1">
+                <a:solidFill>
+                  <a:srgbClr val="FFFFFF"/>
+                </a:solidFill>
+                <a:latin typeface="Arial"/>
+              </a:defRPr>
+            </a:pPr>
+            <a:r>
+              <a:t>Wave 1: </a:t>
+            </a:r>
+            <a:r>
+              <a:rPr lang="en-US"/>
+              <a:t>Tools</a:t>
+            </a:r>
+            <a:endParaRPr/>
+          </a:p>
+        </p:txBody>
+      </p:sp>
+      <p:sp>
+        <p:nvSpPr>
+          <p:cNvPr id="33" name="Rectangle 32"/>
+          <p:cNvSpPr/>
+          <p:nvPr/>
+        </p:nvSpPr>
+        <p:spPr>
+          <a:xfrm>
+            <a:off x="3255264" y="5863133"/>
+            <a:ext cx="2889504" cy="365760"/>
+          </a:xfrm>
+          <a:prstGeom prst="rect">
+            <a:avLst/>
+          </a:prstGeom>
+          <a:solidFill>
+            <a:srgbClr val="4597D3"/>
+          </a:solidFill>
+          <a:ln>
+            <a:noFill/>
+          </a:ln>
+        </p:spPr>
+        <p:style>
+          <a:lnRef idx="1">
+            <a:schemeClr val="accent1"/>
+          </a:lnRef>
+          <a:fillRef idx="3">
+            <a:schemeClr val="accent1"/>
+          </a:fillRef>
+          <a:effectRef idx="2">
+            <a:schemeClr val="accent1"/>
+          </a:effectRef>
+          <a:fontRef idx="minor">
+            <a:schemeClr val="lt1"/>
+          </a:fontRef>
+        </p:style>
+        <p:txBody>
+          <a:bodyPr wrap="square" rtlCol="0" anchor="ctr"/>
+          <a:lstStyle/>
+          <a:p>
+            <a:pPr algn="ctr">
+              <a:defRPr sz="1100" b="1">
+                <a:solidFill>
+                  <a:srgbClr val="FFFFFF"/>
+                </a:solidFill>
+                <a:latin typeface="Arial"/>
+              </a:defRPr>
+            </a:pPr>
+            <a:r>
+              <a:t>Wave 2: </a:t>
+            </a:r>
+            <a:r>
+              <a:rPr lang="en-US"/>
+              <a:t>Process</a:t>
+            </a:r>
+            <a:endParaRPr/>
+          </a:p>
+        </p:txBody>
+      </p:sp>
+      <p:sp>
+        <p:nvSpPr>
+          <p:cNvPr id="34" name="Rectangle 33"/>
+          <p:cNvSpPr/>
+          <p:nvPr/>
+        </p:nvSpPr>
+        <p:spPr>
+          <a:xfrm>
+            <a:off x="6144768" y="5863133"/>
+            <a:ext cx="5669280" cy="365760"/>
+          </a:xfrm>
+          <a:prstGeom prst="rect">
+            <a:avLst/>
+          </a:prstGeom>
+          <a:gradFill flip="none" rotWithShape="1">
+            <a:gsLst>
+              <a:gs pos="0">
+                <a:srgbClr val="5BC2A7"/>
+              </a:gs>
+              <a:gs pos="50000">
+                <a:srgbClr val="5BC2A7">
+                  <a:tint val="44500"/>
+                  <a:satMod val="160000"/>
+                </a:srgbClr>
+              </a:gs>
+              <a:gs pos="100000">
+                <a:srgbClr val="F6BB40"/>
+              </a:gs>
+            </a:gsLst>
+            <a:lin ang="0" scaled="1"/>
+            <a:tileRect/>
+          </a:gradFill>
+          <a:ln>
+            <a:noFill/>
+          </a:ln>
+        </p:spPr>
+        <p:style>
+          <a:lnRef idx="1">
+            <a:schemeClr val="accent1"/>
+          </a:lnRef>
+          <a:fillRef idx="3">
+            <a:schemeClr val="accent1"/>
+          </a:fillRef>
+          <a:effectRef idx="2">
+            <a:schemeClr val="accent1"/>
+          </a:effectRef>
+          <a:fontRef idx="minor">
+            <a:schemeClr val="lt1"/>
+          </a:fontRef>
+        </p:style>
+        <p:txBody>
+          <a:bodyPr wrap="square" rtlCol="0" anchor="ctr"/>
+          <a:lstStyle/>
+          <a:p>
+            <a:pPr algn="ctr">
+              <a:defRPr sz="1100" b="1">
+                <a:solidFill>
+                  <a:srgbClr val="FFFFFF"/>
+                </a:solidFill>
+                <a:latin typeface="Arial"/>
+              </a:defRPr>
+            </a:pPr>
+            <a:r>
+              <a:t>Wave 3: Agentic Operations</a:t>
+            </a:r>
+          </a:p>
+        </p:txBody>
+      </p:sp>
+      <p:sp>
+        <p:nvSpPr>
+          <p:cNvPr id="35" name="TextBox 34"/>
+          <p:cNvSpPr txBox="1"/>
+          <p:nvPr/>
+        </p:nvSpPr>
+        <p:spPr>
+          <a:xfrm>
+            <a:off x="448056" y="6453031"/>
+            <a:ext cx="11247120" cy="274320"/>
+          </a:xfrm>
+          <a:prstGeom prst="rect">
+            <a:avLst/>
+          </a:prstGeom>
+          <a:noFill/>
+        </p:spPr>
+        <p:txBody>
+          <a:bodyPr wrap="square">
+            <a:spAutoFit/>
+          </a:bodyPr>
+          <a:lstStyle/>
+          <a:p>
+            <a:pPr algn="ctr">
+              <a:defRPr sz="1200" b="1">
+                <a:solidFill>
+                  <a:srgbClr val="333333"/>
+                </a:solidFill>
+                <a:latin typeface="Arial"/>
+              </a:defRPr>
+            </a:pPr>
+            <a:r>
+              <a:t>As trust increases, humans shift from doing to directing</a:t>
+            </a:r>
+          </a:p>
+        </p:txBody>
+      </p:sp>
+      <p:sp>
+        <p:nvSpPr>
+          <p:cNvPr id="19" name="Right Arrow 18">
+            <a:extLst>
+              <a:ext uri="{FF2B5EF4-FFF2-40B4-BE49-F238E27FC236}">
+                <a16:creationId xmlns:a16="http://schemas.microsoft.com/office/drawing/2014/main" id="{8F1492AA-30B9-C6E7-F18F-5CAD807B7D9A}"/>
+              </a:ext>
+            </a:extLst>
+          </p:cNvPr>
+          <p:cNvSpPr/>
+          <p:nvPr/>
+        </p:nvSpPr>
+        <p:spPr>
+          <a:xfrm>
+            <a:off x="365759" y="1560991"/>
+            <a:ext cx="5681473" cy="827422"/>
+          </a:xfrm>
+          <a:prstGeom prst="rightArrow">
+            <a:avLst/>
+          </a:prstGeom>
+        </p:spPr>
+        <p:style>
+          <a:lnRef idx="2">
+            <a:schemeClr val="accent1">
+              <a:shade val="15000"/>
+            </a:schemeClr>
+          </a:lnRef>
+          <a:fillRef idx="1">
+            <a:schemeClr val="accent1"/>
+          </a:fillRef>
+          <a:effectRef idx="0">
+            <a:schemeClr val="accent1"/>
+          </a:effectRef>
+          <a:fontRef idx="minor">
+            <a:schemeClr val="lt1"/>
+          </a:fontRef>
+        </p:style>
+        <p:txBody>
+          <a:bodyPr rtlCol="0" anchor="ctr"/>
+          <a:lstStyle/>
+          <a:p>
+            <a:pPr algn="ctr"/>
+            <a:r>
+              <a:rPr lang="en-US"/>
+              <a:t>Efficiency</a:t>
+            </a:r>
+          </a:p>
+        </p:txBody>
+      </p:sp>
+      <p:sp>
+        <p:nvSpPr>
+          <p:cNvPr id="23" name="Right Arrow 22">
+            <a:extLst>
+              <a:ext uri="{FF2B5EF4-FFF2-40B4-BE49-F238E27FC236}">
+                <a16:creationId xmlns:a16="http://schemas.microsoft.com/office/drawing/2014/main" id="{1ED4795D-99F7-C8C9-DEBC-84446724A381}"/>
+              </a:ext>
+            </a:extLst>
+          </p:cNvPr>
+          <p:cNvSpPr/>
+          <p:nvPr/>
+        </p:nvSpPr>
+        <p:spPr>
+          <a:xfrm>
+            <a:off x="6144768" y="942994"/>
+            <a:ext cx="5705856" cy="827422"/>
+          </a:xfrm>
+          <a:prstGeom prst="rightArrow">
+            <a:avLst/>
+          </a:prstGeom>
+          <a:solidFill>
+            <a:srgbClr val="F6BB40"/>
+          </a:solidFill>
+          <a:ln>
+            <a:solidFill>
+              <a:schemeClr val="accent3">
+                <a:lumMod val="75000"/>
+              </a:schemeClr>
+            </a:solidFill>
+          </a:ln>
+        </p:spPr>
+        <p:style>
+          <a:lnRef idx="2">
+            <a:schemeClr val="accent1">
+              <a:shade val="15000"/>
+            </a:schemeClr>
+          </a:lnRef>
+          <a:fillRef idx="1">
+            <a:schemeClr val="accent1"/>
+          </a:fillRef>
+          <a:effectRef idx="0">
+            <a:schemeClr val="accent1"/>
+          </a:effectRef>
+          <a:fontRef idx="minor">
+            <a:schemeClr val="lt1"/>
+          </a:fontRef>
+        </p:style>
+        <p:txBody>
+          <a:bodyPr rtlCol="0" anchor="ctr"/>
+          <a:lstStyle/>
+          <a:p>
+            <a:pPr algn="ctr"/>
+            <a:r>
+              <a:rPr lang="en-US"/>
+              <a:t>Productivity</a:t>
+            </a:r>
+          </a:p>
+        </p:txBody>
+      </p:sp>
     </p:spTree>
-    <p:extLst>
-      <p:ext uri="{BB962C8B-B14F-4D97-AF65-F5344CB8AC3E}">
-        <p14:creationId xmlns:p14="http://schemas.microsoft.com/office/powerpoint/2010/main" val="4031217866"/>
-      </p:ext>
-    </p:extLst>
   </p:cSld>
   <p:clrMapOvr>
     <a:masterClrMapping/>
@@ -36631,94 +34220,6 @@
 </file>
 
 <file path=ppt/slides/slide4.xml><?xml version="1.0" encoding="utf-8"?>
-<p:sld xmlns:a="http://schemas.openxmlformats.org/drawingml/2006/main" xmlns:r="http://schemas.openxmlformats.org/officeDocument/2006/relationships" xmlns:p="http://schemas.openxmlformats.org/presentationml/2006/main">
-  <p:cSld>
-    <p:spTree>
-      <p:nvGrpSpPr>
-        <p:cNvPr id="1" name=""/>
-        <p:cNvGrpSpPr/>
-        <p:nvPr/>
-      </p:nvGrpSpPr>
-      <p:grpSpPr>
-        <a:xfrm>
-          <a:off x="0" y="0"/>
-          <a:ext cx="0" cy="0"/>
-          <a:chOff x="0" y="0"/>
-          <a:chExt cx="0" cy="0"/>
-        </a:xfrm>
-      </p:grpSpPr>
-      <p:sp>
-        <p:nvSpPr>
-          <p:cNvPr id="3" name="Title 2">
-            <a:extLst>
-              <a:ext uri="{FF2B5EF4-FFF2-40B4-BE49-F238E27FC236}">
-                <a16:creationId xmlns:a16="http://schemas.microsoft.com/office/drawing/2014/main" id="{8E2640FC-A8D7-1747-9648-63C6CC0B29E0}"/>
-              </a:ext>
-            </a:extLst>
-          </p:cNvPr>
-          <p:cNvSpPr>
-            <a:spLocks noGrp="1"/>
-          </p:cNvSpPr>
-          <p:nvPr>
-            <p:ph type="title"/>
-          </p:nvPr>
-        </p:nvSpPr>
-        <p:spPr/>
-        <p:txBody>
-          <a:bodyPr>
-            <a:normAutofit/>
-          </a:bodyPr>
-          <a:lstStyle/>
-          <a:p>
-            <a:r>
-              <a:rPr lang="en-US" sz="6600" dirty="0"/>
-              <a:t>Where are you?</a:t>
-            </a:r>
-          </a:p>
-        </p:txBody>
-      </p:sp>
-      <p:graphicFrame>
-        <p:nvGraphicFramePr>
-          <p:cNvPr id="4" name="Diagram 3">
-            <a:extLst>
-              <a:ext uri="{FF2B5EF4-FFF2-40B4-BE49-F238E27FC236}">
-                <a16:creationId xmlns:a16="http://schemas.microsoft.com/office/drawing/2014/main" id="{5840EB01-98E8-5A5B-FEBD-6F1CD46C20E0}"/>
-              </a:ext>
-            </a:extLst>
-          </p:cNvPr>
-          <p:cNvGraphicFramePr/>
-          <p:nvPr>
-            <p:extLst>
-              <p:ext uri="{D42A27DB-BD31-4B8C-83A1-F6EECF244321}">
-                <p14:modId xmlns:p14="http://schemas.microsoft.com/office/powerpoint/2010/main" val="3702021942"/>
-              </p:ext>
-            </p:extLst>
-          </p:nvPr>
-        </p:nvGraphicFramePr>
-        <p:xfrm>
-          <a:off x="504749" y="1700784"/>
-          <a:ext cx="11141049" cy="4809744"/>
-        </p:xfrm>
-        <a:graphic>
-          <a:graphicData uri="http://schemas.openxmlformats.org/drawingml/2006/diagram">
-            <dgm:relIds xmlns:dgm="http://schemas.openxmlformats.org/drawingml/2006/diagram" xmlns:r="http://schemas.openxmlformats.org/officeDocument/2006/relationships" r:dm="rId2" r:lo="rId3" r:qs="rId4" r:cs="rId5"/>
-          </a:graphicData>
-        </a:graphic>
-      </p:graphicFrame>
-    </p:spTree>
-    <p:extLst>
-      <p:ext uri="{BB962C8B-B14F-4D97-AF65-F5344CB8AC3E}">
-        <p14:creationId xmlns:p14="http://schemas.microsoft.com/office/powerpoint/2010/main" val="1549688739"/>
-      </p:ext>
-    </p:extLst>
-  </p:cSld>
-  <p:clrMapOvr>
-    <a:masterClrMapping/>
-  </p:clrMapOvr>
-</p:sld>
-</file>
-
-<file path=ppt/slides/slide5.xml><?xml version="1.0" encoding="utf-8"?>
 <p:sld xmlns:a="http://schemas.openxmlformats.org/drawingml/2006/main" xmlns:r="http://schemas.openxmlformats.org/officeDocument/2006/relationships" xmlns:p="http://schemas.openxmlformats.org/presentationml/2006/main">
   <p:cSld>
     <p:spTree>
@@ -36878,7 +34379,7 @@
 </p:sld>
 </file>
 
-<file path=ppt/slides/slide6.xml><?xml version="1.0" encoding="utf-8"?>
+<file path=ppt/slides/slide5.xml><?xml version="1.0" encoding="utf-8"?>
 <p:sld xmlns:a="http://schemas.openxmlformats.org/drawingml/2006/main" xmlns:r="http://schemas.openxmlformats.org/officeDocument/2006/relationships" xmlns:p="http://schemas.openxmlformats.org/presentationml/2006/main">
   <p:cSld>
     <p:spTree>
@@ -37440,7 +34941,7 @@
 </p:sld>
 </file>
 
-<file path=ppt/slides/slide7.xml><?xml version="1.0" encoding="utf-8"?>
+<file path=ppt/slides/slide6.xml><?xml version="1.0" encoding="utf-8"?>
 <p:sld xmlns:a="http://schemas.openxmlformats.org/drawingml/2006/main" xmlns:r="http://schemas.openxmlformats.org/officeDocument/2006/relationships" xmlns:p="http://schemas.openxmlformats.org/presentationml/2006/main">
   <p:cSld>
     <p:spTree>
@@ -38017,7 +35518,7 @@
 </p:sld>
 </file>
 
-<file path=ppt/slides/slide8.xml><?xml version="1.0" encoding="utf-8"?>
+<file path=ppt/slides/slide7.xml><?xml version="1.0" encoding="utf-8"?>
 <p:sld xmlns:a="http://schemas.openxmlformats.org/drawingml/2006/main" xmlns:r="http://schemas.openxmlformats.org/officeDocument/2006/relationships" xmlns:p="http://schemas.openxmlformats.org/presentationml/2006/main">
   <p:cSld>
     <p:spTree>
@@ -38694,7 +36195,7 @@
 </p:sld>
 </file>
 
-<file path=ppt/slides/slide9.xml><?xml version="1.0" encoding="utf-8"?>
+<file path=ppt/slides/slide8.xml><?xml version="1.0" encoding="utf-8"?>
 <p:sld xmlns:a="http://schemas.openxmlformats.org/drawingml/2006/main" xmlns:r="http://schemas.openxmlformats.org/officeDocument/2006/relationships" xmlns:p="http://schemas.openxmlformats.org/presentationml/2006/main">
   <p:cSld>
     <p:spTree>
@@ -39409,6 +36910,777 @@
     <p:extLst>
       <p:ext uri="{BB962C8B-B14F-4D97-AF65-F5344CB8AC3E}">
         <p14:creationId xmlns:p14="http://schemas.microsoft.com/office/powerpoint/2010/main" val="2632722915"/>
+      </p:ext>
+    </p:extLst>
+  </p:cSld>
+  <p:clrMapOvr>
+    <a:masterClrMapping/>
+  </p:clrMapOvr>
+  <p:transition>
+    <p:fade/>
+  </p:transition>
+</p:sld>
+</file>
+
+<file path=ppt/slides/slide9.xml><?xml version="1.0" encoding="utf-8"?>
+<p:sld xmlns:a="http://schemas.openxmlformats.org/drawingml/2006/main" xmlns:r="http://schemas.openxmlformats.org/officeDocument/2006/relationships" xmlns:p="http://schemas.openxmlformats.org/presentationml/2006/main">
+  <p:cSld>
+    <p:spTree>
+      <p:nvGrpSpPr>
+        <p:cNvPr id="1" name="">
+          <a:extLst>
+            <a:ext uri="{FF2B5EF4-FFF2-40B4-BE49-F238E27FC236}">
+              <a16:creationId xmlns:a16="http://schemas.microsoft.com/office/drawing/2014/main" id="{99782830-F01E-94BA-E16A-B36FFA4692F7}"/>
+            </a:ext>
+          </a:extLst>
+        </p:cNvPr>
+        <p:cNvGrpSpPr/>
+        <p:nvPr/>
+      </p:nvGrpSpPr>
+      <p:grpSpPr>
+        <a:xfrm>
+          <a:off x="0" y="0"/>
+          <a:ext cx="0" cy="0"/>
+          <a:chOff x="0" y="0"/>
+          <a:chExt cx="0" cy="0"/>
+        </a:xfrm>
+      </p:grpSpPr>
+      <p:sp>
+        <p:nvSpPr>
+          <p:cNvPr id="2" name="Title 1">
+            <a:extLst>
+              <a:ext uri="{FF2B5EF4-FFF2-40B4-BE49-F238E27FC236}">
+                <a16:creationId xmlns:a16="http://schemas.microsoft.com/office/drawing/2014/main" id="{D421B248-D08C-724F-D33E-D7F4C428537C}"/>
+              </a:ext>
+            </a:extLst>
+          </p:cNvPr>
+          <p:cNvSpPr>
+            <a:spLocks noGrp="1"/>
+          </p:cNvSpPr>
+          <p:nvPr>
+            <p:ph type="title"/>
+          </p:nvPr>
+        </p:nvSpPr>
+        <p:spPr>
+          <a:xfrm>
+            <a:off x="612648" y="502920"/>
+            <a:ext cx="4669536" cy="1453896"/>
+          </a:xfrm>
+        </p:spPr>
+        <p:txBody>
+          <a:bodyPr anchor="t">
+            <a:normAutofit/>
+          </a:bodyPr>
+          <a:lstStyle/>
+          <a:p>
+            <a:r>
+              <a:rPr lang="en-US" sz="4400" dirty="0"/>
+              <a:t>Where does AI Belong?</a:t>
+            </a:r>
+          </a:p>
+        </p:txBody>
+      </p:sp>
+      <p:pic>
+        <p:nvPicPr>
+          <p:cNvPr id="5" name="Content Placeholder 4" descr="Abstract  Digital concept which shows network security optimization and internet technology  ">
+            <a:extLst>
+              <a:ext uri="{FF2B5EF4-FFF2-40B4-BE49-F238E27FC236}">
+                <a16:creationId xmlns:a16="http://schemas.microsoft.com/office/drawing/2014/main" id="{EA9ED319-250E-5821-DF7D-2458738CD738}"/>
+              </a:ext>
+            </a:extLst>
+          </p:cNvPr>
+          <p:cNvPicPr>
+            <a:picLocks noGrp="1" noChangeAspect="1"/>
+          </p:cNvPicPr>
+          <p:nvPr>
+            <p:ph type="pic" sz="quarter" idx="15"/>
+          </p:nvPr>
+        </p:nvPicPr>
+        <p:blipFill>
+          <a:blip r:embed="rId3"/>
+          <a:srcRect r="12979" b="-2"/>
+          <a:stretch>
+            <a:fillRect/>
+          </a:stretch>
+        </p:blipFill>
+        <p:spPr>
+          <a:xfrm>
+            <a:off x="612648" y="2293938"/>
+            <a:ext cx="4669536" cy="4024566"/>
+          </a:xfrm>
+          <a:prstGeom prst="rect">
+            <a:avLst/>
+          </a:prstGeom>
+          <a:noFill/>
+        </p:spPr>
+      </p:pic>
+      <p:sp>
+        <p:nvSpPr>
+          <p:cNvPr id="7" name="Rectangle 6">
+            <a:extLst>
+              <a:ext uri="{FF2B5EF4-FFF2-40B4-BE49-F238E27FC236}">
+                <a16:creationId xmlns:a16="http://schemas.microsoft.com/office/drawing/2014/main" id="{EA05639E-AC16-4352-44C4-A046ACCBEC69}"/>
+              </a:ext>
+            </a:extLst>
+          </p:cNvPr>
+          <p:cNvSpPr/>
+          <p:nvPr/>
+        </p:nvSpPr>
+        <p:spPr>
+          <a:xfrm>
+            <a:off x="5841635" y="2833641"/>
+            <a:ext cx="598636" cy="598636"/>
+          </a:xfrm>
+          <a:prstGeom prst="rect">
+            <a:avLst/>
+          </a:prstGeom>
+        </p:spPr>
+        <p:style>
+          <a:lnRef idx="2">
+            <a:schemeClr val="accent1">
+              <a:shade val="15000"/>
+            </a:schemeClr>
+          </a:lnRef>
+          <a:fillRef idx="1">
+            <a:schemeClr val="accent1"/>
+          </a:fillRef>
+          <a:effectRef idx="0">
+            <a:schemeClr val="accent1"/>
+          </a:effectRef>
+          <a:fontRef idx="minor">
+            <a:schemeClr val="lt1"/>
+          </a:fontRef>
+        </p:style>
+        <p:txBody>
+          <a:bodyPr rtlCol="0" anchor="ctr"/>
+          <a:lstStyle/>
+          <a:p>
+            <a:pPr algn="ctr"/>
+            <a:endParaRPr lang="en-US"/>
+          </a:p>
+        </p:txBody>
+      </p:sp>
+      <p:sp>
+        <p:nvSpPr>
+          <p:cNvPr id="9" name="Rectangle 8">
+            <a:extLst>
+              <a:ext uri="{FF2B5EF4-FFF2-40B4-BE49-F238E27FC236}">
+                <a16:creationId xmlns:a16="http://schemas.microsoft.com/office/drawing/2014/main" id="{4FCF5F1C-544C-1676-343A-4E21CAF49025}"/>
+              </a:ext>
+            </a:extLst>
+          </p:cNvPr>
+          <p:cNvSpPr/>
+          <p:nvPr/>
+        </p:nvSpPr>
+        <p:spPr>
+          <a:xfrm>
+            <a:off x="6609948" y="2833641"/>
+            <a:ext cx="166653" cy="598636"/>
+          </a:xfrm>
+          <a:prstGeom prst="rect">
+            <a:avLst/>
+          </a:prstGeom>
+          <a:solidFill>
+            <a:srgbClr val="FFC000"/>
+          </a:solidFill>
+        </p:spPr>
+        <p:style>
+          <a:lnRef idx="2">
+            <a:schemeClr val="accent1">
+              <a:shade val="15000"/>
+            </a:schemeClr>
+          </a:lnRef>
+          <a:fillRef idx="1">
+            <a:schemeClr val="accent1"/>
+          </a:fillRef>
+          <a:effectRef idx="0">
+            <a:schemeClr val="accent1"/>
+          </a:effectRef>
+          <a:fontRef idx="minor">
+            <a:schemeClr val="lt1"/>
+          </a:fontRef>
+        </p:style>
+        <p:txBody>
+          <a:bodyPr rtlCol="0" anchor="ctr"/>
+          <a:lstStyle/>
+          <a:p>
+            <a:pPr algn="ctr"/>
+            <a:endParaRPr lang="en-US"/>
+          </a:p>
+        </p:txBody>
+      </p:sp>
+      <p:sp>
+        <p:nvSpPr>
+          <p:cNvPr id="10" name="Rectangle 9">
+            <a:extLst>
+              <a:ext uri="{FF2B5EF4-FFF2-40B4-BE49-F238E27FC236}">
+                <a16:creationId xmlns:a16="http://schemas.microsoft.com/office/drawing/2014/main" id="{1E566B7E-05F9-E325-4DE5-94B5163AFCC1}"/>
+              </a:ext>
+            </a:extLst>
+          </p:cNvPr>
+          <p:cNvSpPr/>
+          <p:nvPr/>
+        </p:nvSpPr>
+        <p:spPr>
+          <a:xfrm>
+            <a:off x="6765638" y="2833641"/>
+            <a:ext cx="598636" cy="598636"/>
+          </a:xfrm>
+          <a:prstGeom prst="rect">
+            <a:avLst/>
+          </a:prstGeom>
+        </p:spPr>
+        <p:style>
+          <a:lnRef idx="2">
+            <a:schemeClr val="accent1">
+              <a:shade val="15000"/>
+            </a:schemeClr>
+          </a:lnRef>
+          <a:fillRef idx="1">
+            <a:schemeClr val="accent1"/>
+          </a:fillRef>
+          <a:effectRef idx="0">
+            <a:schemeClr val="accent1"/>
+          </a:effectRef>
+          <a:fontRef idx="minor">
+            <a:schemeClr val="lt1"/>
+          </a:fontRef>
+        </p:style>
+        <p:txBody>
+          <a:bodyPr rtlCol="0" anchor="ctr"/>
+          <a:lstStyle/>
+          <a:p>
+            <a:pPr algn="ctr"/>
+            <a:endParaRPr lang="en-US"/>
+          </a:p>
+        </p:txBody>
+      </p:sp>
+      <p:sp>
+        <p:nvSpPr>
+          <p:cNvPr id="13" name="Rectangle 12">
+            <a:extLst>
+              <a:ext uri="{FF2B5EF4-FFF2-40B4-BE49-F238E27FC236}">
+                <a16:creationId xmlns:a16="http://schemas.microsoft.com/office/drawing/2014/main" id="{08A58595-8BD7-F6FC-CF2B-53E78423B663}"/>
+              </a:ext>
+            </a:extLst>
+          </p:cNvPr>
+          <p:cNvSpPr/>
+          <p:nvPr/>
+        </p:nvSpPr>
+        <p:spPr>
+          <a:xfrm>
+            <a:off x="7697581" y="2830364"/>
+            <a:ext cx="598636" cy="598636"/>
+          </a:xfrm>
+          <a:prstGeom prst="rect">
+            <a:avLst/>
+          </a:prstGeom>
+        </p:spPr>
+        <p:style>
+          <a:lnRef idx="2">
+            <a:schemeClr val="accent1">
+              <a:shade val="15000"/>
+            </a:schemeClr>
+          </a:lnRef>
+          <a:fillRef idx="1">
+            <a:schemeClr val="accent1"/>
+          </a:fillRef>
+          <a:effectRef idx="0">
+            <a:schemeClr val="accent1"/>
+          </a:effectRef>
+          <a:fontRef idx="minor">
+            <a:schemeClr val="lt1"/>
+          </a:fontRef>
+        </p:style>
+        <p:txBody>
+          <a:bodyPr rtlCol="0" anchor="ctr"/>
+          <a:lstStyle/>
+          <a:p>
+            <a:pPr algn="ctr"/>
+            <a:endParaRPr lang="en-US"/>
+          </a:p>
+        </p:txBody>
+      </p:sp>
+      <p:sp>
+        <p:nvSpPr>
+          <p:cNvPr id="16" name="Rectangle 15">
+            <a:extLst>
+              <a:ext uri="{FF2B5EF4-FFF2-40B4-BE49-F238E27FC236}">
+                <a16:creationId xmlns:a16="http://schemas.microsoft.com/office/drawing/2014/main" id="{42180B80-32FB-70AC-DEE8-702FCD3F2EE7}"/>
+              </a:ext>
+            </a:extLst>
+          </p:cNvPr>
+          <p:cNvSpPr/>
+          <p:nvPr/>
+        </p:nvSpPr>
+        <p:spPr>
+          <a:xfrm>
+            <a:off x="8609749" y="2830364"/>
+            <a:ext cx="598636" cy="598636"/>
+          </a:xfrm>
+          <a:prstGeom prst="rect">
+            <a:avLst/>
+          </a:prstGeom>
+        </p:spPr>
+        <p:style>
+          <a:lnRef idx="2">
+            <a:schemeClr val="accent1">
+              <a:shade val="15000"/>
+            </a:schemeClr>
+          </a:lnRef>
+          <a:fillRef idx="1">
+            <a:schemeClr val="accent1"/>
+          </a:fillRef>
+          <a:effectRef idx="0">
+            <a:schemeClr val="accent1"/>
+          </a:effectRef>
+          <a:fontRef idx="minor">
+            <a:schemeClr val="lt1"/>
+          </a:fontRef>
+        </p:style>
+        <p:txBody>
+          <a:bodyPr rtlCol="0" anchor="ctr"/>
+          <a:lstStyle/>
+          <a:p>
+            <a:pPr algn="ctr"/>
+            <a:endParaRPr lang="en-US"/>
+          </a:p>
+        </p:txBody>
+      </p:sp>
+      <p:sp>
+        <p:nvSpPr>
+          <p:cNvPr id="3" name="Rectangle 2">
+            <a:extLst>
+              <a:ext uri="{FF2B5EF4-FFF2-40B4-BE49-F238E27FC236}">
+                <a16:creationId xmlns:a16="http://schemas.microsoft.com/office/drawing/2014/main" id="{115C6174-6D03-1098-2EAE-22E682750AA7}"/>
+              </a:ext>
+            </a:extLst>
+          </p:cNvPr>
+          <p:cNvSpPr/>
+          <p:nvPr/>
+        </p:nvSpPr>
+        <p:spPr>
+          <a:xfrm>
+            <a:off x="8454059" y="2830364"/>
+            <a:ext cx="166653" cy="598636"/>
+          </a:xfrm>
+          <a:prstGeom prst="rect">
+            <a:avLst/>
+          </a:prstGeom>
+          <a:solidFill>
+            <a:srgbClr val="FFC000"/>
+          </a:solidFill>
+        </p:spPr>
+        <p:style>
+          <a:lnRef idx="2">
+            <a:schemeClr val="accent1">
+              <a:shade val="15000"/>
+            </a:schemeClr>
+          </a:lnRef>
+          <a:fillRef idx="1">
+            <a:schemeClr val="accent1"/>
+          </a:fillRef>
+          <a:effectRef idx="0">
+            <a:schemeClr val="accent1"/>
+          </a:effectRef>
+          <a:fontRef idx="minor">
+            <a:schemeClr val="lt1"/>
+          </a:fontRef>
+        </p:style>
+        <p:txBody>
+          <a:bodyPr rtlCol="0" anchor="ctr"/>
+          <a:lstStyle/>
+          <a:p>
+            <a:pPr algn="ctr"/>
+            <a:endParaRPr lang="en-US"/>
+          </a:p>
+        </p:txBody>
+      </p:sp>
+      <p:sp>
+        <p:nvSpPr>
+          <p:cNvPr id="4" name="Rectangle 3">
+            <a:extLst>
+              <a:ext uri="{FF2B5EF4-FFF2-40B4-BE49-F238E27FC236}">
+                <a16:creationId xmlns:a16="http://schemas.microsoft.com/office/drawing/2014/main" id="{3792BC8D-CA06-7CF4-FE60-551183DF184A}"/>
+              </a:ext>
+            </a:extLst>
+          </p:cNvPr>
+          <p:cNvSpPr/>
+          <p:nvPr/>
+        </p:nvSpPr>
+        <p:spPr>
+          <a:xfrm>
+            <a:off x="7530928" y="2830364"/>
+            <a:ext cx="166653" cy="598636"/>
+          </a:xfrm>
+          <a:prstGeom prst="rect">
+            <a:avLst/>
+          </a:prstGeom>
+          <a:solidFill>
+            <a:srgbClr val="FFC000"/>
+          </a:solidFill>
+        </p:spPr>
+        <p:style>
+          <a:lnRef idx="2">
+            <a:schemeClr val="accent1">
+              <a:shade val="15000"/>
+            </a:schemeClr>
+          </a:lnRef>
+          <a:fillRef idx="1">
+            <a:schemeClr val="accent1"/>
+          </a:fillRef>
+          <a:effectRef idx="0">
+            <a:schemeClr val="accent1"/>
+          </a:effectRef>
+          <a:fontRef idx="minor">
+            <a:schemeClr val="lt1"/>
+          </a:fontRef>
+        </p:style>
+        <p:txBody>
+          <a:bodyPr rtlCol="0" anchor="ctr"/>
+          <a:lstStyle/>
+          <a:p>
+            <a:pPr algn="ctr"/>
+            <a:endParaRPr lang="en-US"/>
+          </a:p>
+        </p:txBody>
+      </p:sp>
+      <p:sp>
+        <p:nvSpPr>
+          <p:cNvPr id="6" name="Rectangle 5">
+            <a:extLst>
+              <a:ext uri="{FF2B5EF4-FFF2-40B4-BE49-F238E27FC236}">
+                <a16:creationId xmlns:a16="http://schemas.microsoft.com/office/drawing/2014/main" id="{40BE1336-FEEF-F163-4BEB-CF17080EBD21}"/>
+              </a:ext>
+            </a:extLst>
+          </p:cNvPr>
+          <p:cNvSpPr/>
+          <p:nvPr/>
+        </p:nvSpPr>
+        <p:spPr>
+          <a:xfrm>
+            <a:off x="9208386" y="2833641"/>
+            <a:ext cx="2611934" cy="598636"/>
+          </a:xfrm>
+          <a:prstGeom prst="rect">
+            <a:avLst/>
+          </a:prstGeom>
+          <a:noFill/>
+          <a:ln>
+            <a:prstDash val="sysDot"/>
+          </a:ln>
+        </p:spPr>
+        <p:style>
+          <a:lnRef idx="2">
+            <a:schemeClr val="accent1">
+              <a:shade val="15000"/>
+            </a:schemeClr>
+          </a:lnRef>
+          <a:fillRef idx="1">
+            <a:schemeClr val="accent1"/>
+          </a:fillRef>
+          <a:effectRef idx="0">
+            <a:schemeClr val="accent1"/>
+          </a:effectRef>
+          <a:fontRef idx="minor">
+            <a:schemeClr val="lt1"/>
+          </a:fontRef>
+        </p:style>
+        <p:txBody>
+          <a:bodyPr rtlCol="0" anchor="ctr"/>
+          <a:lstStyle/>
+          <a:p>
+            <a:pPr algn="ctr"/>
+            <a:endParaRPr lang="en-US" dirty="0"/>
+          </a:p>
+        </p:txBody>
+      </p:sp>
+      <p:sp>
+        <p:nvSpPr>
+          <p:cNvPr id="19" name="Rectangle 18">
+            <a:extLst>
+              <a:ext uri="{FF2B5EF4-FFF2-40B4-BE49-F238E27FC236}">
+                <a16:creationId xmlns:a16="http://schemas.microsoft.com/office/drawing/2014/main" id="{907DD57D-CFED-B13A-B8E4-8DB2438E59BF}"/>
+              </a:ext>
+            </a:extLst>
+          </p:cNvPr>
+          <p:cNvSpPr/>
+          <p:nvPr/>
+        </p:nvSpPr>
+        <p:spPr>
+          <a:xfrm>
+            <a:off x="5901451" y="3903790"/>
+            <a:ext cx="6007286" cy="2554545"/>
+          </a:xfrm>
+          <a:prstGeom prst="rect">
+            <a:avLst/>
+          </a:prstGeom>
+          <a:noFill/>
+        </p:spPr>
+        <p:txBody>
+          <a:bodyPr wrap="none" lIns="91440" tIns="45720" rIns="91440" bIns="45720">
+            <a:spAutoFit/>
+          </a:bodyPr>
+          <a:lstStyle/>
+          <a:p>
+            <a:pPr algn="ctr"/>
+            <a:r>
+              <a:rPr lang="en-US" sz="8000" b="1" cap="none" spc="0" dirty="0">
+                <a:ln w="22225">
+                  <a:solidFill>
+                    <a:schemeClr val="accent2"/>
+                  </a:solidFill>
+                  <a:prstDash val="solid"/>
+                </a:ln>
+                <a:solidFill>
+                  <a:schemeClr val="accent2">
+                    <a:lumMod val="40000"/>
+                    <a:lumOff val="60000"/>
+                  </a:schemeClr>
+                </a:solidFill>
+                <a:effectLst/>
+              </a:rPr>
+              <a:t>Better</a:t>
+            </a:r>
+          </a:p>
+          <a:p>
+            <a:pPr algn="ctr"/>
+            <a:r>
+              <a:rPr lang="en-US" sz="8000" b="1" dirty="0">
+                <a:ln w="22225">
+                  <a:solidFill>
+                    <a:schemeClr val="accent2"/>
+                  </a:solidFill>
+                  <a:prstDash val="solid"/>
+                </a:ln>
+                <a:solidFill>
+                  <a:schemeClr val="accent2">
+                    <a:lumMod val="40000"/>
+                    <a:lumOff val="60000"/>
+                  </a:schemeClr>
+                </a:solidFill>
+              </a:rPr>
+              <a:t>Compression</a:t>
+            </a:r>
+            <a:endParaRPr lang="en-US" sz="8000" b="1" cap="none" spc="0" dirty="0">
+              <a:ln w="22225">
+                <a:solidFill>
+                  <a:schemeClr val="accent2"/>
+                </a:solidFill>
+                <a:prstDash val="solid"/>
+              </a:ln>
+              <a:solidFill>
+                <a:schemeClr val="accent2">
+                  <a:lumMod val="40000"/>
+                  <a:lumOff val="60000"/>
+                </a:schemeClr>
+              </a:solidFill>
+              <a:effectLst/>
+            </a:endParaRPr>
+          </a:p>
+        </p:txBody>
+      </p:sp>
+      <p:sp>
+        <p:nvSpPr>
+          <p:cNvPr id="12" name="Rectangle 11">
+            <a:extLst>
+              <a:ext uri="{FF2B5EF4-FFF2-40B4-BE49-F238E27FC236}">
+                <a16:creationId xmlns:a16="http://schemas.microsoft.com/office/drawing/2014/main" id="{6DC513F4-E5AE-AED5-8A2A-879D571E154A}"/>
+              </a:ext>
+            </a:extLst>
+          </p:cNvPr>
+          <p:cNvSpPr/>
+          <p:nvPr/>
+        </p:nvSpPr>
+        <p:spPr>
+          <a:xfrm>
+            <a:off x="5544295" y="577650"/>
+            <a:ext cx="6385211" cy="1323439"/>
+          </a:xfrm>
+          <a:prstGeom prst="rect">
+            <a:avLst/>
+          </a:prstGeom>
+          <a:noFill/>
+        </p:spPr>
+        <p:txBody>
+          <a:bodyPr wrap="none" lIns="91440" tIns="45720" rIns="91440" bIns="45720">
+            <a:spAutoFit/>
+          </a:bodyPr>
+          <a:lstStyle/>
+          <a:p>
+            <a:pPr algn="ctr"/>
+            <a:r>
+              <a:rPr lang="en-US" sz="8000" b="1" cap="none" spc="0" dirty="0">
+                <a:ln w="22225">
+                  <a:solidFill>
+                    <a:schemeClr val="accent2"/>
+                  </a:solidFill>
+                  <a:prstDash val="solid"/>
+                </a:ln>
+                <a:solidFill>
+                  <a:schemeClr val="accent2">
+                    <a:lumMod val="40000"/>
+                    <a:lumOff val="60000"/>
+                  </a:schemeClr>
+                </a:solidFill>
+                <a:effectLst/>
+              </a:rPr>
+              <a:t>Better Context</a:t>
+            </a:r>
+          </a:p>
+        </p:txBody>
+      </p:sp>
+      <p:sp>
+        <p:nvSpPr>
+          <p:cNvPr id="15" name="Rectangle 14">
+            <a:extLst>
+              <a:ext uri="{FF2B5EF4-FFF2-40B4-BE49-F238E27FC236}">
+                <a16:creationId xmlns:a16="http://schemas.microsoft.com/office/drawing/2014/main" id="{29892087-EEDE-7865-BFDE-63391AFF6B0E}"/>
+              </a:ext>
+            </a:extLst>
+          </p:cNvPr>
+          <p:cNvSpPr/>
+          <p:nvPr/>
+        </p:nvSpPr>
+        <p:spPr>
+          <a:xfrm>
+            <a:off x="6440271" y="2833641"/>
+            <a:ext cx="166653" cy="598636"/>
+          </a:xfrm>
+          <a:prstGeom prst="rect">
+            <a:avLst/>
+          </a:prstGeom>
+          <a:solidFill>
+            <a:srgbClr val="FFC000"/>
+          </a:solidFill>
+        </p:spPr>
+        <p:style>
+          <a:lnRef idx="2">
+            <a:schemeClr val="accent1">
+              <a:shade val="15000"/>
+            </a:schemeClr>
+          </a:lnRef>
+          <a:fillRef idx="1">
+            <a:schemeClr val="accent1"/>
+          </a:fillRef>
+          <a:effectRef idx="0">
+            <a:schemeClr val="accent1"/>
+          </a:effectRef>
+          <a:fontRef idx="minor">
+            <a:schemeClr val="lt1"/>
+          </a:fontRef>
+        </p:style>
+        <p:txBody>
+          <a:bodyPr rtlCol="0" anchor="ctr"/>
+          <a:lstStyle/>
+          <a:p>
+            <a:pPr algn="ctr"/>
+            <a:endParaRPr lang="en-US"/>
+          </a:p>
+        </p:txBody>
+      </p:sp>
+      <p:sp>
+        <p:nvSpPr>
+          <p:cNvPr id="17" name="Rectangle 16">
+            <a:extLst>
+              <a:ext uri="{FF2B5EF4-FFF2-40B4-BE49-F238E27FC236}">
+                <a16:creationId xmlns:a16="http://schemas.microsoft.com/office/drawing/2014/main" id="{EAFE27EB-DE1E-EE43-5FA4-178F16780580}"/>
+              </a:ext>
+            </a:extLst>
+          </p:cNvPr>
+          <p:cNvSpPr/>
+          <p:nvPr/>
+        </p:nvSpPr>
+        <p:spPr>
+          <a:xfrm>
+            <a:off x="7364274" y="2830364"/>
+            <a:ext cx="166653" cy="598636"/>
+          </a:xfrm>
+          <a:prstGeom prst="rect">
+            <a:avLst/>
+          </a:prstGeom>
+          <a:solidFill>
+            <a:srgbClr val="FFC000"/>
+          </a:solidFill>
+        </p:spPr>
+        <p:style>
+          <a:lnRef idx="2">
+            <a:schemeClr val="accent1">
+              <a:shade val="15000"/>
+            </a:schemeClr>
+          </a:lnRef>
+          <a:fillRef idx="1">
+            <a:schemeClr val="accent1"/>
+          </a:fillRef>
+          <a:effectRef idx="0">
+            <a:schemeClr val="accent1"/>
+          </a:effectRef>
+          <a:fontRef idx="minor">
+            <a:schemeClr val="lt1"/>
+          </a:fontRef>
+        </p:style>
+        <p:txBody>
+          <a:bodyPr rtlCol="0" anchor="ctr"/>
+          <a:lstStyle/>
+          <a:p>
+            <a:pPr algn="ctr"/>
+            <a:endParaRPr lang="en-US"/>
+          </a:p>
+        </p:txBody>
+      </p:sp>
+      <p:sp>
+        <p:nvSpPr>
+          <p:cNvPr id="18" name="Rectangle 17">
+            <a:extLst>
+              <a:ext uri="{FF2B5EF4-FFF2-40B4-BE49-F238E27FC236}">
+                <a16:creationId xmlns:a16="http://schemas.microsoft.com/office/drawing/2014/main" id="{32B69063-A1AD-A03D-1D70-1A02A5AE111F}"/>
+              </a:ext>
+            </a:extLst>
+          </p:cNvPr>
+          <p:cNvSpPr/>
+          <p:nvPr/>
+        </p:nvSpPr>
+        <p:spPr>
+          <a:xfrm>
+            <a:off x="8288277" y="2830364"/>
+            <a:ext cx="166653" cy="598636"/>
+          </a:xfrm>
+          <a:prstGeom prst="rect">
+            <a:avLst/>
+          </a:prstGeom>
+          <a:solidFill>
+            <a:srgbClr val="FFC000"/>
+          </a:solidFill>
+        </p:spPr>
+        <p:style>
+          <a:lnRef idx="2">
+            <a:schemeClr val="accent1">
+              <a:shade val="15000"/>
+            </a:schemeClr>
+          </a:lnRef>
+          <a:fillRef idx="1">
+            <a:schemeClr val="accent1"/>
+          </a:fillRef>
+          <a:effectRef idx="0">
+            <a:schemeClr val="accent1"/>
+          </a:effectRef>
+          <a:fontRef idx="minor">
+            <a:schemeClr val="lt1"/>
+          </a:fontRef>
+        </p:style>
+        <p:txBody>
+          <a:bodyPr rtlCol="0" anchor="ctr"/>
+          <a:lstStyle/>
+          <a:p>
+            <a:pPr algn="ctr"/>
+            <a:endParaRPr lang="en-US"/>
+          </a:p>
+        </p:txBody>
+      </p:sp>
+    </p:spTree>
+    <p:extLst>
+      <p:ext uri="{BB962C8B-B14F-4D97-AF65-F5344CB8AC3E}">
+        <p14:creationId xmlns:p14="http://schemas.microsoft.com/office/powerpoint/2010/main" val="671516021"/>
       </p:ext>
     </p:extLst>
   </p:cSld>
